--- a/presentations/desk-tidy-weeks-7-8.pptx
+++ b/presentations/desk-tidy-weeks-7-8.pptx
@@ -2,20 +2,20 @@
 <file path=ppt/presentation.xml><?xml version="1.0" encoding="utf-8"?>
 <p:presentation xmlns:p="http://schemas.openxmlformats.org/presentationml/2006/main">
   <p:sldMasterIdLst>
-    <p:sldMasterId xmlns:r="http://schemas.openxmlformats.org/officeDocument/2006/relationships" id="2147483648" r:id="R45a1bdfdbac34276"/>
+    <p:sldMasterId xmlns:r="http://schemas.openxmlformats.org/officeDocument/2006/relationships" id="2147483648" r:id="R8ccc07cf3b8c4b6e"/>
   </p:sldMasterIdLst>
   <p:notesMasterIdLst>
-    <p:notesMasterId xmlns:r="http://schemas.openxmlformats.org/officeDocument/2006/relationships" r:id="R503857b063e64aa1"/>
+    <p:notesMasterId xmlns:r="http://schemas.openxmlformats.org/officeDocument/2006/relationships" r:id="Rfc4425eb145d4acb"/>
   </p:notesMasterIdLst>
   <p:sldIdLst>
-    <p:sldId xmlns:r="http://schemas.openxmlformats.org/officeDocument/2006/relationships" id="256" r:id="Ra53cc454af2b452e"/>
-    <p:sldId xmlns:r="http://schemas.openxmlformats.org/officeDocument/2006/relationships" id="257" r:id="R56a6bc8b873842b2"/>
-    <p:sldId xmlns:r="http://schemas.openxmlformats.org/officeDocument/2006/relationships" id="258" r:id="R756ee17359784f69"/>
-    <p:sldId xmlns:r="http://schemas.openxmlformats.org/officeDocument/2006/relationships" id="259" r:id="Rc9b7fe126a484bd4"/>
-    <p:sldId xmlns:r="http://schemas.openxmlformats.org/officeDocument/2006/relationships" id="260" r:id="R77aface94ca94b31"/>
-    <p:sldId xmlns:r="http://schemas.openxmlformats.org/officeDocument/2006/relationships" id="261" r:id="Rad4543a425d34b5b"/>
-    <p:sldId xmlns:r="http://schemas.openxmlformats.org/officeDocument/2006/relationships" id="262" r:id="R444f57a983dc4322"/>
-    <p:sldId xmlns:r="http://schemas.openxmlformats.org/officeDocument/2006/relationships" id="263" r:id="R6bfccfd684e345c1"/>
+    <p:sldId xmlns:r="http://schemas.openxmlformats.org/officeDocument/2006/relationships" id="256" r:id="R4c8a24c32dd9438b"/>
+    <p:sldId xmlns:r="http://schemas.openxmlformats.org/officeDocument/2006/relationships" id="257" r:id="R0cec549f5db94eb7"/>
+    <p:sldId xmlns:r="http://schemas.openxmlformats.org/officeDocument/2006/relationships" id="258" r:id="R0d33d33b62bc4eab"/>
+    <p:sldId xmlns:r="http://schemas.openxmlformats.org/officeDocument/2006/relationships" id="259" r:id="R65831307e2384b81"/>
+    <p:sldId xmlns:r="http://schemas.openxmlformats.org/officeDocument/2006/relationships" id="260" r:id="Rffcac168475242a0"/>
+    <p:sldId xmlns:r="http://schemas.openxmlformats.org/officeDocument/2006/relationships" id="261" r:id="Rb45dc6f6638f494f"/>
+    <p:sldId xmlns:r="http://schemas.openxmlformats.org/officeDocument/2006/relationships" id="262" r:id="R3ad603a5e4ec4d77"/>
+    <p:sldId xmlns:r="http://schemas.openxmlformats.org/officeDocument/2006/relationships" id="263" r:id="R52079a571ab84c83"/>
   </p:sldIdLst>
   <p:sldSz cx="12192000" cy="6858000"/>
   <p:notesSz cx="6858000" cy="9144000"/>
@@ -449,17 +449,22 @@
           <a:lstStyle xmlns:a="http://schemas.openxmlformats.org/drawingml/2006/main"/>
           <a:p xmlns:a="http://schemas.openxmlformats.org/drawingml/2006/main">
             <a:r>
+              <a:t>Open with the retrieval question. Accept tentative ideas, then direct students to the module theory.</a:t>
+            </a:r>
+          </a:p>
+          <a:p xmlns:a="http://schemas.openxmlformats.org/drawingml/2006/main">
+            <a:r>
+              <a:t/>
+            </a:r>
+          </a:p>
+          <a:p xmlns:a="http://schemas.openxmlformats.org/drawingml/2006/main">
+            <a:r>
               <a:t>[Sources]</a:t>
             </a:r>
           </a:p>
           <a:p xmlns:a="http://schemas.openxmlformats.org/drawingml/2006/main">
             <a:r>
-              <a:t>- Local course theory: weeks7-8/index.html</a:t>
-            </a:r>
-          </a:p>
-          <a:p xmlns:a="http://schemas.openxmlformats.org/drawingml/2006/main">
-            <a:r>
-              <a:t>[/Sources]</a:t>
+              <a:t>- assets/desk-tidy-reference.png</a:t>
             </a:r>
           </a:p>
         </p:txBody>
@@ -529,17 +534,22 @@
           <a:lstStyle xmlns:a="http://schemas.openxmlformats.org/drawingml/2006/main"/>
           <a:p xmlns:a="http://schemas.openxmlformats.org/drawingml/2006/main">
             <a:r>
+              <a:t>Preview the three named theory sections and tell students what evidence they will retain.</a:t>
+            </a:r>
+          </a:p>
+          <a:p xmlns:a="http://schemas.openxmlformats.org/drawingml/2006/main">
+            <a:r>
+              <a:t/>
+            </a:r>
+          </a:p>
+          <a:p xmlns:a="http://schemas.openxmlformats.org/drawingml/2006/main">
+            <a:r>
               <a:t>[Sources]</a:t>
             </a:r>
           </a:p>
           <a:p xmlns:a="http://schemas.openxmlformats.org/drawingml/2006/main">
             <a:r>
-              <a:t>- Local course theory: weeks7-8/index.html</a:t>
-            </a:r>
-          </a:p>
-          <a:p xmlns:a="http://schemas.openxmlformats.org/drawingml/2006/main">
-            <a:r>
-              <a:t>[/Sources]</a:t>
+              <a:t>- weeks7-8/index.html</a:t>
             </a:r>
           </a:p>
         </p:txBody>
@@ -609,17 +619,22 @@
           <a:lstStyle xmlns:a="http://schemas.openxmlformats.org/drawingml/2006/main"/>
           <a:p xmlns:a="http://schemas.openxmlformats.org/drawingml/2006/main">
             <a:r>
+              <a:t>Use the visual to explain the section. Ask students to connect each takeaway to the adjacent course theory; do not add unconfirmed practical details.</a:t>
+            </a:r>
+          </a:p>
+          <a:p xmlns:a="http://schemas.openxmlformats.org/drawingml/2006/main">
+            <a:r>
+              <a:t/>
+            </a:r>
+          </a:p>
+          <a:p xmlns:a="http://schemas.openxmlformats.org/drawingml/2006/main">
+            <a:r>
               <a:t>[Sources]</a:t>
             </a:r>
           </a:p>
           <a:p xmlns:a="http://schemas.openxmlformats.org/drawingml/2006/main">
             <a:r>
-              <a:t>- Local course theory: weeks7-8/index.html</a:t>
-            </a:r>
-          </a:p>
-          <a:p xmlns:a="http://schemas.openxmlformats.org/drawingml/2006/main">
-            <a:r>
-              <a:t>[/Sources]</a:t>
+              <a:t>- assets/tenon-saw.jpg</a:t>
             </a:r>
           </a:p>
         </p:txBody>
@@ -689,17 +704,22 @@
           <a:lstStyle xmlns:a="http://schemas.openxmlformats.org/drawingml/2006/main"/>
           <a:p xmlns:a="http://schemas.openxmlformats.org/drawingml/2006/main">
             <a:r>
+              <a:t>Use the visual to explain the section. Ask students to connect each takeaway to the adjacent course theory; do not add unconfirmed practical details.</a:t>
+            </a:r>
+          </a:p>
+          <a:p xmlns:a="http://schemas.openxmlformats.org/drawingml/2006/main">
+            <a:r>
+              <a:t/>
+            </a:r>
+          </a:p>
+          <a:p xmlns:a="http://schemas.openxmlformats.org/drawingml/2006/main">
+            <a:r>
               <a:t>[Sources]</a:t>
             </a:r>
           </a:p>
           <a:p xmlns:a="http://schemas.openxmlformats.org/drawingml/2006/main">
             <a:r>
-              <a:t>- Local course theory: weeks7-8/index.html</a:t>
-            </a:r>
-          </a:p>
-          <a:p xmlns:a="http://schemas.openxmlformats.org/drawingml/2006/main">
-            <a:r>
-              <a:t>[/Sources]</a:t>
+              <a:t>- assets/butt-joint.jpg</a:t>
             </a:r>
           </a:p>
         </p:txBody>
@@ -769,17 +789,22 @@
           <a:lstStyle xmlns:a="http://schemas.openxmlformats.org/drawingml/2006/main"/>
           <a:p xmlns:a="http://schemas.openxmlformats.org/drawingml/2006/main">
             <a:r>
+              <a:t>Use the visual to explain the section. Ask students to connect each takeaway to the adjacent course theory; do not add unconfirmed practical details.</a:t>
+            </a:r>
+          </a:p>
+          <a:p xmlns:a="http://schemas.openxmlformats.org/drawingml/2006/main">
+            <a:r>
+              <a:t/>
+            </a:r>
+          </a:p>
+          <a:p xmlns:a="http://schemas.openxmlformats.org/drawingml/2006/main">
+            <a:r>
               <a:t>[Sources]</a:t>
             </a:r>
           </a:p>
           <a:p xmlns:a="http://schemas.openxmlformats.org/drawingml/2006/main">
             <a:r>
-              <a:t>- Local course theory: weeks7-8/index.html</a:t>
-            </a:r>
-          </a:p>
-          <a:p xmlns:a="http://schemas.openxmlformats.org/drawingml/2006/main">
-            <a:r>
-              <a:t>[/Sources]</a:t>
+              <a:t>- assets/f-clamps.jpeg</a:t>
             </a:r>
           </a:p>
         </p:txBody>
@@ -849,17 +874,22 @@
           <a:lstStyle xmlns:a="http://schemas.openxmlformats.org/drawingml/2006/main"/>
           <a:p xmlns:a="http://schemas.openxmlformats.org/drawingml/2006/main">
             <a:r>
+              <a:t>Use this as a formative pause. Do not display or supply teacher-only answers.</a:t>
+            </a:r>
+          </a:p>
+          <a:p xmlns:a="http://schemas.openxmlformats.org/drawingml/2006/main">
+            <a:r>
+              <a:t/>
+            </a:r>
+          </a:p>
+          <a:p xmlns:a="http://schemas.openxmlformats.org/drawingml/2006/main">
+            <a:r>
               <a:t>[Sources]</a:t>
             </a:r>
           </a:p>
           <a:p xmlns:a="http://schemas.openxmlformats.org/drawingml/2006/main">
             <a:r>
-              <a:t>- Local course theory: weeks7-8/index.html</a:t>
-            </a:r>
-          </a:p>
-          <a:p xmlns:a="http://schemas.openxmlformats.org/drawingml/2006/main">
-            <a:r>
-              <a:t>[/Sources]</a:t>
+              <a:t>- weeks7-8/index.html</a:t>
             </a:r>
           </a:p>
         </p:txBody>
@@ -929,17 +959,22 @@
           <a:lstStyle xmlns:a="http://schemas.openxmlformats.org/drawingml/2006/main"/>
           <a:p xmlns:a="http://schemas.openxmlformats.org/drawingml/2006/main">
             <a:r>
+              <a:t>Model the response process without giving an answer to a live student question.</a:t>
+            </a:r>
+          </a:p>
+          <a:p xmlns:a="http://schemas.openxmlformats.org/drawingml/2006/main">
+            <a:r>
+              <a:t/>
+            </a:r>
+          </a:p>
+          <a:p xmlns:a="http://schemas.openxmlformats.org/drawingml/2006/main">
+            <a:r>
               <a:t>[Sources]</a:t>
             </a:r>
           </a:p>
           <a:p xmlns:a="http://schemas.openxmlformats.org/drawingml/2006/main">
             <a:r>
-              <a:t>- Local course theory: weeks7-8/index.html</a:t>
-            </a:r>
-          </a:p>
-          <a:p xmlns:a="http://schemas.openxmlformats.org/drawingml/2006/main">
-            <a:r>
-              <a:t>[/Sources]</a:t>
+              <a:t>- weeks7-8/index.html</a:t>
             </a:r>
           </a:p>
         </p:txBody>
@@ -1009,17 +1044,22 @@
           <a:lstStyle xmlns:a="http://schemas.openxmlformats.org/drawingml/2006/main"/>
           <a:p xmlns:a="http://schemas.openxmlformats.org/drawingml/2006/main">
             <a:r>
+              <a:t>Finish with a student response, then return to the course module for checks, written evidence and folio saving.</a:t>
+            </a:r>
+          </a:p>
+          <a:p xmlns:a="http://schemas.openxmlformats.org/drawingml/2006/main">
+            <a:r>
+              <a:t/>
+            </a:r>
+          </a:p>
+          <a:p xmlns:a="http://schemas.openxmlformats.org/drawingml/2006/main">
+            <a:r>
               <a:t>[Sources]</a:t>
             </a:r>
           </a:p>
           <a:p xmlns:a="http://schemas.openxmlformats.org/drawingml/2006/main">
             <a:r>
-              <a:t>- Local course theory: weeks7-8/index.html</a:t>
-            </a:r>
-          </a:p>
-          <a:p xmlns:a="http://schemas.openxmlformats.org/drawingml/2006/main">
-            <a:r>
-              <a:t>[/Sources]</a:t>
+              <a:t>- assets/desk-tidy-reference.png</a:t>
             </a:r>
           </a:p>
         </p:txBody>
@@ -1087,7 +1127,7 @@
   </p:cSld>
   <p:clrMap bg1="lt1" tx1="dk1" bg2="lt2" tx2="dk2" accent1="accent1" accent2="accent2" accent3="accent3" accent4="accent4" accent5="accent5" accent6="accent6" hlink="hlink" folHlink="folHlink"/>
   <p:sldLayoutIdLst>
-    <p:sldLayoutId xmlns:r="http://schemas.openxmlformats.org/officeDocument/2006/relationships" id="2147483649" r:id="Rf54afaba2f3b4170"/>
+    <p:sldLayoutId xmlns:r="http://schemas.openxmlformats.org/officeDocument/2006/relationships" id="2147483649" r:id="R5ef6bfd7f4064dde"/>
   </p:sldLayoutIdLst>
   <p:txStyles>
     <p:titleStyle>
@@ -1617,6 +1657,13 @@
 <file path=ppt/slides/slide1.xml><?xml version="1.0" encoding="utf-8"?>
 <p:sld xmlns:p="http://schemas.openxmlformats.org/presentationml/2006/main">
   <p:cSld>
+    <p:bg>
+      <p:bgPr>
+        <a:solidFill xmlns:a="http://schemas.openxmlformats.org/drawingml/2006/main">
+          <a:srgbClr val="F8F2E8"/>
+        </a:solidFill>
+      </p:bgPr>
+    </p:bg>
     <p:spTree>
       <p:nvGrpSpPr>
         <p:cNvPr id="1" name=""/>
@@ -1642,30 +1689,42 @@
         </p:nvSpPr>
         <p:spPr>
           <a:xfrm xmlns:a="http://schemas.openxmlformats.org/drawingml/2006/main">
-            <a:off x="393668" y="1738789"/>
-            <a:ext cx="9448800" cy="2491454"/>
+            <a:off x="590550" y="1238250"/>
+            <a:ext cx="4953000" cy="2190750"/>
           </a:xfrm>
           <a:prstGeom xmlns:a="http://schemas.openxmlformats.org/drawingml/2006/main" prst="rect">
             <a:avLst/>
           </a:prstGeom>
         </p:spPr>
         <p:txBody>
-          <a:bodyPr xmlns:a="http://schemas.openxmlformats.org/drawingml/2006/main" lIns="0" tIns="0" rIns="0" bIns="0" anchor="b">
-            <a:noAutofit/>
+          <a:bodyPr xmlns:a="http://schemas.openxmlformats.org/drawingml/2006/main" lIns="38100" tIns="38100" rIns="38100" bIns="38100" anchor="ctr">
+            <a:normAutofit fontScale="100000"/>
           </a:bodyPr>
           <a:lstStyle xmlns:a="http://schemas.openxmlformats.org/drawingml/2006/main"/>
           <a:p xmlns:a="http://schemas.openxmlformats.org/drawingml/2006/main">
             <a:pPr algn="l">
-              <a:defRPr sz="6000">
-                <a:solidFill>
-                  <a:srgbClr val="000000"/>
-                </a:solidFill>
-                <a:latin typeface="Helvetica Neue"/>
-                <a:ea typeface="Helvetica Neue"/>
-                <a:cs typeface="Helvetica Neue"/>
-              </a:defRPr>
-            </a:pPr>
-            <a:r>
+              <a:lnSpc>
+                <a:spcPct val="105000"/>
+              </a:lnSpc>
+              <a:buNone/>
+              <a:defRPr sz="5000" b="1">
+                <a:solidFill>
+                  <a:srgbClr val="173126"/>
+                </a:solidFill>
+                <a:latin typeface="Aptos"/>
+                <a:ea typeface="Aptos"/>
+                <a:cs typeface="Aptos"/>
+              </a:defRPr>
+            </a:pPr>
+            <a:r>
+              <a:rPr sz="5000" b="1">
+                <a:solidFill>
+                  <a:srgbClr val="173126"/>
+                </a:solidFill>
+                <a:latin typeface="Aptos"/>
+                <a:ea typeface="Aptos"/>
+                <a:cs typeface="Aptos"/>
+              </a:rPr>
               <a:t>Produce and assemble safely</a:t>
             </a:r>
           </a:p>
@@ -1687,30 +1746,42 @@
         </p:nvSpPr>
         <p:spPr>
           <a:xfrm xmlns:a="http://schemas.openxmlformats.org/drawingml/2006/main">
-            <a:off x="393668" y="4742212"/>
-            <a:ext cx="5702332" cy="1080230"/>
+            <a:off x="628650" y="3571875"/>
+            <a:ext cx="4762500" cy="1066800"/>
           </a:xfrm>
           <a:prstGeom xmlns:a="http://schemas.openxmlformats.org/drawingml/2006/main" prst="rect">
             <a:avLst/>
           </a:prstGeom>
         </p:spPr>
         <p:txBody>
-          <a:bodyPr xmlns:a="http://schemas.openxmlformats.org/drawingml/2006/main" lIns="0" tIns="0" rIns="0" bIns="0">
-            <a:noAutofit/>
+          <a:bodyPr xmlns:a="http://schemas.openxmlformats.org/drawingml/2006/main" lIns="38100" tIns="38100" rIns="38100" bIns="38100" anchor="t">
+            <a:normAutofit fontScale="100000"/>
           </a:bodyPr>
           <a:lstStyle xmlns:a="http://schemas.openxmlformats.org/drawingml/2006/main"/>
           <a:p xmlns:a="http://schemas.openxmlformats.org/drawingml/2006/main">
             <a:pPr algn="l">
-              <a:defRPr sz="2400">
-                <a:solidFill>
-                  <a:srgbClr val="000000"/>
-                </a:solidFill>
-                <a:latin typeface="Helvetica Neue"/>
-                <a:ea typeface="Helvetica Neue"/>
-                <a:cs typeface="Helvetica Neue"/>
-              </a:defRPr>
-            </a:pPr>
-            <a:r>
+              <a:lnSpc>
+                <a:spcPct val="115000"/>
+              </a:lnSpc>
+              <a:buNone/>
+              <a:defRPr sz="2000" b="0">
+                <a:solidFill>
+                  <a:srgbClr val="5A665F"/>
+                </a:solidFill>
+                <a:latin typeface="Aptos"/>
+                <a:ea typeface="Aptos"/>
+                <a:cs typeface="Aptos"/>
+              </a:defRPr>
+            </a:pPr>
+            <a:r>
+              <a:rPr sz="2000" b="0">
+                <a:solidFill>
+                  <a:srgbClr val="5A665F"/>
+                </a:solidFill>
+                <a:latin typeface="Aptos"/>
+                <a:ea typeface="Aptos"/>
+                <a:cs typeface="Aptos"/>
+              </a:rPr>
               <a:t>Read the theory, check your understanding and save your own evidence.</a:t>
             </a:r>
           </a:p>
@@ -1732,31 +1803,192 @@
         </p:nvSpPr>
         <p:spPr>
           <a:xfrm xmlns:a="http://schemas.openxmlformats.org/drawingml/2006/main">
-            <a:off x="393668" y="392240"/>
-            <a:ext cx="5702332" cy="649129"/>
+            <a:off x="628650" y="781050"/>
+            <a:ext cx="4381500" cy="266700"/>
           </a:xfrm>
           <a:prstGeom xmlns:a="http://schemas.openxmlformats.org/drawingml/2006/main" prst="rect">
             <a:avLst/>
           </a:prstGeom>
         </p:spPr>
         <p:txBody>
-          <a:bodyPr xmlns:a="http://schemas.openxmlformats.org/drawingml/2006/main" lIns="0" tIns="0" rIns="0" bIns="0">
-            <a:noAutofit/>
+          <a:bodyPr xmlns:a="http://schemas.openxmlformats.org/drawingml/2006/main" lIns="38100" tIns="38100" rIns="38100" bIns="38100" anchor="t">
+            <a:normAutofit fontScale="85034"/>
           </a:bodyPr>
           <a:lstStyle xmlns:a="http://schemas.openxmlformats.org/drawingml/2006/main"/>
           <a:p xmlns:a="http://schemas.openxmlformats.org/drawingml/2006/main">
             <a:pPr algn="l">
-              <a:defRPr sz="2400">
-                <a:solidFill>
-                  <a:srgbClr val="000000"/>
-                </a:solidFill>
-                <a:latin typeface="Helvetica Neue"/>
-                <a:ea typeface="Helvetica Neue"/>
-                <a:cs typeface="Helvetica Neue"/>
-              </a:defRPr>
-            </a:pPr>
-            <a:r>
-              <a:t>DESK TIDY · Weeks 7–8</a:t>
+              <a:lnSpc>
+                <a:spcPct val="105000"/>
+              </a:lnSpc>
+              <a:buNone/>
+              <a:defRPr sz="1400" b="1">
+                <a:solidFill>
+                  <a:srgbClr val="D8941C"/>
+                </a:solidFill>
+                <a:latin typeface="Aptos"/>
+                <a:ea typeface="Aptos"/>
+                <a:cs typeface="Aptos"/>
+              </a:defRPr>
+            </a:pPr>
+            <a:r>
+              <a:rPr sz="1400" b="1">
+                <a:solidFill>
+                  <a:srgbClr val="D8941C"/>
+                </a:solidFill>
+                <a:latin typeface="Aptos"/>
+                <a:ea typeface="Aptos"/>
+                <a:cs typeface="Aptos"/>
+              </a:rPr>
+              <a:t>DESK TIDY · WEEKS 7-8</a:t>
+            </a:r>
+          </a:p>
+        </p:txBody>
+      </p:sp>
+      <p:sp>
+        <p:nvSpPr>
+          <p:cNvPr id="5" name="">
+            <a:extLst xmlns:a="http://schemas.openxmlformats.org/drawingml/2006/main">
+              <a:ext uri="{FF2B5EF4-FFF2-40B4-BE49-F238E27FC236}">
+                <a16:creationId xmlns:a16="http://schemas.microsoft.com/office/drawing/2014/main" id="{520B87C8-10DD-40F6-BABD-21860835BF99}"/>
+              </a:ext>
+            </a:extLst>
+          </p:cNvPr>
+          <p:cNvSpPr>
+            <a:spLocks xmlns:a="http://schemas.openxmlformats.org/drawingml/2006/main" noGrp="1"/>
+          </p:cNvSpPr>
+          <p:nvPr/>
+        </p:nvSpPr>
+        <p:spPr>
+          <a:xfrm xmlns:a="http://schemas.openxmlformats.org/drawingml/2006/main">
+            <a:off x="5857875" y="438150"/>
+            <a:ext cx="5810250" cy="5676900"/>
+          </a:xfrm>
+          <a:prstGeom xmlns:a="http://schemas.openxmlformats.org/drawingml/2006/main" prst="roundRect">
+            <a:avLst>
+              <a:gd name="adj" fmla="val 2013"/>
+            </a:avLst>
+          </a:prstGeom>
+          <a:noFill xmlns:a="http://schemas.openxmlformats.org/drawingml/2006/main"/>
+          <a:ln xmlns:a="http://schemas.openxmlformats.org/drawingml/2006/main" w="9525">
+            <a:solidFill>
+              <a:srgbClr val="D8941C"/>
+            </a:solidFill>
+            <a:prstDash val="solid"/>
+          </a:ln>
+        </p:spPr>
+      </p:sp>
+      <p:pic>
+        <p:nvPicPr>
+          <p:cNvPr id="12" name=""/>
+          <p:cNvPicPr>
+            <a:picLocks xmlns:a="http://schemas.openxmlformats.org/drawingml/2006/main" noChangeAspect="1"/>
+          </p:cNvPicPr>
+          <p:nvPr/>
+        </p:nvPicPr>
+        <p:blipFill>
+          <a:blip xmlns:r="http://schemas.openxmlformats.org/officeDocument/2006/relationships" xmlns:a="http://schemas.openxmlformats.org/drawingml/2006/main" r:embed="R25bb7b828dbc444f"/>
+          <a:srcRect xmlns:a="http://schemas.openxmlformats.org/drawingml/2006/main" l="0" t="1228" r="0" b="1228"/>
+          <a:stretch xmlns:a="http://schemas.openxmlformats.org/drawingml/2006/main">
+            <a:fillRect l="0" t="0" r="0" b="0"/>
+          </a:stretch>
+        </p:blipFill>
+        <p:spPr>
+          <a:xfrm xmlns:a="http://schemas.openxmlformats.org/drawingml/2006/main">
+            <a:off x="6048375" y="628650"/>
+            <a:ext cx="5429250" cy="5295900"/>
+          </a:xfrm>
+          <a:prstGeom xmlns:a="http://schemas.openxmlformats.org/drawingml/2006/main" prst="roundRect">
+            <a:avLst>
+              <a:gd name="adj" fmla="val 2158"/>
+            </a:avLst>
+          </a:prstGeom>
+        </p:spPr>
+      </p:pic>
+      <p:sp>
+        <p:nvSpPr>
+          <p:cNvPr id="7" name="">
+            <a:extLst xmlns:a="http://schemas.openxmlformats.org/drawingml/2006/main">
+              <a:ext uri="{FF2B5EF4-FFF2-40B4-BE49-F238E27FC236}">
+                <a16:creationId xmlns:a16="http://schemas.microsoft.com/office/drawing/2014/main" id="{D80CEF56-094E-433F-8C4D-40ED08B0E959}"/>
+              </a:ext>
+            </a:extLst>
+          </p:cNvPr>
+          <p:cNvSpPr>
+            <a:spLocks xmlns:a="http://schemas.openxmlformats.org/drawingml/2006/main" noGrp="1"/>
+          </p:cNvSpPr>
+          <p:nvPr/>
+        </p:nvSpPr>
+        <p:spPr>
+          <a:xfrm xmlns:a="http://schemas.openxmlformats.org/drawingml/2006/main">
+            <a:off x="628650" y="4953000"/>
+            <a:ext cx="4762500" cy="876300"/>
+          </a:xfrm>
+          <a:prstGeom xmlns:a="http://schemas.openxmlformats.org/drawingml/2006/main" prst="rect">
+            <a:avLst/>
+          </a:prstGeom>
+          <a:noFill xmlns:a="http://schemas.openxmlformats.org/drawingml/2006/main"/>
+          <a:ln xmlns:a="http://schemas.openxmlformats.org/drawingml/2006/main" w="0">
+            <a:noFill/>
+            <a:prstDash val="solid"/>
+          </a:ln>
+        </p:spPr>
+        <p:txBody>
+          <a:bodyPr xmlns:a="http://schemas.openxmlformats.org/drawingml/2006/main" lIns="38100" tIns="38100" rIns="38100" bIns="38100" anchor="ctr">
+            <a:normAutofit fontScale="92593"/>
+          </a:bodyPr>
+          <a:lstStyle xmlns:a="http://schemas.openxmlformats.org/drawingml/2006/main"/>
+          <a:p xmlns:a="http://schemas.openxmlformats.org/drawingml/2006/main">
+            <a:pPr algn="l">
+              <a:lnSpc>
+                <a:spcPct val="105000"/>
+              </a:lnSpc>
+              <a:buNone/>
+              <a:defRPr sz="1800" b="0">
+                <a:solidFill>
+                  <a:srgbClr val="173126"/>
+                </a:solidFill>
+                <a:latin typeface="Aptos"/>
+                <a:ea typeface="Aptos"/>
+                <a:cs typeface="Aptos"/>
+              </a:defRPr>
+            </a:pPr>
+            <a:r>
+              <a:rPr sz="1800" b="0">
+                <a:solidFill>
+                  <a:srgbClr val="173126"/>
+                </a:solidFill>
+                <a:latin typeface="Aptos"/>
+                <a:ea typeface="Aptos"/>
+                <a:cs typeface="Aptos"/>
+              </a:rPr>
+              <a:t>BEFORE YOU BEGIN</a:t>
+            </a:r>
+          </a:p>
+          <a:p xmlns:a="http://schemas.openxmlformats.org/drawingml/2006/main">
+            <a:pPr algn="l">
+              <a:lnSpc>
+                <a:spcPct val="105000"/>
+              </a:lnSpc>
+              <a:buNone/>
+              <a:defRPr sz="1800" b="0">
+                <a:solidFill>
+                  <a:srgbClr val="173126"/>
+                </a:solidFill>
+                <a:latin typeface="Aptos"/>
+                <a:ea typeface="Aptos"/>
+                <a:cs typeface="Aptos"/>
+              </a:defRPr>
+            </a:pPr>
+            <a:r>
+              <a:rPr sz="1800" b="0">
+                <a:solidFill>
+                  <a:srgbClr val="173126"/>
+                </a:solidFill>
+                <a:latin typeface="Aptos"/>
+                <a:ea typeface="Aptos"/>
+                <a:cs typeface="Aptos"/>
+              </a:rPr>
+              <a:t>What do you already know—and what evidence would prove it?</a:t>
             </a:r>
           </a:p>
         </p:txBody>
@@ -1774,6 +2006,13 @@
 <file path=ppt/slides/slide2.xml><?xml version="1.0" encoding="utf-8"?>
 <p:sld xmlns:p="http://schemas.openxmlformats.org/presentationml/2006/main">
   <p:cSld>
+    <p:bg>
+      <p:bgPr>
+        <a:solidFill xmlns:a="http://schemas.openxmlformats.org/drawingml/2006/main">
+          <a:srgbClr val="F8F2E8"/>
+        </a:solidFill>
+      </p:bgPr>
+    </p:bg>
     <p:spTree>
       <p:nvGrpSpPr>
         <p:cNvPr id="1" name=""/>
@@ -1799,19 +2038,441 @@
         </p:nvSpPr>
         <p:spPr>
           <a:xfrm xmlns:a="http://schemas.openxmlformats.org/drawingml/2006/main">
-            <a:off x="11279315" y="6279261"/>
-            <a:ext cx="518922" cy="241268"/>
+            <a:off x="11334750" y="6496050"/>
+            <a:ext cx="400050" cy="190500"/>
           </a:xfrm>
           <a:prstGeom xmlns:a="http://schemas.openxmlformats.org/drawingml/2006/main" prst="rect">
             <a:avLst/>
           </a:prstGeom>
         </p:spPr>
         <p:txBody>
-          <a:bodyPr xmlns:a="http://schemas.openxmlformats.org/drawingml/2006/main" lIns="0" tIns="0" rIns="0" bIns="0" anchor="b"/>
+          <a:bodyPr xmlns:a="http://schemas.openxmlformats.org/drawingml/2006/main" lIns="38100" tIns="38100" rIns="38100" bIns="38100" anchor="ctr">
+            <a:normAutofit fontScale="64935"/>
+          </a:bodyPr>
           <a:lstStyle xmlns:a="http://schemas.openxmlformats.org/drawingml/2006/main"/>
           <a:p xmlns:a="http://schemas.openxmlformats.org/drawingml/2006/main">
             <a:pPr algn="r">
-              <a:defRPr sz="1000">
+              <a:lnSpc>
+                <a:spcPct val="105000"/>
+              </a:lnSpc>
+              <a:buNone/>
+              <a:defRPr sz="1100" b="1">
+                <a:solidFill>
+                  <a:srgbClr val="5A665F"/>
+                </a:solidFill>
+                <a:latin typeface="Aptos"/>
+                <a:ea typeface="Aptos"/>
+                <a:cs typeface="Aptos"/>
+              </a:defRPr>
+            </a:pPr>
+            <a:r>
+              <a:rPr sz="1100" b="1">
+                <a:solidFill>
+                  <a:srgbClr val="5A665F"/>
+                </a:solidFill>
+                <a:latin typeface="Aptos"/>
+                <a:ea typeface="Aptos"/>
+                <a:cs typeface="Aptos"/>
+              </a:rPr>
+              <a:t>2</a:t>
+            </a:r>
+          </a:p>
+        </p:txBody>
+      </p:sp>
+      <p:sp>
+        <p:nvSpPr>
+          <p:cNvPr id="2" name="Title-10-3">
+            <a:extLst xmlns:a="http://schemas.openxmlformats.org/drawingml/2006/main">
+              <a:ext uri="{FF2B5EF4-FFF2-40B4-BE49-F238E27FC236}">
+                <a16:creationId xmlns:a16="http://schemas.microsoft.com/office/drawing/2014/main" id="{A0B5DBAF-3095-4071-869E-B07CDD3704FA}"/>
+              </a:ext>
+            </a:extLst>
+          </p:cNvPr>
+          <p:cNvSpPr>
+            <a:spLocks xmlns:a="http://schemas.openxmlformats.org/drawingml/2006/main" noGrp="1"/>
+          </p:cNvSpPr>
+          <p:nvPr/>
+        </p:nvSpPr>
+        <p:spPr>
+          <a:xfrm xmlns:a="http://schemas.openxmlformats.org/drawingml/2006/main">
+            <a:off x="571500" y="514350"/>
+            <a:ext cx="10477500" cy="666750"/>
+          </a:xfrm>
+          <a:prstGeom xmlns:a="http://schemas.openxmlformats.org/drawingml/2006/main" prst="rect">
+            <a:avLst/>
+          </a:prstGeom>
+        </p:spPr>
+        <p:txBody>
+          <a:bodyPr xmlns:a="http://schemas.openxmlformats.org/drawingml/2006/main" lIns="38100" tIns="38100" rIns="38100" bIns="38100" anchor="t">
+            <a:normAutofit fontScale="100000"/>
+          </a:bodyPr>
+          <a:lstStyle xmlns:a="http://schemas.openxmlformats.org/drawingml/2006/main"/>
+          <a:p xmlns:a="http://schemas.openxmlformats.org/drawingml/2006/main">
+            <a:pPr algn="l">
+              <a:lnSpc>
+                <a:spcPct val="105000"/>
+              </a:lnSpc>
+              <a:buNone/>
+              <a:defRPr sz="3600" b="1">
+                <a:solidFill>
+                  <a:srgbClr val="173126"/>
+                </a:solidFill>
+                <a:latin typeface="Aptos"/>
+                <a:ea typeface="Aptos"/>
+                <a:cs typeface="Aptos"/>
+              </a:defRPr>
+            </a:pPr>
+            <a:r>
+              <a:rPr sz="3600" b="1">
+                <a:solidFill>
+                  <a:srgbClr val="173126"/>
+                </a:solidFill>
+                <a:latin typeface="Aptos"/>
+                <a:ea typeface="Aptos"/>
+                <a:cs typeface="Aptos"/>
+              </a:rPr>
+              <a:t>Three ideas build one evidence trail</a:t>
+            </a:r>
+          </a:p>
+        </p:txBody>
+      </p:sp>
+      <p:cxnSp>
+        <p:nvCxnSpPr>
+          <p:cNvPr id="25" name="Google-Shape-2259-p159-4"/>
+          <p:cNvCxnSpPr/>
+          <p:nvPr/>
+        </p:nvCxnSpPr>
+        <p:spPr>
+          <a:xfrm xmlns:a="http://schemas.openxmlformats.org/drawingml/2006/main">
+            <a:off x="0" y="0"/>
+            <a:ext cx="9525" cy="9525"/>
+          </a:xfrm>
+          <a:prstGeom xmlns:a="http://schemas.openxmlformats.org/drawingml/2006/main" prst="straightConnector1">
+            <a:avLst/>
+          </a:prstGeom>
+          <a:ln xmlns:a="http://schemas.openxmlformats.org/drawingml/2006/main" w="0">
+            <a:noFill/>
+            <a:prstDash val="solid"/>
+          </a:ln>
+        </p:spPr>
+      </p:cxnSp>
+      <p:sp>
+        <p:nvSpPr>
+          <p:cNvPr id="4" name="Google-Shape-2260-p159-5">
+            <a:extLst xmlns:a="http://schemas.openxmlformats.org/drawingml/2006/main">
+              <a:ext uri="{FF2B5EF4-FFF2-40B4-BE49-F238E27FC236}">
+                <a16:creationId xmlns:a16="http://schemas.microsoft.com/office/drawing/2014/main" id="{EDB82C42-D1EE-4C2F-88ED-1BA1C8BFB6B5}"/>
+              </a:ext>
+            </a:extLst>
+          </p:cNvPr>
+          <p:cNvSpPr>
+            <a:spLocks xmlns:a="http://schemas.openxmlformats.org/drawingml/2006/main" noGrp="1"/>
+          </p:cNvSpPr>
+          <p:nvPr/>
+        </p:nvSpPr>
+        <p:spPr>
+          <a:xfrm xmlns:a="http://schemas.openxmlformats.org/drawingml/2006/main">
+            <a:off x="0" y="0"/>
+            <a:ext cx="9525" cy="9525"/>
+          </a:xfrm>
+          <a:prstGeom xmlns:a="http://schemas.openxmlformats.org/drawingml/2006/main" prst="ellipse">
+            <a:avLst/>
+          </a:prstGeom>
+          <a:noFill xmlns:a="http://schemas.openxmlformats.org/drawingml/2006/main"/>
+          <a:ln xmlns:a="http://schemas.openxmlformats.org/drawingml/2006/main" w="0">
+            <a:noFill/>
+            <a:prstDash val="solid"/>
+          </a:ln>
+        </p:spPr>
+      </p:sp>
+      <p:sp>
+        <p:nvSpPr>
+          <p:cNvPr id="5" name="Google-Shape-2261-p159-6">
+            <a:extLst xmlns:a="http://schemas.openxmlformats.org/drawingml/2006/main">
+              <a:ext uri="{FF2B5EF4-FFF2-40B4-BE49-F238E27FC236}">
+                <a16:creationId xmlns:a16="http://schemas.microsoft.com/office/drawing/2014/main" id="{ACCB60D8-5738-4F23-9BF6-90E0DC2A708C}"/>
+              </a:ext>
+            </a:extLst>
+          </p:cNvPr>
+          <p:cNvSpPr>
+            <a:spLocks xmlns:a="http://schemas.openxmlformats.org/drawingml/2006/main" noGrp="1"/>
+          </p:cNvSpPr>
+          <p:nvPr/>
+        </p:nvSpPr>
+        <p:spPr>
+          <a:xfrm xmlns:a="http://schemas.openxmlformats.org/drawingml/2006/main">
+            <a:off x="0" y="0"/>
+            <a:ext cx="9525" cy="9525"/>
+          </a:xfrm>
+          <a:prstGeom xmlns:a="http://schemas.openxmlformats.org/drawingml/2006/main" prst="ellipse">
+            <a:avLst/>
+          </a:prstGeom>
+          <a:noFill xmlns:a="http://schemas.openxmlformats.org/drawingml/2006/main"/>
+          <a:ln xmlns:a="http://schemas.openxmlformats.org/drawingml/2006/main" w="0">
+            <a:noFill/>
+            <a:prstDash val="solid"/>
+          </a:ln>
+        </p:spPr>
+      </p:sp>
+      <p:sp>
+        <p:nvSpPr>
+          <p:cNvPr id="6" name="Google-Shape-2262-p159-7">
+            <a:extLst xmlns:a="http://schemas.openxmlformats.org/drawingml/2006/main">
+              <a:ext uri="{FF2B5EF4-FFF2-40B4-BE49-F238E27FC236}">
+                <a16:creationId xmlns:a16="http://schemas.microsoft.com/office/drawing/2014/main" id="{2279DF5D-CE46-4325-81E0-6AC899D6066D}"/>
+              </a:ext>
+            </a:extLst>
+          </p:cNvPr>
+          <p:cNvSpPr>
+            <a:spLocks xmlns:a="http://schemas.openxmlformats.org/drawingml/2006/main" noGrp="1"/>
+          </p:cNvSpPr>
+          <p:nvPr/>
+        </p:nvSpPr>
+        <p:spPr>
+          <a:xfrm xmlns:a="http://schemas.openxmlformats.org/drawingml/2006/main">
+            <a:off x="0" y="0"/>
+            <a:ext cx="9525" cy="9525"/>
+          </a:xfrm>
+          <a:prstGeom xmlns:a="http://schemas.openxmlformats.org/drawingml/2006/main" prst="ellipse">
+            <a:avLst/>
+          </a:prstGeom>
+          <a:noFill xmlns:a="http://schemas.openxmlformats.org/drawingml/2006/main"/>
+          <a:ln xmlns:a="http://schemas.openxmlformats.org/drawingml/2006/main" w="0">
+            <a:noFill/>
+            <a:prstDash val="solid"/>
+          </a:ln>
+        </p:spPr>
+      </p:sp>
+      <p:sp>
+        <p:nvSpPr>
+          <p:cNvPr id="7" name="Content-Placeholder-15-8">
+            <a:extLst xmlns:a="http://schemas.openxmlformats.org/drawingml/2006/main">
+              <a:ext uri="{FF2B5EF4-FFF2-40B4-BE49-F238E27FC236}">
+                <a16:creationId xmlns:a16="http://schemas.microsoft.com/office/drawing/2014/main" id="{34A527B4-C0B5-47D1-AD66-97A5C12C4E33}"/>
+              </a:ext>
+            </a:extLst>
+          </p:cNvPr>
+          <p:cNvSpPr>
+            <a:spLocks xmlns:a="http://schemas.openxmlformats.org/drawingml/2006/main" noGrp="1"/>
+          </p:cNvSpPr>
+          <p:nvPr/>
+        </p:nvSpPr>
+        <p:spPr>
+          <a:xfrm xmlns:a="http://schemas.openxmlformats.org/drawingml/2006/main">
+            <a:off x="933450" y="2171700"/>
+            <a:ext cx="666750" cy="571500"/>
+          </a:xfrm>
+          <a:prstGeom xmlns:a="http://schemas.openxmlformats.org/drawingml/2006/main" prst="rect">
+            <a:avLst/>
+          </a:prstGeom>
+        </p:spPr>
+        <p:txBody>
+          <a:bodyPr xmlns:a="http://schemas.openxmlformats.org/drawingml/2006/main" lIns="38100" tIns="38100" rIns="38100" bIns="38100" anchor="t">
+            <a:normAutofit fontScale="100000"/>
+          </a:bodyPr>
+          <a:lstStyle xmlns:a="http://schemas.openxmlformats.org/drawingml/2006/main"/>
+          <a:p xmlns:a="http://schemas.openxmlformats.org/drawingml/2006/main">
+            <a:pPr algn="l">
+              <a:lnSpc>
+                <a:spcPct val="105000"/>
+              </a:lnSpc>
+              <a:buNone/>
+              <a:defRPr sz="2800" b="1">
+                <a:solidFill>
+                  <a:srgbClr val="D8941C"/>
+                </a:solidFill>
+                <a:latin typeface="Aptos"/>
+                <a:ea typeface="Aptos"/>
+                <a:cs typeface="Aptos"/>
+              </a:defRPr>
+            </a:pPr>
+            <a:r>
+              <a:rPr sz="2800" b="1">
+                <a:solidFill>
+                  <a:srgbClr val="D8941C"/>
+                </a:solidFill>
+                <a:latin typeface="Aptos"/>
+                <a:ea typeface="Aptos"/>
+                <a:cs typeface="Aptos"/>
+              </a:rPr>
+              <a:t>01</a:t>
+            </a:r>
+          </a:p>
+        </p:txBody>
+      </p:sp>
+      <p:sp>
+        <p:nvSpPr>
+          <p:cNvPr id="8" name="Content-Placeholder-15-9">
+            <a:extLst xmlns:a="http://schemas.openxmlformats.org/drawingml/2006/main">
+              <a:ext uri="{FF2B5EF4-FFF2-40B4-BE49-F238E27FC236}">
+                <a16:creationId xmlns:a16="http://schemas.microsoft.com/office/drawing/2014/main" id="{ED31392D-E529-4A16-A19C-7342119EBD05}"/>
+              </a:ext>
+            </a:extLst>
+          </p:cNvPr>
+          <p:cNvSpPr>
+            <a:spLocks xmlns:a="http://schemas.openxmlformats.org/drawingml/2006/main" noGrp="1"/>
+          </p:cNvSpPr>
+          <p:nvPr/>
+        </p:nvSpPr>
+        <p:spPr>
+          <a:xfrm xmlns:a="http://schemas.openxmlformats.org/drawingml/2006/main">
+            <a:off x="4552950" y="2171700"/>
+            <a:ext cx="666750" cy="571500"/>
+          </a:xfrm>
+          <a:prstGeom xmlns:a="http://schemas.openxmlformats.org/drawingml/2006/main" prst="rect">
+            <a:avLst/>
+          </a:prstGeom>
+        </p:spPr>
+        <p:txBody>
+          <a:bodyPr xmlns:a="http://schemas.openxmlformats.org/drawingml/2006/main" lIns="38100" tIns="38100" rIns="38100" bIns="38100" anchor="t">
+            <a:normAutofit fontScale="100000"/>
+          </a:bodyPr>
+          <a:lstStyle xmlns:a="http://schemas.openxmlformats.org/drawingml/2006/main"/>
+          <a:p xmlns:a="http://schemas.openxmlformats.org/drawingml/2006/main">
+            <a:pPr algn="l">
+              <a:lnSpc>
+                <a:spcPct val="105000"/>
+              </a:lnSpc>
+              <a:buNone/>
+              <a:defRPr sz="2800" b="1">
+                <a:solidFill>
+                  <a:srgbClr val="D8941C"/>
+                </a:solidFill>
+                <a:latin typeface="Aptos"/>
+                <a:ea typeface="Aptos"/>
+                <a:cs typeface="Aptos"/>
+              </a:defRPr>
+            </a:pPr>
+            <a:r>
+              <a:rPr sz="2800" b="1">
+                <a:solidFill>
+                  <a:srgbClr val="D8941C"/>
+                </a:solidFill>
+                <a:latin typeface="Aptos"/>
+                <a:ea typeface="Aptos"/>
+                <a:cs typeface="Aptos"/>
+              </a:rPr>
+              <a:t>02</a:t>
+            </a:r>
+          </a:p>
+        </p:txBody>
+      </p:sp>
+      <p:sp>
+        <p:nvSpPr>
+          <p:cNvPr id="9" name="Content-Placeholder-15-10">
+            <a:extLst xmlns:a="http://schemas.openxmlformats.org/drawingml/2006/main">
+              <a:ext uri="{FF2B5EF4-FFF2-40B4-BE49-F238E27FC236}">
+                <a16:creationId xmlns:a16="http://schemas.microsoft.com/office/drawing/2014/main" id="{879B6BDB-A94E-493C-BA45-DDC9B3528ADA}"/>
+              </a:ext>
+            </a:extLst>
+          </p:cNvPr>
+          <p:cNvSpPr>
+            <a:spLocks xmlns:a="http://schemas.openxmlformats.org/drawingml/2006/main" noGrp="1"/>
+          </p:cNvSpPr>
+          <p:nvPr/>
+        </p:nvSpPr>
+        <p:spPr>
+          <a:xfrm xmlns:a="http://schemas.openxmlformats.org/drawingml/2006/main">
+            <a:off x="8172450" y="2171700"/>
+            <a:ext cx="666750" cy="571500"/>
+          </a:xfrm>
+          <a:prstGeom xmlns:a="http://schemas.openxmlformats.org/drawingml/2006/main" prst="rect">
+            <a:avLst/>
+          </a:prstGeom>
+        </p:spPr>
+        <p:txBody>
+          <a:bodyPr xmlns:a="http://schemas.openxmlformats.org/drawingml/2006/main" lIns="38100" tIns="38100" rIns="38100" bIns="38100" anchor="t">
+            <a:normAutofit fontScale="100000"/>
+          </a:bodyPr>
+          <a:lstStyle xmlns:a="http://schemas.openxmlformats.org/drawingml/2006/main"/>
+          <a:p xmlns:a="http://schemas.openxmlformats.org/drawingml/2006/main">
+            <a:pPr algn="l">
+              <a:lnSpc>
+                <a:spcPct val="105000"/>
+              </a:lnSpc>
+              <a:buNone/>
+              <a:defRPr sz="2800" b="1">
+                <a:solidFill>
+                  <a:srgbClr val="D8941C"/>
+                </a:solidFill>
+                <a:latin typeface="Aptos"/>
+                <a:ea typeface="Aptos"/>
+                <a:cs typeface="Aptos"/>
+              </a:defRPr>
+            </a:pPr>
+            <a:r>
+              <a:rPr sz="2800" b="1">
+                <a:solidFill>
+                  <a:srgbClr val="D8941C"/>
+                </a:solidFill>
+                <a:latin typeface="Aptos"/>
+                <a:ea typeface="Aptos"/>
+                <a:cs typeface="Aptos"/>
+              </a:rPr>
+              <a:t>03</a:t>
+            </a:r>
+          </a:p>
+        </p:txBody>
+      </p:sp>
+      <p:sp>
+        <p:nvSpPr>
+          <p:cNvPr id="10" name="Text-Placeholder-16-11">
+            <a:extLst xmlns:a="http://schemas.openxmlformats.org/drawingml/2006/main">
+              <a:ext uri="{FF2B5EF4-FFF2-40B4-BE49-F238E27FC236}">
+                <a16:creationId xmlns:a16="http://schemas.microsoft.com/office/drawing/2014/main" id="{48CD6CF5-2ED3-4F99-B07C-661E3534B03D}"/>
+              </a:ext>
+            </a:extLst>
+          </p:cNvPr>
+          <p:cNvSpPr>
+            <a:spLocks xmlns:a="http://schemas.openxmlformats.org/drawingml/2006/main" noGrp="1"/>
+          </p:cNvSpPr>
+          <p:nvPr/>
+        </p:nvSpPr>
+        <p:spPr>
+          <a:xfrm xmlns:a="http://schemas.openxmlformats.org/drawingml/2006/main">
+            <a:off x="933450" y="2781300"/>
+            <a:ext cx="2419350" cy="2133600"/>
+          </a:xfrm>
+          <a:prstGeom xmlns:a="http://schemas.openxmlformats.org/drawingml/2006/main" prst="rect">
+            <a:avLst/>
+          </a:prstGeom>
+        </p:spPr>
+        <p:txBody>
+          <a:bodyPr xmlns:a="http://schemas.openxmlformats.org/drawingml/2006/main" lIns="38100" tIns="38100" rIns="38100" bIns="38100" anchor="t">
+            <a:normAutofit fontScale="100000"/>
+          </a:bodyPr>
+          <a:lstStyle xmlns:a="http://schemas.openxmlformats.org/drawingml/2006/main"/>
+          <a:p xmlns:a="http://schemas.openxmlformats.org/drawingml/2006/main">
+            <a:pPr algn="l">
+              <a:lnSpc>
+                <a:spcPct val="108000"/>
+              </a:lnSpc>
+              <a:buNone/>
+              <a:defRPr sz="1600" b="0">
+                <a:solidFill>
+                  <a:srgbClr val="173126"/>
+                </a:solidFill>
+                <a:latin typeface="Aptos"/>
+                <a:ea typeface="Aptos"/>
+                <a:cs typeface="Aptos"/>
+              </a:defRPr>
+            </a:pPr>
+            <a:r>
+              <a:rPr sz="1600" b="0">
+                <a:solidFill>
+                  <a:srgbClr val="173126"/>
+                </a:solidFill>
+                <a:latin typeface="Aptos"/>
+                <a:ea typeface="Aptos"/>
+                <a:cs typeface="Aptos"/>
+              </a:rPr>
+              <a:t>Cutting and shaping components accurately</a:t>
+            </a:r>
+          </a:p>
+          <a:p xmlns:a="http://schemas.openxmlformats.org/drawingml/2006/main">
+            <a:pPr algn="l">
+              <a:buNone/>
+              <a:defRPr sz="2400">
                 <a:solidFill>
                   <a:srgbClr val="000000"/>
                 </a:solidFill>
@@ -1821,42 +2482,97 @@
               </a:defRPr>
             </a:pPr>
             <a:r>
-              <a:t>2</a:t>
-            </a:r>
-          </a:p>
-        </p:txBody>
-      </p:sp>
-      <p:sp>
-        <p:nvSpPr>
-          <p:cNvPr id="2" name="Title-10-3">
-            <a:extLst xmlns:a="http://schemas.openxmlformats.org/drawingml/2006/main">
-              <a:ext uri="{FF2B5EF4-FFF2-40B4-BE49-F238E27FC236}">
-                <a16:creationId xmlns:a16="http://schemas.microsoft.com/office/drawing/2014/main" id="{A0B5DBAF-3095-4071-869E-B07CDD3704FA}"/>
-              </a:ext>
-            </a:extLst>
-          </p:cNvPr>
-          <p:cNvSpPr>
-            <a:spLocks xmlns:a="http://schemas.openxmlformats.org/drawingml/2006/main" noGrp="1"/>
-          </p:cNvSpPr>
-          <p:nvPr/>
-        </p:nvSpPr>
-        <p:spPr>
-          <a:xfrm xmlns:a="http://schemas.openxmlformats.org/drawingml/2006/main">
-            <a:off x="393668" y="344043"/>
-            <a:ext cx="11404568" cy="1047464"/>
+              <a:t/>
+            </a:r>
+          </a:p>
+          <a:p xmlns:a="http://schemas.openxmlformats.org/drawingml/2006/main">
+            <a:pPr algn="l">
+              <a:lnSpc>
+                <a:spcPct val="108000"/>
+              </a:lnSpc>
+              <a:buNone/>
+              <a:defRPr sz="1600" b="0">
+                <a:solidFill>
+                  <a:srgbClr val="173126"/>
+                </a:solidFill>
+                <a:latin typeface="Aptos"/>
+                <a:ea typeface="Aptos"/>
+                <a:cs typeface="Aptos"/>
+              </a:defRPr>
+            </a:pPr>
+            <a:r>
+              <a:rPr sz="1600" b="0">
+                <a:solidFill>
+                  <a:srgbClr val="173126"/>
+                </a:solidFill>
+                <a:latin typeface="Aptos"/>
+                <a:ea typeface="Aptos"/>
+                <a:cs typeface="Aptos"/>
+              </a:rPr>
+              <a:t>Secure: Hold the work in the demonstrated bench hook or vice setup.</a:t>
+            </a:r>
+          </a:p>
+        </p:txBody>
+      </p:sp>
+      <p:sp>
+        <p:nvSpPr>
+          <p:cNvPr id="11" name="Text-Placeholder-16-12">
+            <a:extLst xmlns:a="http://schemas.openxmlformats.org/drawingml/2006/main">
+              <a:ext uri="{FF2B5EF4-FFF2-40B4-BE49-F238E27FC236}">
+                <a16:creationId xmlns:a16="http://schemas.microsoft.com/office/drawing/2014/main" id="{F1E7DBFE-0DB7-48C6-8B95-576954B0B9FD}"/>
+              </a:ext>
+            </a:extLst>
+          </p:cNvPr>
+          <p:cNvSpPr>
+            <a:spLocks xmlns:a="http://schemas.openxmlformats.org/drawingml/2006/main" noGrp="1"/>
+          </p:cNvSpPr>
+          <p:nvPr/>
+        </p:nvSpPr>
+        <p:spPr>
+          <a:xfrm xmlns:a="http://schemas.openxmlformats.org/drawingml/2006/main">
+            <a:off x="4552950" y="2781300"/>
+            <a:ext cx="2419350" cy="2133600"/>
           </a:xfrm>
           <a:prstGeom xmlns:a="http://schemas.openxmlformats.org/drawingml/2006/main" prst="rect">
             <a:avLst/>
           </a:prstGeom>
         </p:spPr>
         <p:txBody>
-          <a:bodyPr xmlns:a="http://schemas.openxmlformats.org/drawingml/2006/main" lIns="0" tIns="0" rIns="0" bIns="0" anchor="t">
+          <a:bodyPr xmlns:a="http://schemas.openxmlformats.org/drawingml/2006/main" lIns="38100" tIns="38100" rIns="38100" bIns="38100" anchor="t">
             <a:normAutofit fontScale="100000"/>
           </a:bodyPr>
           <a:lstStyle xmlns:a="http://schemas.openxmlformats.org/drawingml/2006/main"/>
           <a:p xmlns:a="http://schemas.openxmlformats.org/drawingml/2006/main">
             <a:pPr algn="l">
-              <a:defRPr sz="2900">
+              <a:lnSpc>
+                <a:spcPct val="108000"/>
+              </a:lnSpc>
+              <a:buNone/>
+              <a:defRPr sz="1600" b="0">
+                <a:solidFill>
+                  <a:srgbClr val="173126"/>
+                </a:solidFill>
+                <a:latin typeface="Aptos"/>
+                <a:ea typeface="Aptos"/>
+                <a:cs typeface="Aptos"/>
+              </a:defRPr>
+            </a:pPr>
+            <a:r>
+              <a:rPr sz="1600" b="0">
+                <a:solidFill>
+                  <a:srgbClr val="173126"/>
+                </a:solidFill>
+                <a:latin typeface="Aptos"/>
+                <a:ea typeface="Aptos"/>
+                <a:cs typeface="Aptos"/>
+              </a:rPr>
+              <a:t>Butt, rebate and dowel joints in a Desk Tidy</a:t>
+            </a:r>
+          </a:p>
+          <a:p xmlns:a="http://schemas.openxmlformats.org/drawingml/2006/main">
+            <a:pPr algn="l">
+              <a:buNone/>
+              <a:defRPr sz="2400">
                 <a:solidFill>
                   <a:srgbClr val="000000"/>
                 </a:solidFill>
@@ -1866,428 +2582,298 @@
               </a:defRPr>
             </a:pPr>
             <a:r>
-              <a:t>Weeks 7–8: three connected learning sections</a:t>
-            </a:r>
-          </a:p>
-        </p:txBody>
-      </p:sp>
-      <p:cxnSp>
-        <p:nvCxnSpPr>
-          <p:cNvPr id="15" name="Google-Shape-2259-p159-4"/>
-          <p:cNvCxnSpPr/>
-          <p:nvPr/>
-        </p:nvCxnSpPr>
-        <p:spPr>
-          <a:xfrm xmlns:a="http://schemas.openxmlformats.org/drawingml/2006/main">
-            <a:off x="337757" y="3373755"/>
-            <a:ext cx="12245435" cy="286"/>
-          </a:xfrm>
-          <a:prstGeom xmlns:a="http://schemas.openxmlformats.org/drawingml/2006/main" prst="straightConnector1">
-            <a:avLst/>
-          </a:prstGeom>
+              <a:t/>
+            </a:r>
+          </a:p>
+          <a:p xmlns:a="http://schemas.openxmlformats.org/drawingml/2006/main">
+            <a:pPr algn="l">
+              <a:lnSpc>
+                <a:spcPct val="108000"/>
+              </a:lnSpc>
+              <a:buNone/>
+              <a:defRPr sz="1600" b="0">
+                <a:solidFill>
+                  <a:srgbClr val="173126"/>
+                </a:solidFill>
+                <a:latin typeface="Aptos"/>
+                <a:ea typeface="Aptos"/>
+                <a:cs typeface="Aptos"/>
+              </a:defRPr>
+            </a:pPr>
+            <a:r>
+              <a:rPr sz="1600" b="0">
+                <a:solidFill>
+                  <a:srgbClr val="173126"/>
+                </a:solidFill>
+                <a:latin typeface="Aptos"/>
+                <a:ea typeface="Aptos"/>
+                <a:cs typeface="Aptos"/>
+              </a:rPr>
+              <a:t>A joint should suit the parts being connected, the required accuracy and the approved design.</a:t>
+            </a:r>
+          </a:p>
+        </p:txBody>
+      </p:sp>
+      <p:sp>
+        <p:nvSpPr>
+          <p:cNvPr id="12" name="Text-Placeholder-16-13">
+            <a:extLst xmlns:a="http://schemas.openxmlformats.org/drawingml/2006/main">
+              <a:ext uri="{FF2B5EF4-FFF2-40B4-BE49-F238E27FC236}">
+                <a16:creationId xmlns:a16="http://schemas.microsoft.com/office/drawing/2014/main" id="{FD8745F0-CAAD-4C60-9934-C5CFB7723581}"/>
+              </a:ext>
+            </a:extLst>
+          </p:cNvPr>
+          <p:cNvSpPr>
+            <a:spLocks xmlns:a="http://schemas.openxmlformats.org/drawingml/2006/main" noGrp="1"/>
+          </p:cNvSpPr>
+          <p:nvPr/>
+        </p:nvSpPr>
+        <p:spPr>
+          <a:xfrm xmlns:a="http://schemas.openxmlformats.org/drawingml/2006/main">
+            <a:off x="8172450" y="2781300"/>
+            <a:ext cx="2419350" cy="2133600"/>
+          </a:xfrm>
+          <a:prstGeom xmlns:a="http://schemas.openxmlformats.org/drawingml/2006/main" prst="rect">
+            <a:avLst/>
+          </a:prstGeom>
+        </p:spPr>
+        <p:txBody>
+          <a:bodyPr xmlns:a="http://schemas.openxmlformats.org/drawingml/2006/main" lIns="38100" tIns="38100" rIns="38100" bIns="38100" anchor="t">
+            <a:normAutofit fontScale="100000"/>
+          </a:bodyPr>
+          <a:lstStyle xmlns:a="http://schemas.openxmlformats.org/drawingml/2006/main"/>
+          <a:p xmlns:a="http://schemas.openxmlformats.org/drawingml/2006/main">
+            <a:pPr algn="l">
+              <a:lnSpc>
+                <a:spcPct val="108000"/>
+              </a:lnSpc>
+              <a:buNone/>
+              <a:defRPr sz="1600" b="0">
+                <a:solidFill>
+                  <a:srgbClr val="173126"/>
+                </a:solidFill>
+                <a:latin typeface="Aptos"/>
+                <a:ea typeface="Aptos"/>
+                <a:cs typeface="Aptos"/>
+              </a:defRPr>
+            </a:pPr>
+            <a:r>
+              <a:rPr sz="1600" b="0">
+                <a:solidFill>
+                  <a:srgbClr val="173126"/>
+                </a:solidFill>
+                <a:latin typeface="Aptos"/>
+                <a:ea typeface="Aptos"/>
+                <a:cs typeface="Aptos"/>
+              </a:rPr>
+              <a:t>Dry fitting, PVA assembly and surface preparation</a:t>
+            </a:r>
+          </a:p>
+          <a:p xmlns:a="http://schemas.openxmlformats.org/drawingml/2006/main">
+            <a:pPr algn="l">
+              <a:buNone/>
+              <a:defRPr sz="2400">
+                <a:solidFill>
+                  <a:srgbClr val="000000"/>
+                </a:solidFill>
+                <a:latin typeface="Helvetica Neue"/>
+                <a:ea typeface="Helvetica Neue"/>
+                <a:cs typeface="Helvetica Neue"/>
+              </a:defRPr>
+            </a:pPr>
+            <a:r>
+              <a:t/>
+            </a:r>
+          </a:p>
+          <a:p xmlns:a="http://schemas.openxmlformats.org/drawingml/2006/main">
+            <a:pPr algn="l">
+              <a:lnSpc>
+                <a:spcPct val="108000"/>
+              </a:lnSpc>
+              <a:buNone/>
+              <a:defRPr sz="1600" b="0">
+                <a:solidFill>
+                  <a:srgbClr val="173126"/>
+                </a:solidFill>
+                <a:latin typeface="Aptos"/>
+                <a:ea typeface="Aptos"/>
+                <a:cs typeface="Aptos"/>
+              </a:defRPr>
+            </a:pPr>
+            <a:r>
+              <a:rPr sz="1600" b="0">
+                <a:solidFill>
+                  <a:srgbClr val="173126"/>
+                </a:solidFill>
+                <a:latin typeface="Aptos"/>
+                <a:ea typeface="Aptos"/>
+                <a:cs typeface="Aptos"/>
+              </a:rPr>
+              <a:t>Dry fit: Assemble all parts and check order, fit, square and stability.</a:t>
+            </a:r>
+          </a:p>
+        </p:txBody>
+      </p:sp>
+      <p:sp>
+        <p:nvSpPr>
+          <p:cNvPr id="19" name="">
+            <a:extLst xmlns:a="http://schemas.openxmlformats.org/drawingml/2006/main">
+              <a:ext uri="{FF2B5EF4-FFF2-40B4-BE49-F238E27FC236}">
+                <a16:creationId xmlns:a16="http://schemas.microsoft.com/office/drawing/2014/main" id="{DC46F09A-636C-4A36-9922-A26172A0A8CF}"/>
+              </a:ext>
+            </a:extLst>
+          </p:cNvPr>
+          <p:cNvSpPr>
+            <a:spLocks xmlns:a="http://schemas.openxmlformats.org/drawingml/2006/main" noGrp="1"/>
+          </p:cNvSpPr>
+          <p:nvPr/>
+        </p:nvSpPr>
+        <p:spPr>
+          <a:xfrm xmlns:a="http://schemas.openxmlformats.org/drawingml/2006/main">
+            <a:off x="590550" y="1190625"/>
+            <a:ext cx="9334500" cy="381000"/>
+          </a:xfrm>
+          <a:prstGeom xmlns:a="http://schemas.openxmlformats.org/drawingml/2006/main" prst="rect">
+            <a:avLst/>
+          </a:prstGeom>
+          <a:noFill xmlns:a="http://schemas.openxmlformats.org/drawingml/2006/main"/>
+          <a:ln xmlns:a="http://schemas.openxmlformats.org/drawingml/2006/main" w="0">
+            <a:noFill/>
+            <a:prstDash val="solid"/>
+          </a:ln>
+        </p:spPr>
+        <p:txBody>
+          <a:bodyPr xmlns:a="http://schemas.openxmlformats.org/drawingml/2006/main" lIns="38100" tIns="38100" rIns="38100" bIns="38100" anchor="t">
+            <a:normAutofit fontScale="95238"/>
+          </a:bodyPr>
+          <a:lstStyle xmlns:a="http://schemas.openxmlformats.org/drawingml/2006/main"/>
+          <a:p xmlns:a="http://schemas.openxmlformats.org/drawingml/2006/main">
+            <a:pPr algn="l">
+              <a:lnSpc>
+                <a:spcPct val="105000"/>
+              </a:lnSpc>
+              <a:buNone/>
+              <a:defRPr sz="2000" b="0">
+                <a:solidFill>
+                  <a:srgbClr val="5A665F"/>
+                </a:solidFill>
+                <a:latin typeface="Aptos"/>
+                <a:ea typeface="Aptos"/>
+                <a:cs typeface="Aptos"/>
+              </a:defRPr>
+            </a:pPr>
+            <a:r>
+              <a:rPr sz="2000" b="0">
+                <a:solidFill>
+                  <a:srgbClr val="5A665F"/>
+                </a:solidFill>
+                <a:latin typeface="Aptos"/>
+                <a:ea typeface="Aptos"/>
+                <a:cs typeface="Aptos"/>
+              </a:rPr>
+              <a:t>Move from understanding → safe application → evidence you can explain.</a:t>
+            </a:r>
+          </a:p>
+        </p:txBody>
+      </p:sp>
+      <p:sp>
+        <p:nvSpPr>
+          <p:cNvPr id="20" name="">
+            <a:extLst xmlns:a="http://schemas.openxmlformats.org/drawingml/2006/main">
+              <a:ext uri="{FF2B5EF4-FFF2-40B4-BE49-F238E27FC236}">
+                <a16:creationId xmlns:a16="http://schemas.microsoft.com/office/drawing/2014/main" id="{4224254C-AD1B-43E9-A943-05DE57AA351F}"/>
+              </a:ext>
+            </a:extLst>
+          </p:cNvPr>
+          <p:cNvSpPr>
+            <a:spLocks xmlns:a="http://schemas.openxmlformats.org/drawingml/2006/main" noGrp="1"/>
+          </p:cNvSpPr>
+          <p:nvPr/>
+        </p:nvSpPr>
+        <p:spPr>
+          <a:xfrm xmlns:a="http://schemas.openxmlformats.org/drawingml/2006/main">
+            <a:off x="666750" y="1952625"/>
+            <a:ext cx="2952750" cy="3333750"/>
+          </a:xfrm>
+          <a:prstGeom xmlns:a="http://schemas.openxmlformats.org/drawingml/2006/main" prst="roundRect">
+            <a:avLst>
+              <a:gd name="adj" fmla="val 3871"/>
+            </a:avLst>
+          </a:prstGeom>
+          <a:noFill xmlns:a="http://schemas.openxmlformats.org/drawingml/2006/main"/>
           <a:ln xmlns:a="http://schemas.openxmlformats.org/drawingml/2006/main" w="9525">
             <a:solidFill>
-              <a:srgbClr val="000000"/>
+              <a:srgbClr val="EAD2AE"/>
             </a:solidFill>
             <a:prstDash val="solid"/>
           </a:ln>
         </p:spPr>
-      </p:cxnSp>
-      <p:sp>
-        <p:nvSpPr>
-          <p:cNvPr id="4" name="Google-Shape-2260-p159-5">
-            <a:extLst xmlns:a="http://schemas.openxmlformats.org/drawingml/2006/main">
-              <a:ext uri="{FF2B5EF4-FFF2-40B4-BE49-F238E27FC236}">
-                <a16:creationId xmlns:a16="http://schemas.microsoft.com/office/drawing/2014/main" id="{EDB82C42-D1EE-4C2F-88ED-1BA1C8BFB6B5}"/>
-              </a:ext>
-            </a:extLst>
-          </p:cNvPr>
-          <p:cNvSpPr>
-            <a:spLocks xmlns:a="http://schemas.openxmlformats.org/drawingml/2006/main" noGrp="1"/>
-          </p:cNvSpPr>
-          <p:nvPr/>
-        </p:nvSpPr>
-        <p:spPr>
-          <a:xfrm xmlns:a="http://schemas.openxmlformats.org/drawingml/2006/main">
-            <a:off x="337757" y="3320225"/>
-            <a:ext cx="107061" cy="107061"/>
-          </a:xfrm>
-          <a:prstGeom xmlns:a="http://schemas.openxmlformats.org/drawingml/2006/main" prst="ellipse">
-            <a:avLst/>
-          </a:prstGeom>
-          <a:solidFill xmlns:a="http://schemas.openxmlformats.org/drawingml/2006/main">
-            <a:srgbClr val="000000"/>
-          </a:solidFill>
-        </p:spPr>
-      </p:sp>
-      <p:sp>
-        <p:nvSpPr>
-          <p:cNvPr id="5" name="Google-Shape-2261-p159-6">
-            <a:extLst xmlns:a="http://schemas.openxmlformats.org/drawingml/2006/main">
-              <a:ext uri="{FF2B5EF4-FFF2-40B4-BE49-F238E27FC236}">
-                <a16:creationId xmlns:a16="http://schemas.microsoft.com/office/drawing/2014/main" id="{ACCB60D8-5738-4F23-9BF6-90E0DC2A708C}"/>
-              </a:ext>
-            </a:extLst>
-          </p:cNvPr>
-          <p:cNvSpPr>
-            <a:spLocks xmlns:a="http://schemas.openxmlformats.org/drawingml/2006/main" noGrp="1"/>
-          </p:cNvSpPr>
-          <p:nvPr/>
-        </p:nvSpPr>
-        <p:spPr>
-          <a:xfrm xmlns:a="http://schemas.openxmlformats.org/drawingml/2006/main">
-            <a:off x="4251770" y="3320225"/>
-            <a:ext cx="107061" cy="107061"/>
-          </a:xfrm>
-          <a:prstGeom xmlns:a="http://schemas.openxmlformats.org/drawingml/2006/main" prst="ellipse">
-            <a:avLst/>
-          </a:prstGeom>
-          <a:solidFill xmlns:a="http://schemas.openxmlformats.org/drawingml/2006/main">
-            <a:srgbClr val="000000"/>
-          </a:solidFill>
-        </p:spPr>
-      </p:sp>
-      <p:sp>
-        <p:nvSpPr>
-          <p:cNvPr id="6" name="Google-Shape-2262-p159-7">
-            <a:extLst xmlns:a="http://schemas.openxmlformats.org/drawingml/2006/main">
-              <a:ext uri="{FF2B5EF4-FFF2-40B4-BE49-F238E27FC236}">
-                <a16:creationId xmlns:a16="http://schemas.microsoft.com/office/drawing/2014/main" id="{2279DF5D-CE46-4325-81E0-6AC899D6066D}"/>
-              </a:ext>
-            </a:extLst>
-          </p:cNvPr>
-          <p:cNvSpPr>
-            <a:spLocks xmlns:a="http://schemas.openxmlformats.org/drawingml/2006/main" noGrp="1"/>
-          </p:cNvSpPr>
-          <p:nvPr/>
-        </p:nvSpPr>
-        <p:spPr>
-          <a:xfrm xmlns:a="http://schemas.openxmlformats.org/drawingml/2006/main">
-            <a:off x="8176070" y="3320225"/>
-            <a:ext cx="107061" cy="107061"/>
-          </a:xfrm>
-          <a:prstGeom xmlns:a="http://schemas.openxmlformats.org/drawingml/2006/main" prst="ellipse">
-            <a:avLst/>
-          </a:prstGeom>
-          <a:solidFill xmlns:a="http://schemas.openxmlformats.org/drawingml/2006/main">
-            <a:srgbClr val="000000"/>
-          </a:solidFill>
-        </p:spPr>
-      </p:sp>
-      <p:sp>
-        <p:nvSpPr>
-          <p:cNvPr id="7" name="Content-Placeholder-15-8">
-            <a:extLst xmlns:a="http://schemas.openxmlformats.org/drawingml/2006/main">
-              <a:ext uri="{FF2B5EF4-FFF2-40B4-BE49-F238E27FC236}">
-                <a16:creationId xmlns:a16="http://schemas.microsoft.com/office/drawing/2014/main" id="{34A527B4-C0B5-47D1-AD66-97A5C12C4E33}"/>
-              </a:ext>
-            </a:extLst>
-          </p:cNvPr>
-          <p:cNvSpPr>
-            <a:spLocks xmlns:a="http://schemas.openxmlformats.org/drawingml/2006/main" noGrp="1"/>
-          </p:cNvSpPr>
-          <p:nvPr/>
-        </p:nvSpPr>
-        <p:spPr>
-          <a:xfrm xmlns:a="http://schemas.openxmlformats.org/drawingml/2006/main">
-            <a:off x="393668" y="2843308"/>
-            <a:ext cx="1612868" cy="262414"/>
-          </a:xfrm>
-          <a:prstGeom xmlns:a="http://schemas.openxmlformats.org/drawingml/2006/main" prst="rect">
-            <a:avLst/>
-          </a:prstGeom>
-        </p:spPr>
-        <p:txBody>
-          <a:bodyPr xmlns:a="http://schemas.openxmlformats.org/drawingml/2006/main" lIns="0" tIns="0" rIns="0" bIns="0">
-            <a:noAutofit/>
-          </a:bodyPr>
-          <a:lstStyle xmlns:a="http://schemas.openxmlformats.org/drawingml/2006/main"/>
-          <a:p xmlns:a="http://schemas.openxmlformats.org/drawingml/2006/main">
-            <a:pPr algn="l">
-              <a:defRPr sz="1600">
-                <a:solidFill>
-                  <a:srgbClr val="000000"/>
-                </a:solidFill>
-                <a:latin typeface="Helvetica Neue"/>
-                <a:ea typeface="Helvetica Neue"/>
-                <a:cs typeface="Helvetica Neue"/>
-              </a:defRPr>
-            </a:pPr>
-            <a:r>
-              <a:t>LEARN</a:t>
-            </a:r>
-          </a:p>
-        </p:txBody>
-      </p:sp>
-      <p:sp>
-        <p:nvSpPr>
-          <p:cNvPr id="8" name="Content-Placeholder-15-9">
-            <a:extLst xmlns:a="http://schemas.openxmlformats.org/drawingml/2006/main">
-              <a:ext uri="{FF2B5EF4-FFF2-40B4-BE49-F238E27FC236}">
-                <a16:creationId xmlns:a16="http://schemas.microsoft.com/office/drawing/2014/main" id="{ED31392D-E529-4A16-A19C-7342119EBD05}"/>
-              </a:ext>
-            </a:extLst>
-          </p:cNvPr>
-          <p:cNvSpPr>
-            <a:spLocks xmlns:a="http://schemas.openxmlformats.org/drawingml/2006/main" noGrp="1"/>
-          </p:cNvSpPr>
-          <p:nvPr/>
-        </p:nvSpPr>
-        <p:spPr>
-          <a:xfrm xmlns:a="http://schemas.openxmlformats.org/drawingml/2006/main">
-            <a:off x="4294156" y="2843308"/>
-            <a:ext cx="1612868" cy="262414"/>
-          </a:xfrm>
-          <a:prstGeom xmlns:a="http://schemas.openxmlformats.org/drawingml/2006/main" prst="rect">
-            <a:avLst/>
-          </a:prstGeom>
-        </p:spPr>
-        <p:txBody>
-          <a:bodyPr xmlns:a="http://schemas.openxmlformats.org/drawingml/2006/main" lIns="0" tIns="0" rIns="0" bIns="0">
-            <a:noAutofit/>
-          </a:bodyPr>
-          <a:lstStyle xmlns:a="http://schemas.openxmlformats.org/drawingml/2006/main"/>
-          <a:p xmlns:a="http://schemas.openxmlformats.org/drawingml/2006/main">
-            <a:pPr algn="l">
-              <a:defRPr sz="1600">
-                <a:solidFill>
-                  <a:srgbClr val="000000"/>
-                </a:solidFill>
-                <a:latin typeface="Helvetica Neue"/>
-                <a:ea typeface="Helvetica Neue"/>
-                <a:cs typeface="Helvetica Neue"/>
-              </a:defRPr>
-            </a:pPr>
-            <a:r>
-              <a:t>DECIDE</a:t>
-            </a:r>
-          </a:p>
-        </p:txBody>
-      </p:sp>
-      <p:sp>
-        <p:nvSpPr>
-          <p:cNvPr id="9" name="Content-Placeholder-15-10">
-            <a:extLst xmlns:a="http://schemas.openxmlformats.org/drawingml/2006/main">
-              <a:ext uri="{FF2B5EF4-FFF2-40B4-BE49-F238E27FC236}">
-                <a16:creationId xmlns:a16="http://schemas.microsoft.com/office/drawing/2014/main" id="{879B6BDB-A94E-493C-BA45-DDC9B3528ADA}"/>
-              </a:ext>
-            </a:extLst>
-          </p:cNvPr>
-          <p:cNvSpPr>
-            <a:spLocks xmlns:a="http://schemas.openxmlformats.org/drawingml/2006/main" noGrp="1"/>
-          </p:cNvSpPr>
-          <p:nvPr/>
-        </p:nvSpPr>
-        <p:spPr>
-          <a:xfrm xmlns:a="http://schemas.openxmlformats.org/drawingml/2006/main">
-            <a:off x="8223218" y="2843308"/>
-            <a:ext cx="1612868" cy="262414"/>
-          </a:xfrm>
-          <a:prstGeom xmlns:a="http://schemas.openxmlformats.org/drawingml/2006/main" prst="rect">
-            <a:avLst/>
-          </a:prstGeom>
-        </p:spPr>
-        <p:txBody>
-          <a:bodyPr xmlns:a="http://schemas.openxmlformats.org/drawingml/2006/main" lIns="0" tIns="0" rIns="0" bIns="0">
-            <a:noAutofit/>
-          </a:bodyPr>
-          <a:lstStyle xmlns:a="http://schemas.openxmlformats.org/drawingml/2006/main"/>
-          <a:p xmlns:a="http://schemas.openxmlformats.org/drawingml/2006/main">
-            <a:pPr algn="l">
-              <a:defRPr sz="1600">
-                <a:solidFill>
-                  <a:srgbClr val="000000"/>
-                </a:solidFill>
-                <a:latin typeface="Helvetica Neue"/>
-                <a:ea typeface="Helvetica Neue"/>
-                <a:cs typeface="Helvetica Neue"/>
-              </a:defRPr>
-            </a:pPr>
-            <a:r>
-              <a:t>EVIDENCE</a:t>
-            </a:r>
-          </a:p>
-        </p:txBody>
-      </p:sp>
-      <p:sp>
-        <p:nvSpPr>
-          <p:cNvPr id="10" name="Text-Placeholder-16-11">
-            <a:extLst xmlns:a="http://schemas.openxmlformats.org/drawingml/2006/main">
-              <a:ext uri="{FF2B5EF4-FFF2-40B4-BE49-F238E27FC236}">
-                <a16:creationId xmlns:a16="http://schemas.microsoft.com/office/drawing/2014/main" id="{48CD6CF5-2ED3-4F99-B07C-661E3534B03D}"/>
-              </a:ext>
-            </a:extLst>
-          </p:cNvPr>
-          <p:cNvSpPr>
-            <a:spLocks xmlns:a="http://schemas.openxmlformats.org/drawingml/2006/main" noGrp="1"/>
-          </p:cNvSpPr>
-          <p:nvPr/>
-        </p:nvSpPr>
-        <p:spPr>
-          <a:xfrm xmlns:a="http://schemas.openxmlformats.org/drawingml/2006/main">
-            <a:off x="4317111" y="3822668"/>
-            <a:ext cx="3156109" cy="1586294"/>
-          </a:xfrm>
-          <a:prstGeom xmlns:a="http://schemas.openxmlformats.org/drawingml/2006/main" prst="rect">
-            <a:avLst/>
-          </a:prstGeom>
-        </p:spPr>
-        <p:txBody>
-          <a:bodyPr xmlns:a="http://schemas.openxmlformats.org/drawingml/2006/main" lIns="0" tIns="0" rIns="0" bIns="0">
-            <a:noAutofit/>
-          </a:bodyPr>
-          <a:lstStyle xmlns:a="http://schemas.openxmlformats.org/drawingml/2006/main"/>
-          <a:p xmlns:a="http://schemas.openxmlformats.org/drawingml/2006/main">
-            <a:pPr algn="l">
-              <a:defRPr sz="2400">
-                <a:solidFill>
-                  <a:srgbClr val="000000"/>
-                </a:solidFill>
-                <a:latin typeface="Helvetica Neue"/>
-                <a:ea typeface="Helvetica Neue"/>
-                <a:cs typeface="Helvetica Neue"/>
-              </a:defRPr>
-            </a:pPr>
-            <a:r>
-              <a:t>Choose joints for purpose</a:t>
-            </a:r>
-          </a:p>
-          <a:p xmlns:a="http://schemas.openxmlformats.org/drawingml/2006/main">
-            <a:pPr algn="l">
-              <a:defRPr sz="2400">
-                <a:solidFill>
-                  <a:srgbClr val="000000"/>
-                </a:solidFill>
-                <a:latin typeface="Helvetica Neue"/>
-                <a:ea typeface="Helvetica Neue"/>
-                <a:cs typeface="Helvetica Neue"/>
-              </a:defRPr>
-            </a:pPr>
-            <a:r>
-              <a:t>Compare butt, rebate and dowel relationships</a:t>
-            </a:r>
-          </a:p>
-        </p:txBody>
-      </p:sp>
-      <p:sp>
-        <p:nvSpPr>
-          <p:cNvPr id="11" name="Text-Placeholder-16-12">
-            <a:extLst xmlns:a="http://schemas.openxmlformats.org/drawingml/2006/main">
-              <a:ext uri="{FF2B5EF4-FFF2-40B4-BE49-F238E27FC236}">
-                <a16:creationId xmlns:a16="http://schemas.microsoft.com/office/drawing/2014/main" id="{F1E7DBFE-0DB7-48C6-8B95-576954B0B9FD}"/>
-              </a:ext>
-            </a:extLst>
-          </p:cNvPr>
-          <p:cNvSpPr>
-            <a:spLocks xmlns:a="http://schemas.openxmlformats.org/drawingml/2006/main" noGrp="1"/>
-          </p:cNvSpPr>
-          <p:nvPr/>
-        </p:nvSpPr>
-        <p:spPr>
-          <a:xfrm xmlns:a="http://schemas.openxmlformats.org/drawingml/2006/main">
-            <a:off x="399859" y="3822668"/>
-            <a:ext cx="3156109" cy="1586294"/>
-          </a:xfrm>
-          <a:prstGeom xmlns:a="http://schemas.openxmlformats.org/drawingml/2006/main" prst="rect">
-            <a:avLst/>
-          </a:prstGeom>
-        </p:spPr>
-        <p:txBody>
-          <a:bodyPr xmlns:a="http://schemas.openxmlformats.org/drawingml/2006/main" lIns="0" tIns="0" rIns="0" bIns="0">
-            <a:noAutofit/>
-          </a:bodyPr>
-          <a:lstStyle xmlns:a="http://schemas.openxmlformats.org/drawingml/2006/main"/>
-          <a:p xmlns:a="http://schemas.openxmlformats.org/drawingml/2006/main">
-            <a:pPr algn="l">
-              <a:defRPr sz="2400">
-                <a:solidFill>
-                  <a:srgbClr val="000000"/>
-                </a:solidFill>
-                <a:latin typeface="Helvetica Neue"/>
-                <a:ea typeface="Helvetica Neue"/>
-                <a:cs typeface="Helvetica Neue"/>
-              </a:defRPr>
-            </a:pPr>
-            <a:r>
-              <a:t>Cut and shape with control</a:t>
-            </a:r>
-          </a:p>
-          <a:p xmlns:a="http://schemas.openxmlformats.org/drawingml/2006/main">
-            <a:pPr algn="l">
-              <a:defRPr sz="2400">
-                <a:solidFill>
-                  <a:srgbClr val="000000"/>
-                </a:solidFill>
-                <a:latin typeface="Helvetica Neue"/>
-                <a:ea typeface="Helvetica Neue"/>
-                <a:cs typeface="Helvetica Neue"/>
-              </a:defRPr>
-            </a:pPr>
-            <a:r>
-              <a:t>Secure work in the demonstrated setup</a:t>
-            </a:r>
-          </a:p>
-        </p:txBody>
-      </p:sp>
-      <p:sp>
-        <p:nvSpPr>
-          <p:cNvPr id="12" name="Text-Placeholder-16-13">
-            <a:extLst xmlns:a="http://schemas.openxmlformats.org/drawingml/2006/main">
-              <a:ext uri="{FF2B5EF4-FFF2-40B4-BE49-F238E27FC236}">
-                <a16:creationId xmlns:a16="http://schemas.microsoft.com/office/drawing/2014/main" id="{FD8745F0-CAAD-4C60-9934-C5CFB7723581}"/>
-              </a:ext>
-            </a:extLst>
-          </p:cNvPr>
-          <p:cNvSpPr>
-            <a:spLocks xmlns:a="http://schemas.openxmlformats.org/drawingml/2006/main" noGrp="1"/>
-          </p:cNvSpPr>
-          <p:nvPr/>
-        </p:nvSpPr>
-        <p:spPr>
-          <a:xfrm xmlns:a="http://schemas.openxmlformats.org/drawingml/2006/main">
-            <a:off x="8177879" y="3822668"/>
-            <a:ext cx="3156109" cy="1586294"/>
-          </a:xfrm>
-          <a:prstGeom xmlns:a="http://schemas.openxmlformats.org/drawingml/2006/main" prst="rect">
-            <a:avLst/>
-          </a:prstGeom>
-        </p:spPr>
-        <p:txBody>
-          <a:bodyPr xmlns:a="http://schemas.openxmlformats.org/drawingml/2006/main" lIns="0" tIns="0" rIns="0" bIns="0">
-            <a:noAutofit/>
-          </a:bodyPr>
-          <a:lstStyle xmlns:a="http://schemas.openxmlformats.org/drawingml/2006/main"/>
-          <a:p xmlns:a="http://schemas.openxmlformats.org/drawingml/2006/main">
-            <a:pPr algn="l">
-              <a:defRPr sz="2400">
-                <a:solidFill>
-                  <a:srgbClr val="000000"/>
-                </a:solidFill>
-                <a:latin typeface="Helvetica Neue"/>
-                <a:ea typeface="Helvetica Neue"/>
-                <a:cs typeface="Helvetica Neue"/>
-              </a:defRPr>
-            </a:pPr>
-            <a:r>
-              <a:t>Dry fit before glue</a:t>
-            </a:r>
-          </a:p>
-          <a:p xmlns:a="http://schemas.openxmlformats.org/drawingml/2006/main">
-            <a:pPr algn="l">
-              <a:defRPr sz="2400">
-                <a:solidFill>
-                  <a:srgbClr val="000000"/>
-                </a:solidFill>
-                <a:latin typeface="Helvetica Neue"/>
-                <a:ea typeface="Helvetica Neue"/>
-                <a:cs typeface="Helvetica Neue"/>
-              </a:defRPr>
-            </a:pPr>
-            <a:r>
-              <a:t>Check order, fit, square and clamp access</a:t>
-            </a:r>
-          </a:p>
-        </p:txBody>
+      </p:sp>
+      <p:sp>
+        <p:nvSpPr>
+          <p:cNvPr id="21" name="">
+            <a:extLst xmlns:a="http://schemas.openxmlformats.org/drawingml/2006/main">
+              <a:ext uri="{FF2B5EF4-FFF2-40B4-BE49-F238E27FC236}">
+                <a16:creationId xmlns:a16="http://schemas.microsoft.com/office/drawing/2014/main" id="{559E716B-A905-4082-A18D-C51D84B6FBEF}"/>
+              </a:ext>
+            </a:extLst>
+          </p:cNvPr>
+          <p:cNvSpPr>
+            <a:spLocks xmlns:a="http://schemas.openxmlformats.org/drawingml/2006/main" noGrp="1"/>
+          </p:cNvSpPr>
+          <p:nvPr/>
+        </p:nvSpPr>
+        <p:spPr>
+          <a:xfrm xmlns:a="http://schemas.openxmlformats.org/drawingml/2006/main">
+            <a:off x="4286250" y="1952625"/>
+            <a:ext cx="2952750" cy="3333750"/>
+          </a:xfrm>
+          <a:prstGeom xmlns:a="http://schemas.openxmlformats.org/drawingml/2006/main" prst="roundRect">
+            <a:avLst>
+              <a:gd name="adj" fmla="val 3871"/>
+            </a:avLst>
+          </a:prstGeom>
+          <a:noFill xmlns:a="http://schemas.openxmlformats.org/drawingml/2006/main"/>
+          <a:ln xmlns:a="http://schemas.openxmlformats.org/drawingml/2006/main" w="9525">
+            <a:solidFill>
+              <a:srgbClr val="D8941C"/>
+            </a:solidFill>
+            <a:prstDash val="solid"/>
+          </a:ln>
+        </p:spPr>
+      </p:sp>
+      <p:sp>
+        <p:nvSpPr>
+          <p:cNvPr id="22" name="">
+            <a:extLst xmlns:a="http://schemas.openxmlformats.org/drawingml/2006/main">
+              <a:ext uri="{FF2B5EF4-FFF2-40B4-BE49-F238E27FC236}">
+                <a16:creationId xmlns:a16="http://schemas.microsoft.com/office/drawing/2014/main" id="{ED61FD95-755D-427B-97A5-EE7B90A0F793}"/>
+              </a:ext>
+            </a:extLst>
+          </p:cNvPr>
+          <p:cNvSpPr>
+            <a:spLocks xmlns:a="http://schemas.openxmlformats.org/drawingml/2006/main" noGrp="1"/>
+          </p:cNvSpPr>
+          <p:nvPr/>
+        </p:nvSpPr>
+        <p:spPr>
+          <a:xfrm xmlns:a="http://schemas.openxmlformats.org/drawingml/2006/main">
+            <a:off x="7905750" y="1952625"/>
+            <a:ext cx="2952750" cy="3333750"/>
+          </a:xfrm>
+          <a:prstGeom xmlns:a="http://schemas.openxmlformats.org/drawingml/2006/main" prst="roundRect">
+            <a:avLst>
+              <a:gd name="adj" fmla="val 3871"/>
+            </a:avLst>
+          </a:prstGeom>
+          <a:noFill xmlns:a="http://schemas.openxmlformats.org/drawingml/2006/main"/>
+          <a:ln xmlns:a="http://schemas.openxmlformats.org/drawingml/2006/main" w="9525">
+            <a:solidFill>
+              <a:srgbClr val="EAD2AE"/>
+            </a:solidFill>
+            <a:prstDash val="solid"/>
+          </a:ln>
+        </p:spPr>
       </p:sp>
     </p:spTree>
     <p:extLst>
@@ -2302,6 +2888,13 @@
 <file path=ppt/slides/slide3.xml><?xml version="1.0" encoding="utf-8"?>
 <p:sld xmlns:p="http://schemas.openxmlformats.org/presentationml/2006/main">
   <p:cSld>
+    <p:bg>
+      <p:bgPr>
+        <a:solidFill xmlns:a="http://schemas.openxmlformats.org/drawingml/2006/main">
+          <a:srgbClr val="F8F2E8"/>
+        </a:solidFill>
+      </p:bgPr>
+    </p:bg>
     <p:spTree>
       <p:nvGrpSpPr>
         <p:cNvPr id="1" name=""/>
@@ -2327,28 +2920,42 @@
         </p:nvSpPr>
         <p:spPr>
           <a:xfrm xmlns:a="http://schemas.openxmlformats.org/drawingml/2006/main">
-            <a:off x="11279219" y="6278594"/>
-            <a:ext cx="519113" cy="241268"/>
+            <a:off x="11334750" y="6496050"/>
+            <a:ext cx="400050" cy="190500"/>
           </a:xfrm>
           <a:prstGeom xmlns:a="http://schemas.openxmlformats.org/drawingml/2006/main" prst="rect">
             <a:avLst/>
           </a:prstGeom>
         </p:spPr>
         <p:txBody>
-          <a:bodyPr xmlns:a="http://schemas.openxmlformats.org/drawingml/2006/main" lIns="0" tIns="0" rIns="0" bIns="0" anchor="b"/>
+          <a:bodyPr xmlns:a="http://schemas.openxmlformats.org/drawingml/2006/main" lIns="38100" tIns="38100" rIns="38100" bIns="38100" anchor="ctr">
+            <a:normAutofit fontScale="64935"/>
+          </a:bodyPr>
           <a:lstStyle xmlns:a="http://schemas.openxmlformats.org/drawingml/2006/main"/>
           <a:p xmlns:a="http://schemas.openxmlformats.org/drawingml/2006/main">
             <a:pPr algn="r">
-              <a:defRPr sz="1000">
-                <a:solidFill>
-                  <a:srgbClr val="000000"/>
-                </a:solidFill>
-                <a:latin typeface="Helvetica Neue"/>
-                <a:ea typeface="Helvetica Neue"/>
-                <a:cs typeface="Helvetica Neue"/>
-              </a:defRPr>
-            </a:pPr>
-            <a:r>
+              <a:lnSpc>
+                <a:spcPct val="105000"/>
+              </a:lnSpc>
+              <a:buNone/>
+              <a:defRPr sz="1100" b="1">
+                <a:solidFill>
+                  <a:srgbClr val="5A665F"/>
+                </a:solidFill>
+                <a:latin typeface="Aptos"/>
+                <a:ea typeface="Aptos"/>
+                <a:cs typeface="Aptos"/>
+              </a:defRPr>
+            </a:pPr>
+            <a:r>
+              <a:rPr sz="1100" b="1">
+                <a:solidFill>
+                  <a:srgbClr val="5A665F"/>
+                </a:solidFill>
+                <a:latin typeface="Aptos"/>
+                <a:ea typeface="Aptos"/>
+                <a:cs typeface="Aptos"/>
+              </a:rPr>
               <a:t>3</a:t>
             </a:r>
           </a:p>
@@ -2370,31 +2977,43 @@
         </p:nvSpPr>
         <p:spPr>
           <a:xfrm xmlns:a="http://schemas.openxmlformats.org/drawingml/2006/main">
-            <a:off x="393668" y="344043"/>
-            <a:ext cx="11404568" cy="1047464"/>
+            <a:off x="571500" y="533400"/>
+            <a:ext cx="5191125" cy="1504950"/>
           </a:xfrm>
           <a:prstGeom xmlns:a="http://schemas.openxmlformats.org/drawingml/2006/main" prst="rect">
             <a:avLst/>
           </a:prstGeom>
         </p:spPr>
         <p:txBody>
-          <a:bodyPr xmlns:a="http://schemas.openxmlformats.org/drawingml/2006/main" lIns="0" tIns="0" rIns="0" bIns="0" anchor="t">
+          <a:bodyPr xmlns:a="http://schemas.openxmlformats.org/drawingml/2006/main" lIns="38100" tIns="38100" rIns="38100" bIns="38100" anchor="t">
             <a:normAutofit fontScale="100000"/>
           </a:bodyPr>
           <a:lstStyle xmlns:a="http://schemas.openxmlformats.org/drawingml/2006/main"/>
           <a:p xmlns:a="http://schemas.openxmlformats.org/drawingml/2006/main">
             <a:pPr algn="l">
-              <a:defRPr sz="2900">
-                <a:solidFill>
-                  <a:srgbClr val="000000"/>
-                </a:solidFill>
-                <a:latin typeface="Helvetica Neue"/>
-                <a:ea typeface="Helvetica Neue"/>
-                <a:cs typeface="Helvetica Neue"/>
-              </a:defRPr>
-            </a:pPr>
-            <a:r>
-              <a:t>Cut and shape with control</a:t>
+              <a:lnSpc>
+                <a:spcPct val="98000"/>
+              </a:lnSpc>
+              <a:buNone/>
+              <a:defRPr sz="3500" b="1">
+                <a:solidFill>
+                  <a:srgbClr val="173126"/>
+                </a:solidFill>
+                <a:latin typeface="Aptos"/>
+                <a:ea typeface="Aptos"/>
+                <a:cs typeface="Aptos"/>
+              </a:defRPr>
+            </a:pPr>
+            <a:r>
+              <a:rPr sz="3500" b="1">
+                <a:solidFill>
+                  <a:srgbClr val="173126"/>
+                </a:solidFill>
+                <a:latin typeface="Aptos"/>
+                <a:ea typeface="Aptos"/>
+                <a:cs typeface="Aptos"/>
+              </a:rPr>
+              <a:t>Cutting and shaping components accurately</a:t>
             </a:r>
           </a:p>
         </p:txBody>
@@ -2415,222 +3034,398 @@
         </p:nvSpPr>
         <p:spPr>
           <a:xfrm xmlns:a="http://schemas.openxmlformats.org/drawingml/2006/main">
-            <a:off x="393668" y="2031968"/>
-            <a:ext cx="5537168" cy="1643063"/>
+            <a:off x="685800" y="2095500"/>
+            <a:ext cx="4905375" cy="723900"/>
           </a:xfrm>
           <a:prstGeom xmlns:a="http://schemas.openxmlformats.org/drawingml/2006/main" prst="rect">
             <a:avLst/>
           </a:prstGeom>
         </p:spPr>
         <p:txBody>
-          <a:bodyPr xmlns:a="http://schemas.openxmlformats.org/drawingml/2006/main" lIns="91440" tIns="45720" rIns="91440" bIns="45720"/>
-          <a:lstStyle xmlns:a="http://schemas.openxmlformats.org/drawingml/2006/main"/>
-          <a:p xmlns:a="http://schemas.openxmlformats.org/drawingml/2006/main">
-            <a:pPr algn="l">
-              <a:defRPr sz="2400">
-                <a:solidFill>
-                  <a:srgbClr val="000000"/>
-                </a:solidFill>
-                <a:latin typeface="Helvetica Neue"/>
-                <a:ea typeface="Helvetica Neue"/>
-                <a:cs typeface="Helvetica Neue"/>
-              </a:defRPr>
-            </a:pPr>
-            <a:r>
-              <a:t>1</a:t>
-            </a:r>
-          </a:p>
-          <a:p xmlns:a="http://schemas.openxmlformats.org/drawingml/2006/main">
-            <a:pPr algn="l">
-              <a:defRPr sz="2400">
-                <a:solidFill>
-                  <a:srgbClr val="000000"/>
-                </a:solidFill>
-                <a:latin typeface="Helvetica Neue"/>
-                <a:ea typeface="Helvetica Neue"/>
-                <a:cs typeface="Helvetica Neue"/>
-              </a:defRPr>
-            </a:pPr>
-            <a:r>
-              <a:t>Secure work in the demonstrated setup</a:t>
-            </a:r>
-          </a:p>
-        </p:txBody>
-      </p:sp>
-      <p:sp>
-        <p:nvSpPr>
-          <p:cNvPr id="4" name="Content-Placeholder-10-5">
-            <a:extLst xmlns:a="http://schemas.openxmlformats.org/drawingml/2006/main">
-              <a:ext uri="{FF2B5EF4-FFF2-40B4-BE49-F238E27FC236}">
-                <a16:creationId xmlns:a16="http://schemas.microsoft.com/office/drawing/2014/main" id="{9F18583D-14E1-4CEB-AD2F-5FC806277E86}"/>
-              </a:ext>
-            </a:extLst>
-          </p:cNvPr>
-          <p:cNvSpPr>
-            <a:spLocks xmlns:a="http://schemas.openxmlformats.org/drawingml/2006/main" noGrp="1"/>
-          </p:cNvSpPr>
-          <p:nvPr/>
-        </p:nvSpPr>
-        <p:spPr>
-          <a:xfrm xmlns:a="http://schemas.openxmlformats.org/drawingml/2006/main">
-            <a:off x="6256592" y="2031968"/>
-            <a:ext cx="5537168" cy="1643063"/>
-          </a:xfrm>
-          <a:prstGeom xmlns:a="http://schemas.openxmlformats.org/drawingml/2006/main" prst="rect">
-            <a:avLst/>
-          </a:prstGeom>
-        </p:spPr>
-        <p:txBody>
-          <a:bodyPr xmlns:a="http://schemas.openxmlformats.org/drawingml/2006/main" lIns="91440" tIns="45720" rIns="91440" bIns="45720"/>
-          <a:lstStyle xmlns:a="http://schemas.openxmlformats.org/drawingml/2006/main"/>
-          <a:p xmlns:a="http://schemas.openxmlformats.org/drawingml/2006/main">
-            <a:pPr algn="l">
-              <a:defRPr sz="2400">
-                <a:solidFill>
-                  <a:srgbClr val="000000"/>
-                </a:solidFill>
-                <a:latin typeface="Helvetica Neue"/>
-                <a:ea typeface="Helvetica Neue"/>
-                <a:cs typeface="Helvetica Neue"/>
-              </a:defRPr>
-            </a:pPr>
-            <a:r>
-              <a:t>2</a:t>
-            </a:r>
-          </a:p>
-          <a:p xmlns:a="http://schemas.openxmlformats.org/drawingml/2006/main">
-            <a:pPr algn="l">
-              <a:defRPr sz="2400">
-                <a:solidFill>
-                  <a:srgbClr val="000000"/>
-                </a:solidFill>
-                <a:latin typeface="Helvetica Neue"/>
-                <a:ea typeface="Helvetica Neue"/>
-                <a:cs typeface="Helvetica Neue"/>
-              </a:defRPr>
-            </a:pPr>
-            <a:r>
-              <a:t>Cut on the waste side of the line</a:t>
-            </a:r>
-          </a:p>
-        </p:txBody>
-      </p:sp>
-      <p:sp>
-        <p:nvSpPr>
-          <p:cNvPr id="5" name="Content-Placeholder-9-6">
-            <a:extLst xmlns:a="http://schemas.openxmlformats.org/drawingml/2006/main">
-              <a:ext uri="{FF2B5EF4-FFF2-40B4-BE49-F238E27FC236}">
-                <a16:creationId xmlns:a16="http://schemas.microsoft.com/office/drawing/2014/main" id="{3C7A39D9-8F93-4CB2-ACBE-02055DA939F1}"/>
-              </a:ext>
-            </a:extLst>
-          </p:cNvPr>
-          <p:cNvSpPr>
-            <a:spLocks xmlns:a="http://schemas.openxmlformats.org/drawingml/2006/main" noGrp="1"/>
-          </p:cNvSpPr>
-          <p:nvPr/>
-        </p:nvSpPr>
-        <p:spPr>
-          <a:xfrm xmlns:a="http://schemas.openxmlformats.org/drawingml/2006/main">
-            <a:off x="393668" y="4016978"/>
-            <a:ext cx="5537168" cy="1643158"/>
-          </a:xfrm>
-          <a:prstGeom xmlns:a="http://schemas.openxmlformats.org/drawingml/2006/main" prst="rect">
-            <a:avLst/>
-          </a:prstGeom>
-        </p:spPr>
-        <p:txBody>
-          <a:bodyPr xmlns:a="http://schemas.openxmlformats.org/drawingml/2006/main" lIns="0" tIns="0" rIns="0" bIns="0">
+          <a:bodyPr xmlns:a="http://schemas.openxmlformats.org/drawingml/2006/main" lIns="38100" tIns="38100" rIns="38100" bIns="38100" anchor="ctr">
             <a:normAutofit fontScale="100000"/>
           </a:bodyPr>
           <a:lstStyle xmlns:a="http://schemas.openxmlformats.org/drawingml/2006/main"/>
           <a:p xmlns:a="http://schemas.openxmlformats.org/drawingml/2006/main">
             <a:pPr algn="l">
-              <a:defRPr sz="2400">
-                <a:solidFill>
-                  <a:srgbClr val="000000"/>
-                </a:solidFill>
-                <a:latin typeface="Helvetica Neue"/>
-                <a:ea typeface="Helvetica Neue"/>
-                <a:cs typeface="Helvetica Neue"/>
-              </a:defRPr>
-            </a:pPr>
-            <a:r>
-              <a:t>3</a:t>
-            </a:r>
-          </a:p>
-          <a:p xmlns:a="http://schemas.openxmlformats.org/drawingml/2006/main">
-            <a:pPr algn="l">
-              <a:defRPr sz="2400">
-                <a:solidFill>
-                  <a:srgbClr val="000000"/>
-                </a:solidFill>
-                <a:latin typeface="Helvetica Neue"/>
-                <a:ea typeface="Helvetica Neue"/>
-                <a:cs typeface="Helvetica Neue"/>
-              </a:defRPr>
-            </a:pPr>
-            <a:r>
-              <a:t>Refine gradually and check often</a:t>
-            </a:r>
-          </a:p>
-        </p:txBody>
-      </p:sp>
-      <p:sp>
-        <p:nvSpPr>
-          <p:cNvPr id="6" name="Content-Placeholder-10-7">
-            <a:extLst xmlns:a="http://schemas.openxmlformats.org/drawingml/2006/main">
-              <a:ext uri="{FF2B5EF4-FFF2-40B4-BE49-F238E27FC236}">
-                <a16:creationId xmlns:a16="http://schemas.microsoft.com/office/drawing/2014/main" id="{FE168D81-EECA-43E5-9713-503F4E144224}"/>
-              </a:ext>
-            </a:extLst>
-          </p:cNvPr>
-          <p:cNvSpPr>
-            <a:spLocks xmlns:a="http://schemas.openxmlformats.org/drawingml/2006/main" noGrp="1"/>
-          </p:cNvSpPr>
-          <p:nvPr/>
-        </p:nvSpPr>
-        <p:spPr>
-          <a:xfrm xmlns:a="http://schemas.openxmlformats.org/drawingml/2006/main">
-            <a:off x="6256592" y="4016978"/>
-            <a:ext cx="5537168" cy="1643158"/>
+              <a:lnSpc>
+                <a:spcPct val="108000"/>
+              </a:lnSpc>
+              <a:buNone/>
+              <a:defRPr sz="1700" b="0">
+                <a:solidFill>
+                  <a:srgbClr val="173126"/>
+                </a:solidFill>
+                <a:latin typeface="Aptos"/>
+                <a:ea typeface="Aptos"/>
+                <a:cs typeface="Aptos"/>
+              </a:defRPr>
+            </a:pPr>
+            <a:r>
+              <a:rPr sz="1700" b="0">
+                <a:solidFill>
+                  <a:srgbClr val="173126"/>
+                </a:solidFill>
+                <a:latin typeface="Aptos"/>
+                <a:ea typeface="Aptos"/>
+                <a:cs typeface="Aptos"/>
+              </a:rPr>
+              <a:t>01 Secure: Hold the work in the demonstrated bench hook or vice setup.</a:t>
+            </a:r>
+          </a:p>
+        </p:txBody>
+      </p:sp>
+      <p:sp>
+        <p:nvSpPr>
+          <p:cNvPr id="4" name="Content-Placeholder-10-5">
+            <a:extLst xmlns:a="http://schemas.openxmlformats.org/drawingml/2006/main">
+              <a:ext uri="{FF2B5EF4-FFF2-40B4-BE49-F238E27FC236}">
+                <a16:creationId xmlns:a16="http://schemas.microsoft.com/office/drawing/2014/main" id="{9F18583D-14E1-4CEB-AD2F-5FC806277E86}"/>
+              </a:ext>
+            </a:extLst>
+          </p:cNvPr>
+          <p:cNvSpPr>
+            <a:spLocks xmlns:a="http://schemas.openxmlformats.org/drawingml/2006/main" noGrp="1"/>
+          </p:cNvSpPr>
+          <p:nvPr/>
+        </p:nvSpPr>
+        <p:spPr>
+          <a:xfrm xmlns:a="http://schemas.openxmlformats.org/drawingml/2006/main">
+            <a:off x="685800" y="2905125"/>
+            <a:ext cx="4905375" cy="723900"/>
           </a:xfrm>
           <a:prstGeom xmlns:a="http://schemas.openxmlformats.org/drawingml/2006/main" prst="rect">
             <a:avLst/>
           </a:prstGeom>
         </p:spPr>
         <p:txBody>
-          <a:bodyPr xmlns:a="http://schemas.openxmlformats.org/drawingml/2006/main" lIns="0" tIns="0" rIns="0" bIns="0">
+          <a:bodyPr xmlns:a="http://schemas.openxmlformats.org/drawingml/2006/main" lIns="38100" tIns="38100" rIns="38100" bIns="38100" anchor="ctr">
             <a:normAutofit fontScale="100000"/>
           </a:bodyPr>
           <a:lstStyle xmlns:a="http://schemas.openxmlformats.org/drawingml/2006/main"/>
           <a:p xmlns:a="http://schemas.openxmlformats.org/drawingml/2006/main">
             <a:pPr algn="l">
-              <a:defRPr sz="2400">
-                <a:solidFill>
-                  <a:srgbClr val="000000"/>
-                </a:solidFill>
-                <a:latin typeface="Helvetica Neue"/>
-                <a:ea typeface="Helvetica Neue"/>
-                <a:cs typeface="Helvetica Neue"/>
-              </a:defRPr>
-            </a:pPr>
-            <a:r>
-              <a:t>4</a:t>
-            </a:r>
-          </a:p>
-          <a:p xmlns:a="http://schemas.openxmlformats.org/drawingml/2006/main">
-            <a:pPr algn="l">
-              <a:defRPr sz="2400">
-                <a:solidFill>
-                  <a:srgbClr val="000000"/>
-                </a:solidFill>
-                <a:latin typeface="Helvetica Neue"/>
-                <a:ea typeface="Helvetica Neue"/>
-                <a:cs typeface="Helvetica Neue"/>
-              </a:defRPr>
-            </a:pPr>
-            <a:r>
-              <a:t>Stop when a tool binds or a cut wanders</a:t>
+              <a:lnSpc>
+                <a:spcPct val="108000"/>
+              </a:lnSpc>
+              <a:buNone/>
+              <a:defRPr sz="1700" b="0">
+                <a:solidFill>
+                  <a:srgbClr val="173126"/>
+                </a:solidFill>
+                <a:latin typeface="Aptos"/>
+                <a:ea typeface="Aptos"/>
+                <a:cs typeface="Aptos"/>
+              </a:defRPr>
+            </a:pPr>
+            <a:r>
+              <a:rPr sz="1700" b="0">
+                <a:solidFill>
+                  <a:srgbClr val="173126"/>
+                </a:solidFill>
+                <a:latin typeface="Aptos"/>
+                <a:ea typeface="Aptos"/>
+                <a:cs typeface="Aptos"/>
+              </a:rPr>
+              <a:t>02 Confirm: Check the approved mark-out and identify the waste side.</a:t>
+            </a:r>
+          </a:p>
+        </p:txBody>
+      </p:sp>
+      <p:sp>
+        <p:nvSpPr>
+          <p:cNvPr id="5" name="Content-Placeholder-9-6">
+            <a:extLst xmlns:a="http://schemas.openxmlformats.org/drawingml/2006/main">
+              <a:ext uri="{FF2B5EF4-FFF2-40B4-BE49-F238E27FC236}">
+                <a16:creationId xmlns:a16="http://schemas.microsoft.com/office/drawing/2014/main" id="{3C7A39D9-8F93-4CB2-ACBE-02055DA939F1}"/>
+              </a:ext>
+            </a:extLst>
+          </p:cNvPr>
+          <p:cNvSpPr>
+            <a:spLocks xmlns:a="http://schemas.openxmlformats.org/drawingml/2006/main" noGrp="1"/>
+          </p:cNvSpPr>
+          <p:nvPr/>
+        </p:nvSpPr>
+        <p:spPr>
+          <a:xfrm xmlns:a="http://schemas.openxmlformats.org/drawingml/2006/main">
+            <a:off x="685800" y="3714750"/>
+            <a:ext cx="4905375" cy="723900"/>
+          </a:xfrm>
+          <a:prstGeom xmlns:a="http://schemas.openxmlformats.org/drawingml/2006/main" prst="rect">
+            <a:avLst/>
+          </a:prstGeom>
+        </p:spPr>
+        <p:txBody>
+          <a:bodyPr xmlns:a="http://schemas.openxmlformats.org/drawingml/2006/main" lIns="38100" tIns="38100" rIns="38100" bIns="38100" anchor="ctr">
+            <a:normAutofit fontScale="100000"/>
+          </a:bodyPr>
+          <a:lstStyle xmlns:a="http://schemas.openxmlformats.org/drawingml/2006/main"/>
+          <a:p xmlns:a="http://schemas.openxmlformats.org/drawingml/2006/main">
+            <a:pPr algn="l">
+              <a:lnSpc>
+                <a:spcPct val="108000"/>
+              </a:lnSpc>
+              <a:buNone/>
+              <a:defRPr sz="1700" b="0">
+                <a:solidFill>
+                  <a:srgbClr val="173126"/>
+                </a:solidFill>
+                <a:latin typeface="Aptos"/>
+                <a:ea typeface="Aptos"/>
+                <a:cs typeface="Aptos"/>
+              </a:defRPr>
+            </a:pPr>
+            <a:r>
+              <a:rPr sz="1700" b="0">
+                <a:solidFill>
+                  <a:srgbClr val="173126"/>
+                </a:solidFill>
+                <a:latin typeface="Aptos"/>
+                <a:ea typeface="Aptos"/>
+                <a:cs typeface="Aptos"/>
+              </a:rPr>
+              <a:t>03 Cut: Remove material with controlled strokes on the waste side.</a:t>
+            </a:r>
+          </a:p>
+        </p:txBody>
+      </p:sp>
+      <p:sp>
+        <p:nvSpPr>
+          <p:cNvPr id="6" name="Content-Placeholder-10-7">
+            <a:extLst xmlns:a="http://schemas.openxmlformats.org/drawingml/2006/main">
+              <a:ext uri="{FF2B5EF4-FFF2-40B4-BE49-F238E27FC236}">
+                <a16:creationId xmlns:a16="http://schemas.microsoft.com/office/drawing/2014/main" id="{FE168D81-EECA-43E5-9713-503F4E144224}"/>
+              </a:ext>
+            </a:extLst>
+          </p:cNvPr>
+          <p:cNvSpPr>
+            <a:spLocks xmlns:a="http://schemas.openxmlformats.org/drawingml/2006/main" noGrp="1"/>
+          </p:cNvSpPr>
+          <p:nvPr/>
+        </p:nvSpPr>
+        <p:spPr>
+          <a:xfrm xmlns:a="http://schemas.openxmlformats.org/drawingml/2006/main">
+            <a:off x="685800" y="4524375"/>
+            <a:ext cx="4905375" cy="723900"/>
+          </a:xfrm>
+          <a:prstGeom xmlns:a="http://schemas.openxmlformats.org/drawingml/2006/main" prst="rect">
+            <a:avLst/>
+          </a:prstGeom>
+        </p:spPr>
+        <p:txBody>
+          <a:bodyPr xmlns:a="http://schemas.openxmlformats.org/drawingml/2006/main" lIns="38100" tIns="38100" rIns="38100" bIns="38100" anchor="ctr">
+            <a:normAutofit fontScale="100000"/>
+          </a:bodyPr>
+          <a:lstStyle xmlns:a="http://schemas.openxmlformats.org/drawingml/2006/main"/>
+          <a:p xmlns:a="http://schemas.openxmlformats.org/drawingml/2006/main">
+            <a:pPr algn="l">
+              <a:lnSpc>
+                <a:spcPct val="108000"/>
+              </a:lnSpc>
+              <a:buNone/>
+              <a:defRPr sz="1600" b="1">
+                <a:solidFill>
+                  <a:srgbClr val="5A665F"/>
+                </a:solidFill>
+                <a:latin typeface="Aptos"/>
+                <a:ea typeface="Aptos"/>
+                <a:cs typeface="Aptos"/>
+              </a:defRPr>
+            </a:pPr>
+            <a:r>
+              <a:rPr sz="1600" b="1">
+                <a:solidFill>
+                  <a:srgbClr val="5A665F"/>
+                </a:solidFill>
+                <a:latin typeface="Aptos"/>
+                <a:ea typeface="Aptos"/>
+                <a:cs typeface="Aptos"/>
+              </a:rPr>
+              <a:t>EVIDENCE Save a labelled note, check or photograph that proves your decision.</a:t>
+            </a:r>
+          </a:p>
+        </p:txBody>
+      </p:sp>
+      <p:sp>
+        <p:nvSpPr>
+          <p:cNvPr id="8" name="">
+            <a:extLst xmlns:a="http://schemas.openxmlformats.org/drawingml/2006/main">
+              <a:ext uri="{FF2B5EF4-FFF2-40B4-BE49-F238E27FC236}">
+                <a16:creationId xmlns:a16="http://schemas.microsoft.com/office/drawing/2014/main" id="{928C4A68-BD86-4905-B468-0E0196E26DF5}"/>
+              </a:ext>
+            </a:extLst>
+          </p:cNvPr>
+          <p:cNvSpPr>
+            <a:spLocks xmlns:a="http://schemas.openxmlformats.org/drawingml/2006/main" noGrp="1"/>
+          </p:cNvSpPr>
+          <p:nvPr/>
+        </p:nvSpPr>
+        <p:spPr>
+          <a:xfrm xmlns:a="http://schemas.openxmlformats.org/drawingml/2006/main">
+            <a:off x="590550" y="285750"/>
+            <a:ext cx="2476500" cy="238125"/>
+          </a:xfrm>
+          <a:prstGeom xmlns:a="http://schemas.openxmlformats.org/drawingml/2006/main" prst="rect">
+            <a:avLst/>
+          </a:prstGeom>
+          <a:noFill xmlns:a="http://schemas.openxmlformats.org/drawingml/2006/main"/>
+          <a:ln xmlns:a="http://schemas.openxmlformats.org/drawingml/2006/main" w="0">
+            <a:noFill/>
+            <a:prstDash val="solid"/>
+          </a:ln>
+        </p:spPr>
+        <p:txBody>
+          <a:bodyPr xmlns:a="http://schemas.openxmlformats.org/drawingml/2006/main" lIns="38100" tIns="38100" rIns="38100" bIns="38100" anchor="t">
+            <a:normAutofit fontScale="77839"/>
+          </a:bodyPr>
+          <a:lstStyle xmlns:a="http://schemas.openxmlformats.org/drawingml/2006/main"/>
+          <a:p xmlns:a="http://schemas.openxmlformats.org/drawingml/2006/main">
+            <a:pPr algn="l">
+              <a:lnSpc>
+                <a:spcPct val="105000"/>
+              </a:lnSpc>
+              <a:buNone/>
+              <a:defRPr sz="1300" b="1">
+                <a:solidFill>
+                  <a:srgbClr val="D8941C"/>
+                </a:solidFill>
+                <a:latin typeface="Aptos"/>
+                <a:ea typeface="Aptos"/>
+                <a:cs typeface="Aptos"/>
+              </a:defRPr>
+            </a:pPr>
+            <a:r>
+              <a:rPr sz="1300" b="1">
+                <a:solidFill>
+                  <a:srgbClr val="D8941C"/>
+                </a:solidFill>
+                <a:latin typeface="Aptos"/>
+                <a:ea typeface="Aptos"/>
+                <a:cs typeface="Aptos"/>
+              </a:rPr>
+              <a:t>THEORY 1 OF 3</a:t>
+            </a:r>
+          </a:p>
+        </p:txBody>
+      </p:sp>
+      <p:sp>
+        <p:nvSpPr>
+          <p:cNvPr id="9" name="">
+            <a:extLst xmlns:a="http://schemas.openxmlformats.org/drawingml/2006/main">
+              <a:ext uri="{FF2B5EF4-FFF2-40B4-BE49-F238E27FC236}">
+                <a16:creationId xmlns:a16="http://schemas.microsoft.com/office/drawing/2014/main" id="{57A61161-3DFE-41DB-9675-E19E1DB70F6F}"/>
+              </a:ext>
+            </a:extLst>
+          </p:cNvPr>
+          <p:cNvSpPr>
+            <a:spLocks xmlns:a="http://schemas.openxmlformats.org/drawingml/2006/main" noGrp="1"/>
+          </p:cNvSpPr>
+          <p:nvPr/>
+        </p:nvSpPr>
+        <p:spPr>
+          <a:xfrm xmlns:a="http://schemas.openxmlformats.org/drawingml/2006/main">
+            <a:off x="6048375" y="552450"/>
+            <a:ext cx="5619750" cy="5524500"/>
+          </a:xfrm>
+          <a:prstGeom xmlns:a="http://schemas.openxmlformats.org/drawingml/2006/main" prst="roundRect">
+            <a:avLst>
+              <a:gd name="adj" fmla="val 2069"/>
+            </a:avLst>
+          </a:prstGeom>
+          <a:noFill xmlns:a="http://schemas.openxmlformats.org/drawingml/2006/main"/>
+          <a:ln xmlns:a="http://schemas.openxmlformats.org/drawingml/2006/main" w="9525">
+            <a:solidFill>
+              <a:srgbClr val="D8941C"/>
+            </a:solidFill>
+            <a:prstDash val="solid"/>
+          </a:ln>
+        </p:spPr>
+      </p:sp>
+      <p:pic>
+        <p:nvPicPr>
+          <p:cNvPr id="20" name=""/>
+          <p:cNvPicPr>
+            <a:picLocks xmlns:a="http://schemas.openxmlformats.org/drawingml/2006/main" noChangeAspect="1"/>
+          </p:cNvPicPr>
+          <p:nvPr/>
+        </p:nvPicPr>
+        <p:blipFill>
+          <a:blip xmlns:r="http://schemas.openxmlformats.org/officeDocument/2006/relationships" xmlns:a="http://schemas.openxmlformats.org/drawingml/2006/main" r:embed="R45872225e8a24a3d"/>
+          <a:srcRect xmlns:a="http://schemas.openxmlformats.org/drawingml/2006/main" l="0" t="12366" r="0" b="12366"/>
+          <a:stretch xmlns:a="http://schemas.openxmlformats.org/drawingml/2006/main">
+            <a:fillRect l="0" t="0" r="0" b="0"/>
+          </a:stretch>
+        </p:blipFill>
+        <p:spPr>
+          <a:xfrm xmlns:a="http://schemas.openxmlformats.org/drawingml/2006/main">
+            <a:off x="6200775" y="704850"/>
+            <a:ext cx="5314950" cy="4000500"/>
+          </a:xfrm>
+          <a:prstGeom xmlns:a="http://schemas.openxmlformats.org/drawingml/2006/main" prst="roundRect">
+            <a:avLst>
+              <a:gd name="adj" fmla="val 2857"/>
+            </a:avLst>
+          </a:prstGeom>
+        </p:spPr>
+      </p:pic>
+      <p:sp>
+        <p:nvSpPr>
+          <p:cNvPr id="11" name="">
+            <a:extLst xmlns:a="http://schemas.openxmlformats.org/drawingml/2006/main">
+              <a:ext uri="{FF2B5EF4-FFF2-40B4-BE49-F238E27FC236}">
+                <a16:creationId xmlns:a16="http://schemas.microsoft.com/office/drawing/2014/main" id="{55D7E66A-9306-4952-A31C-7C42490355F9}"/>
+              </a:ext>
+            </a:extLst>
+          </p:cNvPr>
+          <p:cNvSpPr>
+            <a:spLocks xmlns:a="http://schemas.openxmlformats.org/drawingml/2006/main" noGrp="1"/>
+          </p:cNvSpPr>
+          <p:nvPr/>
+        </p:nvSpPr>
+        <p:spPr>
+          <a:xfrm xmlns:a="http://schemas.openxmlformats.org/drawingml/2006/main">
+            <a:off x="6267450" y="4810125"/>
+            <a:ext cx="5162550" cy="1123950"/>
+          </a:xfrm>
+          <a:prstGeom xmlns:a="http://schemas.openxmlformats.org/drawingml/2006/main" prst="rect">
+            <a:avLst/>
+          </a:prstGeom>
+          <a:noFill xmlns:a="http://schemas.openxmlformats.org/drawingml/2006/main"/>
+          <a:ln xmlns:a="http://schemas.openxmlformats.org/drawingml/2006/main" w="0">
+            <a:noFill/>
+            <a:prstDash val="solid"/>
+          </a:ln>
+        </p:spPr>
+        <p:txBody>
+          <a:bodyPr xmlns:a="http://schemas.openxmlformats.org/drawingml/2006/main" lIns="38100" tIns="38100" rIns="38100" bIns="38100" anchor="t">
+            <a:normAutofit fontScale="100000"/>
+          </a:bodyPr>
+          <a:lstStyle xmlns:a="http://schemas.openxmlformats.org/drawingml/2006/main"/>
+          <a:p xmlns:a="http://schemas.openxmlformats.org/drawingml/2006/main">
+            <a:pPr algn="l">
+              <a:lnSpc>
+                <a:spcPct val="105000"/>
+              </a:lnSpc>
+              <a:buNone/>
+              <a:defRPr sz="1600" b="0">
+                <a:solidFill>
+                  <a:srgbClr val="5A665F"/>
+                </a:solidFill>
+                <a:latin typeface="Aptos"/>
+                <a:ea typeface="Aptos"/>
+                <a:cs typeface="Aptos"/>
+              </a:defRPr>
+            </a:pPr>
+            <a:r>
+              <a:rPr sz="1600" b="0">
+                <a:solidFill>
+                  <a:srgbClr val="5A665F"/>
+                </a:solidFill>
+                <a:latin typeface="Aptos"/>
+                <a:ea typeface="Aptos"/>
+                <a:cs typeface="Aptos"/>
+              </a:rPr>
+              <a:t>Secure the work and cut on the waste side of the line.</a:t>
             </a:r>
           </a:p>
         </p:txBody>
@@ -2648,6 +3443,13 @@
 <file path=ppt/slides/slide4.xml><?xml version="1.0" encoding="utf-8"?>
 <p:sld xmlns:p="http://schemas.openxmlformats.org/presentationml/2006/main">
   <p:cSld>
+    <p:bg>
+      <p:bgPr>
+        <a:solidFill xmlns:a="http://schemas.openxmlformats.org/drawingml/2006/main">
+          <a:srgbClr val="F8F2E8"/>
+        </a:solidFill>
+      </p:bgPr>
+    </p:bg>
     <p:spTree>
       <p:nvGrpSpPr>
         <p:cNvPr id="1" name=""/>
@@ -2673,28 +3475,42 @@
         </p:nvSpPr>
         <p:spPr>
           <a:xfrm xmlns:a="http://schemas.openxmlformats.org/drawingml/2006/main">
-            <a:off x="11279315" y="6279261"/>
-            <a:ext cx="518922" cy="241268"/>
+            <a:off x="11334750" y="6496050"/>
+            <a:ext cx="400050" cy="190500"/>
           </a:xfrm>
           <a:prstGeom xmlns:a="http://schemas.openxmlformats.org/drawingml/2006/main" prst="rect">
             <a:avLst/>
           </a:prstGeom>
         </p:spPr>
         <p:txBody>
-          <a:bodyPr xmlns:a="http://schemas.openxmlformats.org/drawingml/2006/main" lIns="0" tIns="0" rIns="0" bIns="0" anchor="b"/>
+          <a:bodyPr xmlns:a="http://schemas.openxmlformats.org/drawingml/2006/main" lIns="38100" tIns="38100" rIns="38100" bIns="38100" anchor="ctr">
+            <a:normAutofit fontScale="64935"/>
+          </a:bodyPr>
           <a:lstStyle xmlns:a="http://schemas.openxmlformats.org/drawingml/2006/main"/>
           <a:p xmlns:a="http://schemas.openxmlformats.org/drawingml/2006/main">
             <a:pPr algn="r">
-              <a:defRPr sz="1000">
-                <a:solidFill>
-                  <a:srgbClr val="000000"/>
-                </a:solidFill>
-                <a:latin typeface="Helvetica Neue"/>
-                <a:ea typeface="Helvetica Neue"/>
-                <a:cs typeface="Helvetica Neue"/>
-              </a:defRPr>
-            </a:pPr>
-            <a:r>
+              <a:lnSpc>
+                <a:spcPct val="105000"/>
+              </a:lnSpc>
+              <a:buNone/>
+              <a:defRPr sz="1100" b="1">
+                <a:solidFill>
+                  <a:srgbClr val="5A665F"/>
+                </a:solidFill>
+                <a:latin typeface="Aptos"/>
+                <a:ea typeface="Aptos"/>
+                <a:cs typeface="Aptos"/>
+              </a:defRPr>
+            </a:pPr>
+            <a:r>
+              <a:rPr sz="1100" b="1">
+                <a:solidFill>
+                  <a:srgbClr val="5A665F"/>
+                </a:solidFill>
+                <a:latin typeface="Aptos"/>
+                <a:ea typeface="Aptos"/>
+                <a:cs typeface="Aptos"/>
+              </a:rPr>
               <a:t>4</a:t>
             </a:r>
           </a:p>
@@ -2716,449 +3532,676 @@
         </p:nvSpPr>
         <p:spPr>
           <a:xfrm xmlns:a="http://schemas.openxmlformats.org/drawingml/2006/main">
-            <a:off x="393668" y="344043"/>
-            <a:ext cx="11404568" cy="1047464"/>
+            <a:off x="571500" y="533400"/>
+            <a:ext cx="5191125" cy="1504950"/>
           </a:xfrm>
           <a:prstGeom xmlns:a="http://schemas.openxmlformats.org/drawingml/2006/main" prst="rect">
             <a:avLst/>
           </a:prstGeom>
         </p:spPr>
         <p:txBody>
-          <a:bodyPr xmlns:a="http://schemas.openxmlformats.org/drawingml/2006/main" lIns="0" tIns="0" rIns="0" bIns="0" anchor="t">
+          <a:bodyPr xmlns:a="http://schemas.openxmlformats.org/drawingml/2006/main" lIns="38100" tIns="38100" rIns="38100" bIns="38100" anchor="t">
             <a:normAutofit fontScale="100000"/>
           </a:bodyPr>
           <a:lstStyle xmlns:a="http://schemas.openxmlformats.org/drawingml/2006/main"/>
           <a:p xmlns:a="http://schemas.openxmlformats.org/drawingml/2006/main">
             <a:pPr algn="l">
-              <a:defRPr sz="2900">
-                <a:solidFill>
-                  <a:srgbClr val="000000"/>
-                </a:solidFill>
-                <a:latin typeface="Helvetica Neue"/>
-                <a:ea typeface="Helvetica Neue"/>
-                <a:cs typeface="Helvetica Neue"/>
-              </a:defRPr>
-            </a:pPr>
-            <a:r>
-              <a:t>Use evidence before committing to a decision</a:t>
+              <a:lnSpc>
+                <a:spcPct val="98000"/>
+              </a:lnSpc>
+              <a:buNone/>
+              <a:defRPr sz="3500" b="1">
+                <a:solidFill>
+                  <a:srgbClr val="173126"/>
+                </a:solidFill>
+                <a:latin typeface="Aptos"/>
+                <a:ea typeface="Aptos"/>
+                <a:cs typeface="Aptos"/>
+              </a:defRPr>
+            </a:pPr>
+            <a:r>
+              <a:rPr sz="3500" b="1">
+                <a:solidFill>
+                  <a:srgbClr val="173126"/>
+                </a:solidFill>
+                <a:latin typeface="Aptos"/>
+                <a:ea typeface="Aptos"/>
+                <a:cs typeface="Aptos"/>
+              </a:rPr>
+              <a:t>Butt, rebate and dowel joints in a Desk Tidy</a:t>
             </a:r>
           </a:p>
         </p:txBody>
       </p:sp>
       <p:cxnSp>
         <p:nvCxnSpPr>
-          <p:cNvPr id="15" name="Google-Shape-2259-p159-4"/>
+          <p:cNvPr id="25" name="Google-Shape-2259-p159-4"/>
           <p:cNvCxnSpPr/>
           <p:nvPr/>
         </p:nvCxnSpPr>
         <p:spPr>
           <a:xfrm xmlns:a="http://schemas.openxmlformats.org/drawingml/2006/main">
-            <a:off x="337757" y="3373755"/>
-            <a:ext cx="12245435" cy="286"/>
+            <a:off x="0" y="0"/>
+            <a:ext cx="9525" cy="9525"/>
           </a:xfrm>
           <a:prstGeom xmlns:a="http://schemas.openxmlformats.org/drawingml/2006/main" prst="straightConnector1">
             <a:avLst/>
           </a:prstGeom>
+          <a:ln xmlns:a="http://schemas.openxmlformats.org/drawingml/2006/main" w="0">
+            <a:noFill/>
+            <a:prstDash val="solid"/>
+          </a:ln>
+        </p:spPr>
+      </p:cxnSp>
+      <p:sp>
+        <p:nvSpPr>
+          <p:cNvPr id="4" name="Google-Shape-2260-p159-5">
+            <a:extLst xmlns:a="http://schemas.openxmlformats.org/drawingml/2006/main">
+              <a:ext uri="{FF2B5EF4-FFF2-40B4-BE49-F238E27FC236}">
+                <a16:creationId xmlns:a16="http://schemas.microsoft.com/office/drawing/2014/main" id="{DF8E6CD1-9170-4C92-92D7-6BC6CA4BDCBA}"/>
+              </a:ext>
+            </a:extLst>
+          </p:cNvPr>
+          <p:cNvSpPr>
+            <a:spLocks xmlns:a="http://schemas.openxmlformats.org/drawingml/2006/main" noGrp="1"/>
+          </p:cNvSpPr>
+          <p:nvPr/>
+        </p:nvSpPr>
+        <p:spPr>
+          <a:xfrm xmlns:a="http://schemas.openxmlformats.org/drawingml/2006/main">
+            <a:off x="0" y="0"/>
+            <a:ext cx="9525" cy="9525"/>
+          </a:xfrm>
+          <a:prstGeom xmlns:a="http://schemas.openxmlformats.org/drawingml/2006/main" prst="ellipse">
+            <a:avLst/>
+          </a:prstGeom>
+          <a:noFill xmlns:a="http://schemas.openxmlformats.org/drawingml/2006/main"/>
+          <a:ln xmlns:a="http://schemas.openxmlformats.org/drawingml/2006/main" w="0">
+            <a:noFill/>
+            <a:prstDash val="solid"/>
+          </a:ln>
+        </p:spPr>
+      </p:sp>
+      <p:sp>
+        <p:nvSpPr>
+          <p:cNvPr id="5" name="Google-Shape-2261-p159-6">
+            <a:extLst xmlns:a="http://schemas.openxmlformats.org/drawingml/2006/main">
+              <a:ext uri="{FF2B5EF4-FFF2-40B4-BE49-F238E27FC236}">
+                <a16:creationId xmlns:a16="http://schemas.microsoft.com/office/drawing/2014/main" id="{2697475C-2D7C-4C57-BEBA-A2ABF3D7BDCB}"/>
+              </a:ext>
+            </a:extLst>
+          </p:cNvPr>
+          <p:cNvSpPr>
+            <a:spLocks xmlns:a="http://schemas.openxmlformats.org/drawingml/2006/main" noGrp="1"/>
+          </p:cNvSpPr>
+          <p:nvPr/>
+        </p:nvSpPr>
+        <p:spPr>
+          <a:xfrm xmlns:a="http://schemas.openxmlformats.org/drawingml/2006/main">
+            <a:off x="0" y="0"/>
+            <a:ext cx="9525" cy="9525"/>
+          </a:xfrm>
+          <a:prstGeom xmlns:a="http://schemas.openxmlformats.org/drawingml/2006/main" prst="ellipse">
+            <a:avLst/>
+          </a:prstGeom>
+          <a:noFill xmlns:a="http://schemas.openxmlformats.org/drawingml/2006/main"/>
+          <a:ln xmlns:a="http://schemas.openxmlformats.org/drawingml/2006/main" w="0">
+            <a:noFill/>
+            <a:prstDash val="solid"/>
+          </a:ln>
+        </p:spPr>
+      </p:sp>
+      <p:sp>
+        <p:nvSpPr>
+          <p:cNvPr id="6" name="Google-Shape-2262-p159-7">
+            <a:extLst xmlns:a="http://schemas.openxmlformats.org/drawingml/2006/main">
+              <a:ext uri="{FF2B5EF4-FFF2-40B4-BE49-F238E27FC236}">
+                <a16:creationId xmlns:a16="http://schemas.microsoft.com/office/drawing/2014/main" id="{90D34AC1-8983-4022-9C90-6CA4F0CB7559}"/>
+              </a:ext>
+            </a:extLst>
+          </p:cNvPr>
+          <p:cNvSpPr>
+            <a:spLocks xmlns:a="http://schemas.openxmlformats.org/drawingml/2006/main" noGrp="1"/>
+          </p:cNvSpPr>
+          <p:nvPr/>
+        </p:nvSpPr>
+        <p:spPr>
+          <a:xfrm xmlns:a="http://schemas.openxmlformats.org/drawingml/2006/main">
+            <a:off x="0" y="0"/>
+            <a:ext cx="9525" cy="9525"/>
+          </a:xfrm>
+          <a:prstGeom xmlns:a="http://schemas.openxmlformats.org/drawingml/2006/main" prst="ellipse">
+            <a:avLst/>
+          </a:prstGeom>
+          <a:noFill xmlns:a="http://schemas.openxmlformats.org/drawingml/2006/main"/>
+          <a:ln xmlns:a="http://schemas.openxmlformats.org/drawingml/2006/main" w="0">
+            <a:noFill/>
+            <a:prstDash val="solid"/>
+          </a:ln>
+        </p:spPr>
+      </p:sp>
+      <p:sp>
+        <p:nvSpPr>
+          <p:cNvPr id="7" name="Content-Placeholder-15-8">
+            <a:extLst xmlns:a="http://schemas.openxmlformats.org/drawingml/2006/main">
+              <a:ext uri="{FF2B5EF4-FFF2-40B4-BE49-F238E27FC236}">
+                <a16:creationId xmlns:a16="http://schemas.microsoft.com/office/drawing/2014/main" id="{15CAE694-4FF0-4E53-B454-244A694965BE}"/>
+              </a:ext>
+            </a:extLst>
+          </p:cNvPr>
+          <p:cNvSpPr>
+            <a:spLocks xmlns:a="http://schemas.openxmlformats.org/drawingml/2006/main" noGrp="1"/>
+          </p:cNvSpPr>
+          <p:nvPr/>
+        </p:nvSpPr>
+        <p:spPr>
+          <a:xfrm xmlns:a="http://schemas.openxmlformats.org/drawingml/2006/main">
+            <a:off x="647700" y="2209800"/>
+            <a:ext cx="495300" cy="552450"/>
+          </a:xfrm>
+          <a:prstGeom xmlns:a="http://schemas.openxmlformats.org/drawingml/2006/main" prst="rect">
+            <a:avLst/>
+          </a:prstGeom>
+        </p:spPr>
+        <p:txBody>
+          <a:bodyPr xmlns:a="http://schemas.openxmlformats.org/drawingml/2006/main" lIns="38100" tIns="38100" rIns="38100" bIns="38100" anchor="ctr">
+            <a:normAutofit fontScale="100000"/>
+          </a:bodyPr>
+          <a:lstStyle xmlns:a="http://schemas.openxmlformats.org/drawingml/2006/main"/>
+          <a:p xmlns:a="http://schemas.openxmlformats.org/drawingml/2006/main">
+            <a:pPr algn="l">
+              <a:lnSpc>
+                <a:spcPct val="105000"/>
+              </a:lnSpc>
+              <a:buNone/>
+              <a:defRPr sz="2400" b="1">
+                <a:solidFill>
+                  <a:srgbClr val="D8941C"/>
+                </a:solidFill>
+                <a:latin typeface="Aptos"/>
+                <a:ea typeface="Aptos"/>
+                <a:cs typeface="Aptos"/>
+              </a:defRPr>
+            </a:pPr>
+            <a:r>
+              <a:rPr sz="2400" b="1">
+                <a:solidFill>
+                  <a:srgbClr val="D8941C"/>
+                </a:solidFill>
+                <a:latin typeface="Aptos"/>
+                <a:ea typeface="Aptos"/>
+                <a:cs typeface="Aptos"/>
+              </a:rPr>
+              <a:t>01</a:t>
+            </a:r>
+          </a:p>
+        </p:txBody>
+      </p:sp>
+      <p:sp>
+        <p:nvSpPr>
+          <p:cNvPr id="8" name="Content-Placeholder-15-9">
+            <a:extLst xmlns:a="http://schemas.openxmlformats.org/drawingml/2006/main">
+              <a:ext uri="{FF2B5EF4-FFF2-40B4-BE49-F238E27FC236}">
+                <a16:creationId xmlns:a16="http://schemas.microsoft.com/office/drawing/2014/main" id="{454860B0-96C7-4294-8A2C-FF93A2E1665E}"/>
+              </a:ext>
+            </a:extLst>
+          </p:cNvPr>
+          <p:cNvSpPr>
+            <a:spLocks xmlns:a="http://schemas.openxmlformats.org/drawingml/2006/main" noGrp="1"/>
+          </p:cNvSpPr>
+          <p:nvPr/>
+        </p:nvSpPr>
+        <p:spPr>
+          <a:xfrm xmlns:a="http://schemas.openxmlformats.org/drawingml/2006/main">
+            <a:off x="647700" y="3209925"/>
+            <a:ext cx="495300" cy="552450"/>
+          </a:xfrm>
+          <a:prstGeom xmlns:a="http://schemas.openxmlformats.org/drawingml/2006/main" prst="rect">
+            <a:avLst/>
+          </a:prstGeom>
+        </p:spPr>
+        <p:txBody>
+          <a:bodyPr xmlns:a="http://schemas.openxmlformats.org/drawingml/2006/main" lIns="38100" tIns="38100" rIns="38100" bIns="38100" anchor="ctr">
+            <a:normAutofit fontScale="100000"/>
+          </a:bodyPr>
+          <a:lstStyle xmlns:a="http://schemas.openxmlformats.org/drawingml/2006/main"/>
+          <a:p xmlns:a="http://schemas.openxmlformats.org/drawingml/2006/main">
+            <a:pPr algn="l">
+              <a:lnSpc>
+                <a:spcPct val="105000"/>
+              </a:lnSpc>
+              <a:buNone/>
+              <a:defRPr sz="2400" b="1">
+                <a:solidFill>
+                  <a:srgbClr val="D8941C"/>
+                </a:solidFill>
+                <a:latin typeface="Aptos"/>
+                <a:ea typeface="Aptos"/>
+                <a:cs typeface="Aptos"/>
+              </a:defRPr>
+            </a:pPr>
+            <a:r>
+              <a:rPr sz="2400" b="1">
+                <a:solidFill>
+                  <a:srgbClr val="D8941C"/>
+                </a:solidFill>
+                <a:latin typeface="Aptos"/>
+                <a:ea typeface="Aptos"/>
+                <a:cs typeface="Aptos"/>
+              </a:rPr>
+              <a:t>02</a:t>
+            </a:r>
+          </a:p>
+        </p:txBody>
+      </p:sp>
+      <p:sp>
+        <p:nvSpPr>
+          <p:cNvPr id="9" name="Content-Placeholder-15-10">
+            <a:extLst xmlns:a="http://schemas.openxmlformats.org/drawingml/2006/main">
+              <a:ext uri="{FF2B5EF4-FFF2-40B4-BE49-F238E27FC236}">
+                <a16:creationId xmlns:a16="http://schemas.microsoft.com/office/drawing/2014/main" id="{F5719210-C236-4F39-AA6A-2394F1D14187}"/>
+              </a:ext>
+            </a:extLst>
+          </p:cNvPr>
+          <p:cNvSpPr>
+            <a:spLocks xmlns:a="http://schemas.openxmlformats.org/drawingml/2006/main" noGrp="1"/>
+          </p:cNvSpPr>
+          <p:nvPr/>
+        </p:nvSpPr>
+        <p:spPr>
+          <a:xfrm xmlns:a="http://schemas.openxmlformats.org/drawingml/2006/main">
+            <a:off x="647700" y="4210050"/>
+            <a:ext cx="495300" cy="552450"/>
+          </a:xfrm>
+          <a:prstGeom xmlns:a="http://schemas.openxmlformats.org/drawingml/2006/main" prst="rect">
+            <a:avLst/>
+          </a:prstGeom>
+        </p:spPr>
+        <p:txBody>
+          <a:bodyPr xmlns:a="http://schemas.openxmlformats.org/drawingml/2006/main" lIns="38100" tIns="38100" rIns="38100" bIns="38100" anchor="ctr">
+            <a:normAutofit fontScale="100000"/>
+          </a:bodyPr>
+          <a:lstStyle xmlns:a="http://schemas.openxmlformats.org/drawingml/2006/main"/>
+          <a:p xmlns:a="http://schemas.openxmlformats.org/drawingml/2006/main">
+            <a:pPr algn="l">
+              <a:lnSpc>
+                <a:spcPct val="105000"/>
+              </a:lnSpc>
+              <a:buNone/>
+              <a:defRPr sz="2400" b="1">
+                <a:solidFill>
+                  <a:srgbClr val="D8941C"/>
+                </a:solidFill>
+                <a:latin typeface="Aptos"/>
+                <a:ea typeface="Aptos"/>
+                <a:cs typeface="Aptos"/>
+              </a:defRPr>
+            </a:pPr>
+            <a:r>
+              <a:rPr sz="2400" b="1">
+                <a:solidFill>
+                  <a:srgbClr val="D8941C"/>
+                </a:solidFill>
+                <a:latin typeface="Aptos"/>
+                <a:ea typeface="Aptos"/>
+                <a:cs typeface="Aptos"/>
+              </a:rPr>
+              <a:t>03</a:t>
+            </a:r>
+          </a:p>
+        </p:txBody>
+      </p:sp>
+      <p:sp>
+        <p:nvSpPr>
+          <p:cNvPr id="10" name="Text-Placeholder-16-11">
+            <a:extLst xmlns:a="http://schemas.openxmlformats.org/drawingml/2006/main">
+              <a:ext uri="{FF2B5EF4-FFF2-40B4-BE49-F238E27FC236}">
+                <a16:creationId xmlns:a16="http://schemas.microsoft.com/office/drawing/2014/main" id="{1B320EBC-7CBF-4370-9AF6-13F5C41FCC0A}"/>
+              </a:ext>
+            </a:extLst>
+          </p:cNvPr>
+          <p:cNvSpPr>
+            <a:spLocks xmlns:a="http://schemas.openxmlformats.org/drawingml/2006/main" noGrp="1"/>
+          </p:cNvSpPr>
+          <p:nvPr/>
+        </p:nvSpPr>
+        <p:spPr>
+          <a:xfrm xmlns:a="http://schemas.openxmlformats.org/drawingml/2006/main">
+            <a:off x="1200150" y="2114550"/>
+            <a:ext cx="4429125" cy="857250"/>
+          </a:xfrm>
+          <a:prstGeom xmlns:a="http://schemas.openxmlformats.org/drawingml/2006/main" prst="rect">
+            <a:avLst/>
+          </a:prstGeom>
+        </p:spPr>
+        <p:txBody>
+          <a:bodyPr xmlns:a="http://schemas.openxmlformats.org/drawingml/2006/main" lIns="38100" tIns="38100" rIns="38100" bIns="38100" anchor="ctr">
+            <a:normAutofit fontScale="98945"/>
+          </a:bodyPr>
+          <a:lstStyle xmlns:a="http://schemas.openxmlformats.org/drawingml/2006/main"/>
+          <a:p xmlns:a="http://schemas.openxmlformats.org/drawingml/2006/main">
+            <a:pPr algn="l">
+              <a:lnSpc>
+                <a:spcPct val="108000"/>
+              </a:lnSpc>
+              <a:buNone/>
+              <a:defRPr sz="1700" b="0">
+                <a:solidFill>
+                  <a:srgbClr val="173126"/>
+                </a:solidFill>
+                <a:latin typeface="Aptos"/>
+                <a:ea typeface="Aptos"/>
+                <a:cs typeface="Aptos"/>
+              </a:defRPr>
+            </a:pPr>
+            <a:r>
+              <a:rPr sz="1700" b="0">
+                <a:solidFill>
+                  <a:srgbClr val="173126"/>
+                </a:solidFill>
+                <a:latin typeface="Aptos"/>
+                <a:ea typeface="Aptos"/>
+                <a:cs typeface="Aptos"/>
+              </a:rPr>
+              <a:t>A joint should suit the parts being connected, the required accuracy and the approved design.</a:t>
+            </a:r>
+          </a:p>
+        </p:txBody>
+      </p:sp>
+      <p:sp>
+        <p:nvSpPr>
+          <p:cNvPr id="11" name="Text-Placeholder-16-12">
+            <a:extLst xmlns:a="http://schemas.openxmlformats.org/drawingml/2006/main">
+              <a:ext uri="{FF2B5EF4-FFF2-40B4-BE49-F238E27FC236}">
+                <a16:creationId xmlns:a16="http://schemas.microsoft.com/office/drawing/2014/main" id="{E1C89AE1-8437-4EB9-9406-840A6801C755}"/>
+              </a:ext>
+            </a:extLst>
+          </p:cNvPr>
+          <p:cNvSpPr>
+            <a:spLocks xmlns:a="http://schemas.openxmlformats.org/drawingml/2006/main" noGrp="1"/>
+          </p:cNvSpPr>
+          <p:nvPr/>
+        </p:nvSpPr>
+        <p:spPr>
+          <a:xfrm xmlns:a="http://schemas.openxmlformats.org/drawingml/2006/main">
+            <a:off x="1200150" y="3114675"/>
+            <a:ext cx="4429125" cy="857250"/>
+          </a:xfrm>
+          <a:prstGeom xmlns:a="http://schemas.openxmlformats.org/drawingml/2006/main" prst="rect">
+            <a:avLst/>
+          </a:prstGeom>
+        </p:spPr>
+        <p:txBody>
+          <a:bodyPr xmlns:a="http://schemas.openxmlformats.org/drawingml/2006/main" lIns="38100" tIns="38100" rIns="38100" bIns="38100" anchor="ctr">
+            <a:normAutofit fontScale="100000"/>
+          </a:bodyPr>
+          <a:lstStyle xmlns:a="http://schemas.openxmlformats.org/drawingml/2006/main"/>
+          <a:p xmlns:a="http://schemas.openxmlformats.org/drawingml/2006/main">
+            <a:pPr algn="l">
+              <a:lnSpc>
+                <a:spcPct val="108000"/>
+              </a:lnSpc>
+              <a:buNone/>
+              <a:defRPr sz="1700" b="0">
+                <a:solidFill>
+                  <a:srgbClr val="173126"/>
+                </a:solidFill>
+                <a:latin typeface="Aptos"/>
+                <a:ea typeface="Aptos"/>
+                <a:cs typeface="Aptos"/>
+              </a:defRPr>
+            </a:pPr>
+            <a:r>
+              <a:rPr sz="1700" b="0">
+                <a:solidFill>
+                  <a:srgbClr val="173126"/>
+                </a:solidFill>
+                <a:latin typeface="Aptos"/>
+                <a:ea typeface="Aptos"/>
+                <a:cs typeface="Aptos"/>
+              </a:rPr>
+              <a:t>A joint connects two or more components so they work as one structure.</a:t>
+            </a:r>
+          </a:p>
+        </p:txBody>
+      </p:sp>
+      <p:sp>
+        <p:nvSpPr>
+          <p:cNvPr id="12" name="Text-Placeholder-16-13">
+            <a:extLst xmlns:a="http://schemas.openxmlformats.org/drawingml/2006/main">
+              <a:ext uri="{FF2B5EF4-FFF2-40B4-BE49-F238E27FC236}">
+                <a16:creationId xmlns:a16="http://schemas.microsoft.com/office/drawing/2014/main" id="{C3FB28D8-5682-488E-B886-51E3BB337A49}"/>
+              </a:ext>
+            </a:extLst>
+          </p:cNvPr>
+          <p:cNvSpPr>
+            <a:spLocks xmlns:a="http://schemas.openxmlformats.org/drawingml/2006/main" noGrp="1"/>
+          </p:cNvSpPr>
+          <p:nvPr/>
+        </p:nvSpPr>
+        <p:spPr>
+          <a:xfrm xmlns:a="http://schemas.openxmlformats.org/drawingml/2006/main">
+            <a:off x="1200150" y="4114800"/>
+            <a:ext cx="4429125" cy="857250"/>
+          </a:xfrm>
+          <a:prstGeom xmlns:a="http://schemas.openxmlformats.org/drawingml/2006/main" prst="rect">
+            <a:avLst/>
+          </a:prstGeom>
+        </p:spPr>
+        <p:txBody>
+          <a:bodyPr xmlns:a="http://schemas.openxmlformats.org/drawingml/2006/main" lIns="38100" tIns="38100" rIns="38100" bIns="38100" anchor="ctr">
+            <a:normAutofit fontScale="100000"/>
+          </a:bodyPr>
+          <a:lstStyle xmlns:a="http://schemas.openxmlformats.org/drawingml/2006/main"/>
+          <a:p xmlns:a="http://schemas.openxmlformats.org/drawingml/2006/main">
+            <a:pPr algn="l">
+              <a:lnSpc>
+                <a:spcPct val="108000"/>
+              </a:lnSpc>
+              <a:buNone/>
+              <a:defRPr sz="1700" b="0">
+                <a:solidFill>
+                  <a:srgbClr val="173126"/>
+                </a:solidFill>
+                <a:latin typeface="Aptos"/>
+                <a:ea typeface="Aptos"/>
+                <a:cs typeface="Aptos"/>
+              </a:defRPr>
+            </a:pPr>
+            <a:r>
+              <a:rPr sz="1700" b="0">
+                <a:solidFill>
+                  <a:srgbClr val="173126"/>
+                </a:solidFill>
+                <a:latin typeface="Aptos"/>
+                <a:ea typeface="Aptos"/>
+                <a:cs typeface="Aptos"/>
+              </a:rPr>
+              <a:t>A butt joint places the end or edge of one component directly against another.</a:t>
+            </a:r>
+          </a:p>
+        </p:txBody>
+      </p:sp>
+      <p:sp>
+        <p:nvSpPr>
+          <p:cNvPr id="19" name="">
+            <a:extLst xmlns:a="http://schemas.openxmlformats.org/drawingml/2006/main">
+              <a:ext uri="{FF2B5EF4-FFF2-40B4-BE49-F238E27FC236}">
+                <a16:creationId xmlns:a16="http://schemas.microsoft.com/office/drawing/2014/main" id="{D0ABB58A-6BF5-442F-AB5B-6515CB662660}"/>
+              </a:ext>
+            </a:extLst>
+          </p:cNvPr>
+          <p:cNvSpPr>
+            <a:spLocks xmlns:a="http://schemas.openxmlformats.org/drawingml/2006/main" noGrp="1"/>
+          </p:cNvSpPr>
+          <p:nvPr/>
+        </p:nvSpPr>
+        <p:spPr>
+          <a:xfrm xmlns:a="http://schemas.openxmlformats.org/drawingml/2006/main">
+            <a:off x="590550" y="285750"/>
+            <a:ext cx="2476500" cy="238125"/>
+          </a:xfrm>
+          <a:prstGeom xmlns:a="http://schemas.openxmlformats.org/drawingml/2006/main" prst="rect">
+            <a:avLst/>
+          </a:prstGeom>
+          <a:noFill xmlns:a="http://schemas.openxmlformats.org/drawingml/2006/main"/>
+          <a:ln xmlns:a="http://schemas.openxmlformats.org/drawingml/2006/main" w="0">
+            <a:noFill/>
+            <a:prstDash val="solid"/>
+          </a:ln>
+        </p:spPr>
+        <p:txBody>
+          <a:bodyPr xmlns:a="http://schemas.openxmlformats.org/drawingml/2006/main" lIns="38100" tIns="38100" rIns="38100" bIns="38100" anchor="t">
+            <a:normAutofit fontScale="77839"/>
+          </a:bodyPr>
+          <a:lstStyle xmlns:a="http://schemas.openxmlformats.org/drawingml/2006/main"/>
+          <a:p xmlns:a="http://schemas.openxmlformats.org/drawingml/2006/main">
+            <a:pPr algn="l">
+              <a:lnSpc>
+                <a:spcPct val="105000"/>
+              </a:lnSpc>
+              <a:buNone/>
+              <a:defRPr sz="1300" b="1">
+                <a:solidFill>
+                  <a:srgbClr val="D8941C"/>
+                </a:solidFill>
+                <a:latin typeface="Aptos"/>
+                <a:ea typeface="Aptos"/>
+                <a:cs typeface="Aptos"/>
+              </a:defRPr>
+            </a:pPr>
+            <a:r>
+              <a:rPr sz="1300" b="1">
+                <a:solidFill>
+                  <a:srgbClr val="D8941C"/>
+                </a:solidFill>
+                <a:latin typeface="Aptos"/>
+                <a:ea typeface="Aptos"/>
+                <a:cs typeface="Aptos"/>
+              </a:rPr>
+              <a:t>THEORY 2 OF 3</a:t>
+            </a:r>
+          </a:p>
+        </p:txBody>
+      </p:sp>
+      <p:sp>
+        <p:nvSpPr>
+          <p:cNvPr id="20" name="">
+            <a:extLst xmlns:a="http://schemas.openxmlformats.org/drawingml/2006/main">
+              <a:ext uri="{FF2B5EF4-FFF2-40B4-BE49-F238E27FC236}">
+                <a16:creationId xmlns:a16="http://schemas.microsoft.com/office/drawing/2014/main" id="{77DEF809-1A0D-4B2F-8A7D-139FC022EE0D}"/>
+              </a:ext>
+            </a:extLst>
+          </p:cNvPr>
+          <p:cNvSpPr>
+            <a:spLocks xmlns:a="http://schemas.openxmlformats.org/drawingml/2006/main" noGrp="1"/>
+          </p:cNvSpPr>
+          <p:nvPr/>
+        </p:nvSpPr>
+        <p:spPr>
+          <a:xfrm xmlns:a="http://schemas.openxmlformats.org/drawingml/2006/main">
+            <a:off x="6048375" y="552450"/>
+            <a:ext cx="5619750" cy="5524500"/>
+          </a:xfrm>
+          <a:prstGeom xmlns:a="http://schemas.openxmlformats.org/drawingml/2006/main" prst="roundRect">
+            <a:avLst>
+              <a:gd name="adj" fmla="val 2069"/>
+            </a:avLst>
+          </a:prstGeom>
+          <a:noFill xmlns:a="http://schemas.openxmlformats.org/drawingml/2006/main"/>
           <a:ln xmlns:a="http://schemas.openxmlformats.org/drawingml/2006/main" w="9525">
             <a:solidFill>
-              <a:srgbClr val="000000"/>
+              <a:srgbClr val="D8941C"/>
             </a:solidFill>
             <a:prstDash val="solid"/>
           </a:ln>
         </p:spPr>
-      </p:cxnSp>
-      <p:sp>
-        <p:nvSpPr>
-          <p:cNvPr id="4" name="Google-Shape-2260-p159-5">
-            <a:extLst xmlns:a="http://schemas.openxmlformats.org/drawingml/2006/main">
-              <a:ext uri="{FF2B5EF4-FFF2-40B4-BE49-F238E27FC236}">
-                <a16:creationId xmlns:a16="http://schemas.microsoft.com/office/drawing/2014/main" id="{DF8E6CD1-9170-4C92-92D7-6BC6CA4BDCBA}"/>
-              </a:ext>
-            </a:extLst>
-          </p:cNvPr>
-          <p:cNvSpPr>
-            <a:spLocks xmlns:a="http://schemas.openxmlformats.org/drawingml/2006/main" noGrp="1"/>
-          </p:cNvSpPr>
-          <p:nvPr/>
-        </p:nvSpPr>
-        <p:spPr>
-          <a:xfrm xmlns:a="http://schemas.openxmlformats.org/drawingml/2006/main">
-            <a:off x="337757" y="3320225"/>
-            <a:ext cx="107061" cy="107061"/>
-          </a:xfrm>
-          <a:prstGeom xmlns:a="http://schemas.openxmlformats.org/drawingml/2006/main" prst="ellipse">
-            <a:avLst/>
-          </a:prstGeom>
-          <a:solidFill xmlns:a="http://schemas.openxmlformats.org/drawingml/2006/main">
-            <a:srgbClr val="000000"/>
-          </a:solidFill>
-        </p:spPr>
-      </p:sp>
-      <p:sp>
-        <p:nvSpPr>
-          <p:cNvPr id="5" name="Google-Shape-2261-p159-6">
-            <a:extLst xmlns:a="http://schemas.openxmlformats.org/drawingml/2006/main">
-              <a:ext uri="{FF2B5EF4-FFF2-40B4-BE49-F238E27FC236}">
-                <a16:creationId xmlns:a16="http://schemas.microsoft.com/office/drawing/2014/main" id="{2697475C-2D7C-4C57-BEBA-A2ABF3D7BDCB}"/>
-              </a:ext>
-            </a:extLst>
-          </p:cNvPr>
-          <p:cNvSpPr>
-            <a:spLocks xmlns:a="http://schemas.openxmlformats.org/drawingml/2006/main" noGrp="1"/>
-          </p:cNvSpPr>
-          <p:nvPr/>
-        </p:nvSpPr>
-        <p:spPr>
-          <a:xfrm xmlns:a="http://schemas.openxmlformats.org/drawingml/2006/main">
-            <a:off x="4251770" y="3320225"/>
-            <a:ext cx="107061" cy="107061"/>
-          </a:xfrm>
-          <a:prstGeom xmlns:a="http://schemas.openxmlformats.org/drawingml/2006/main" prst="ellipse">
-            <a:avLst/>
-          </a:prstGeom>
-          <a:solidFill xmlns:a="http://schemas.openxmlformats.org/drawingml/2006/main">
-            <a:srgbClr val="000000"/>
-          </a:solidFill>
-        </p:spPr>
-      </p:sp>
-      <p:sp>
-        <p:nvSpPr>
-          <p:cNvPr id="6" name="Google-Shape-2262-p159-7">
-            <a:extLst xmlns:a="http://schemas.openxmlformats.org/drawingml/2006/main">
-              <a:ext uri="{FF2B5EF4-FFF2-40B4-BE49-F238E27FC236}">
-                <a16:creationId xmlns:a16="http://schemas.microsoft.com/office/drawing/2014/main" id="{90D34AC1-8983-4022-9C90-6CA4F0CB7559}"/>
-              </a:ext>
-            </a:extLst>
-          </p:cNvPr>
-          <p:cNvSpPr>
-            <a:spLocks xmlns:a="http://schemas.openxmlformats.org/drawingml/2006/main" noGrp="1"/>
-          </p:cNvSpPr>
-          <p:nvPr/>
-        </p:nvSpPr>
-        <p:spPr>
-          <a:xfrm xmlns:a="http://schemas.openxmlformats.org/drawingml/2006/main">
-            <a:off x="8176070" y="3320225"/>
-            <a:ext cx="107061" cy="107061"/>
-          </a:xfrm>
-          <a:prstGeom xmlns:a="http://schemas.openxmlformats.org/drawingml/2006/main" prst="ellipse">
-            <a:avLst/>
-          </a:prstGeom>
-          <a:solidFill xmlns:a="http://schemas.openxmlformats.org/drawingml/2006/main">
-            <a:srgbClr val="000000"/>
-          </a:solidFill>
-        </p:spPr>
-      </p:sp>
-      <p:sp>
-        <p:nvSpPr>
-          <p:cNvPr id="7" name="Content-Placeholder-15-8">
-            <a:extLst xmlns:a="http://schemas.openxmlformats.org/drawingml/2006/main">
-              <a:ext uri="{FF2B5EF4-FFF2-40B4-BE49-F238E27FC236}">
-                <a16:creationId xmlns:a16="http://schemas.microsoft.com/office/drawing/2014/main" id="{15CAE694-4FF0-4E53-B454-244A694965BE}"/>
-              </a:ext>
-            </a:extLst>
-          </p:cNvPr>
-          <p:cNvSpPr>
-            <a:spLocks xmlns:a="http://schemas.openxmlformats.org/drawingml/2006/main" noGrp="1"/>
-          </p:cNvSpPr>
-          <p:nvPr/>
-        </p:nvSpPr>
-        <p:spPr>
-          <a:xfrm xmlns:a="http://schemas.openxmlformats.org/drawingml/2006/main">
-            <a:off x="393668" y="2843308"/>
-            <a:ext cx="1612868" cy="262414"/>
+      </p:sp>
+      <p:pic>
+        <p:nvPicPr>
+          <p:cNvPr id="37" name=""/>
+          <p:cNvPicPr>
+            <a:picLocks xmlns:a="http://schemas.openxmlformats.org/drawingml/2006/main" noChangeAspect="1"/>
+          </p:cNvPicPr>
+          <p:nvPr/>
+        </p:nvPicPr>
+        <p:blipFill>
+          <a:blip xmlns:r="http://schemas.openxmlformats.org/officeDocument/2006/relationships" xmlns:a="http://schemas.openxmlformats.org/drawingml/2006/main" r:embed="Rb655145e4f394a23"/>
+          <a:srcRect xmlns:a="http://schemas.openxmlformats.org/drawingml/2006/main" l="14737" t="0" r="14737" b="0"/>
+          <a:stretch xmlns:a="http://schemas.openxmlformats.org/drawingml/2006/main">
+            <a:fillRect l="0" t="0" r="0" b="0"/>
+          </a:stretch>
+        </p:blipFill>
+        <p:spPr>
+          <a:xfrm xmlns:a="http://schemas.openxmlformats.org/drawingml/2006/main">
+            <a:off x="6200775" y="704850"/>
+            <a:ext cx="5314950" cy="4000500"/>
+          </a:xfrm>
+          <a:prstGeom xmlns:a="http://schemas.openxmlformats.org/drawingml/2006/main" prst="roundRect">
+            <a:avLst>
+              <a:gd name="adj" fmla="val 2857"/>
+            </a:avLst>
+          </a:prstGeom>
+        </p:spPr>
+      </p:pic>
+      <p:sp>
+        <p:nvSpPr>
+          <p:cNvPr id="22" name="">
+            <a:extLst xmlns:a="http://schemas.openxmlformats.org/drawingml/2006/main">
+              <a:ext uri="{FF2B5EF4-FFF2-40B4-BE49-F238E27FC236}">
+                <a16:creationId xmlns:a16="http://schemas.microsoft.com/office/drawing/2014/main" id="{6BAE2023-2A68-4824-880C-A875CB83C043}"/>
+              </a:ext>
+            </a:extLst>
+          </p:cNvPr>
+          <p:cNvSpPr>
+            <a:spLocks xmlns:a="http://schemas.openxmlformats.org/drawingml/2006/main" noGrp="1"/>
+          </p:cNvSpPr>
+          <p:nvPr/>
+        </p:nvSpPr>
+        <p:spPr>
+          <a:xfrm xmlns:a="http://schemas.openxmlformats.org/drawingml/2006/main">
+            <a:off x="6267450" y="4810125"/>
+            <a:ext cx="5162550" cy="1123950"/>
           </a:xfrm>
           <a:prstGeom xmlns:a="http://schemas.openxmlformats.org/drawingml/2006/main" prst="rect">
             <a:avLst/>
           </a:prstGeom>
-        </p:spPr>
-        <p:txBody>
-          <a:bodyPr xmlns:a="http://schemas.openxmlformats.org/drawingml/2006/main" lIns="0" tIns="0" rIns="0" bIns="0">
-            <a:noAutofit/>
+          <a:noFill xmlns:a="http://schemas.openxmlformats.org/drawingml/2006/main"/>
+          <a:ln xmlns:a="http://schemas.openxmlformats.org/drawingml/2006/main" w="0">
+            <a:noFill/>
+            <a:prstDash val="solid"/>
+          </a:ln>
+        </p:spPr>
+        <p:txBody>
+          <a:bodyPr xmlns:a="http://schemas.openxmlformats.org/drawingml/2006/main" lIns="38100" tIns="38100" rIns="38100" bIns="38100" anchor="t">
+            <a:normAutofit fontScale="100000"/>
           </a:bodyPr>
           <a:lstStyle xmlns:a="http://schemas.openxmlformats.org/drawingml/2006/main"/>
           <a:p xmlns:a="http://schemas.openxmlformats.org/drawingml/2006/main">
             <a:pPr algn="l">
-              <a:defRPr sz="1600">
-                <a:solidFill>
-                  <a:srgbClr val="000000"/>
-                </a:solidFill>
-                <a:latin typeface="Helvetica Neue"/>
-                <a:ea typeface="Helvetica Neue"/>
-                <a:cs typeface="Helvetica Neue"/>
-              </a:defRPr>
-            </a:pPr>
-            <a:r>
-              <a:t>OBSERVE</a:t>
-            </a:r>
-          </a:p>
-        </p:txBody>
-      </p:sp>
-      <p:sp>
-        <p:nvSpPr>
-          <p:cNvPr id="8" name="Content-Placeholder-15-9">
-            <a:extLst xmlns:a="http://schemas.openxmlformats.org/drawingml/2006/main">
-              <a:ext uri="{FF2B5EF4-FFF2-40B4-BE49-F238E27FC236}">
-                <a16:creationId xmlns:a16="http://schemas.microsoft.com/office/drawing/2014/main" id="{454860B0-96C7-4294-8A2C-FF93A2E1665E}"/>
-              </a:ext>
-            </a:extLst>
-          </p:cNvPr>
-          <p:cNvSpPr>
-            <a:spLocks xmlns:a="http://schemas.openxmlformats.org/drawingml/2006/main" noGrp="1"/>
-          </p:cNvSpPr>
-          <p:nvPr/>
-        </p:nvSpPr>
-        <p:spPr>
-          <a:xfrm xmlns:a="http://schemas.openxmlformats.org/drawingml/2006/main">
-            <a:off x="4294156" y="2843308"/>
-            <a:ext cx="1612868" cy="262414"/>
-          </a:xfrm>
-          <a:prstGeom xmlns:a="http://schemas.openxmlformats.org/drawingml/2006/main" prst="rect">
-            <a:avLst/>
-          </a:prstGeom>
-        </p:spPr>
-        <p:txBody>
-          <a:bodyPr xmlns:a="http://schemas.openxmlformats.org/drawingml/2006/main" lIns="0" tIns="0" rIns="0" bIns="0">
-            <a:noAutofit/>
-          </a:bodyPr>
-          <a:lstStyle xmlns:a="http://schemas.openxmlformats.org/drawingml/2006/main"/>
-          <a:p xmlns:a="http://schemas.openxmlformats.org/drawingml/2006/main">
-            <a:pPr algn="l">
-              <a:defRPr sz="1600">
-                <a:solidFill>
-                  <a:srgbClr val="000000"/>
-                </a:solidFill>
-                <a:latin typeface="Helvetica Neue"/>
-                <a:ea typeface="Helvetica Neue"/>
-                <a:cs typeface="Helvetica Neue"/>
-              </a:defRPr>
-            </a:pPr>
-            <a:r>
-              <a:t>CHECK</a:t>
-            </a:r>
-          </a:p>
-        </p:txBody>
-      </p:sp>
-      <p:sp>
-        <p:nvSpPr>
-          <p:cNvPr id="9" name="Content-Placeholder-15-10">
-            <a:extLst xmlns:a="http://schemas.openxmlformats.org/drawingml/2006/main">
-              <a:ext uri="{FF2B5EF4-FFF2-40B4-BE49-F238E27FC236}">
-                <a16:creationId xmlns:a16="http://schemas.microsoft.com/office/drawing/2014/main" id="{F5719210-C236-4F39-AA6A-2394F1D14187}"/>
-              </a:ext>
-            </a:extLst>
-          </p:cNvPr>
-          <p:cNvSpPr>
-            <a:spLocks xmlns:a="http://schemas.openxmlformats.org/drawingml/2006/main" noGrp="1"/>
-          </p:cNvSpPr>
-          <p:nvPr/>
-        </p:nvSpPr>
-        <p:spPr>
-          <a:xfrm xmlns:a="http://schemas.openxmlformats.org/drawingml/2006/main">
-            <a:off x="8223218" y="2843308"/>
-            <a:ext cx="1612868" cy="262414"/>
-          </a:xfrm>
-          <a:prstGeom xmlns:a="http://schemas.openxmlformats.org/drawingml/2006/main" prst="rect">
-            <a:avLst/>
-          </a:prstGeom>
-        </p:spPr>
-        <p:txBody>
-          <a:bodyPr xmlns:a="http://schemas.openxmlformats.org/drawingml/2006/main" lIns="0" tIns="0" rIns="0" bIns="0">
-            <a:noAutofit/>
-          </a:bodyPr>
-          <a:lstStyle xmlns:a="http://schemas.openxmlformats.org/drawingml/2006/main"/>
-          <a:p xmlns:a="http://schemas.openxmlformats.org/drawingml/2006/main">
-            <a:pPr algn="l">
-              <a:defRPr sz="1600">
-                <a:solidFill>
-                  <a:srgbClr val="000000"/>
-                </a:solidFill>
-                <a:latin typeface="Helvetica Neue"/>
-                <a:ea typeface="Helvetica Neue"/>
-                <a:cs typeface="Helvetica Neue"/>
-              </a:defRPr>
-            </a:pPr>
-            <a:r>
-              <a:t>ACT</a:t>
-            </a:r>
-          </a:p>
-        </p:txBody>
-      </p:sp>
-      <p:sp>
-        <p:nvSpPr>
-          <p:cNvPr id="10" name="Text-Placeholder-16-11">
-            <a:extLst xmlns:a="http://schemas.openxmlformats.org/drawingml/2006/main">
-              <a:ext uri="{FF2B5EF4-FFF2-40B4-BE49-F238E27FC236}">
-                <a16:creationId xmlns:a16="http://schemas.microsoft.com/office/drawing/2014/main" id="{1B320EBC-7CBF-4370-9AF6-13F5C41FCC0A}"/>
-              </a:ext>
-            </a:extLst>
-          </p:cNvPr>
-          <p:cNvSpPr>
-            <a:spLocks xmlns:a="http://schemas.openxmlformats.org/drawingml/2006/main" noGrp="1"/>
-          </p:cNvSpPr>
-          <p:nvPr/>
-        </p:nvSpPr>
-        <p:spPr>
-          <a:xfrm xmlns:a="http://schemas.openxmlformats.org/drawingml/2006/main">
-            <a:off x="4317111" y="3822668"/>
-            <a:ext cx="3156109" cy="1586294"/>
-          </a:xfrm>
-          <a:prstGeom xmlns:a="http://schemas.openxmlformats.org/drawingml/2006/main" prst="rect">
-            <a:avLst/>
-          </a:prstGeom>
-        </p:spPr>
-        <p:txBody>
-          <a:bodyPr xmlns:a="http://schemas.openxmlformats.org/drawingml/2006/main" lIns="0" tIns="0" rIns="0" bIns="0">
-            <a:noAutofit/>
-          </a:bodyPr>
-          <a:lstStyle xmlns:a="http://schemas.openxmlformats.org/drawingml/2006/main"/>
-          <a:p xmlns:a="http://schemas.openxmlformats.org/drawingml/2006/main">
-            <a:pPr algn="l">
-              <a:defRPr sz="2400">
-                <a:solidFill>
-                  <a:srgbClr val="000000"/>
-                </a:solidFill>
-                <a:latin typeface="Helvetica Neue"/>
-                <a:ea typeface="Helvetica Neue"/>
-                <a:cs typeface="Helvetica Neue"/>
-              </a:defRPr>
-            </a:pPr>
-            <a:r>
-              <a:t>Compare</a:t>
-            </a:r>
-          </a:p>
-          <a:p xmlns:a="http://schemas.openxmlformats.org/drawingml/2006/main">
-            <a:pPr algn="l">
-              <a:defRPr sz="2400">
-                <a:solidFill>
-                  <a:srgbClr val="000000"/>
-                </a:solidFill>
-                <a:latin typeface="Helvetica Neue"/>
-                <a:ea typeface="Helvetica Neue"/>
-                <a:cs typeface="Helvetica Neue"/>
-              </a:defRPr>
-            </a:pPr>
-            <a:r>
-              <a:t>Consider alignment, fit and appearance</a:t>
-            </a:r>
-          </a:p>
-        </p:txBody>
-      </p:sp>
-      <p:sp>
-        <p:nvSpPr>
-          <p:cNvPr id="11" name="Text-Placeholder-16-12">
-            <a:extLst xmlns:a="http://schemas.openxmlformats.org/drawingml/2006/main">
-              <a:ext uri="{FF2B5EF4-FFF2-40B4-BE49-F238E27FC236}">
-                <a16:creationId xmlns:a16="http://schemas.microsoft.com/office/drawing/2014/main" id="{E1C89AE1-8437-4EB9-9406-840A6801C755}"/>
-              </a:ext>
-            </a:extLst>
-          </p:cNvPr>
-          <p:cNvSpPr>
-            <a:spLocks xmlns:a="http://schemas.openxmlformats.org/drawingml/2006/main" noGrp="1"/>
-          </p:cNvSpPr>
-          <p:nvPr/>
-        </p:nvSpPr>
-        <p:spPr>
-          <a:xfrm xmlns:a="http://schemas.openxmlformats.org/drawingml/2006/main">
-            <a:off x="399859" y="3822668"/>
-            <a:ext cx="3156109" cy="1586294"/>
-          </a:xfrm>
-          <a:prstGeom xmlns:a="http://schemas.openxmlformats.org/drawingml/2006/main" prst="rect">
-            <a:avLst/>
-          </a:prstGeom>
-        </p:spPr>
-        <p:txBody>
-          <a:bodyPr xmlns:a="http://schemas.openxmlformats.org/drawingml/2006/main" lIns="0" tIns="0" rIns="0" bIns="0">
-            <a:noAutofit/>
-          </a:bodyPr>
-          <a:lstStyle xmlns:a="http://schemas.openxmlformats.org/drawingml/2006/main"/>
-          <a:p xmlns:a="http://schemas.openxmlformats.org/drawingml/2006/main">
-            <a:pPr algn="l">
-              <a:defRPr sz="2400">
-                <a:solidFill>
-                  <a:srgbClr val="000000"/>
-                </a:solidFill>
-                <a:latin typeface="Helvetica Neue"/>
-                <a:ea typeface="Helvetica Neue"/>
-                <a:cs typeface="Helvetica Neue"/>
-              </a:defRPr>
-            </a:pPr>
-            <a:r>
-              <a:t>Read</a:t>
-            </a:r>
-          </a:p>
-          <a:p xmlns:a="http://schemas.openxmlformats.org/drawingml/2006/main">
-            <a:pPr algn="l">
-              <a:defRPr sz="2400">
-                <a:solidFill>
-                  <a:srgbClr val="000000"/>
-                </a:solidFill>
-                <a:latin typeface="Helvetica Neue"/>
-                <a:ea typeface="Helvetica Neue"/>
-                <a:cs typeface="Helvetica Neue"/>
-              </a:defRPr>
-            </a:pPr>
-            <a:r>
-              <a:t>Cut on the waste side of the line</a:t>
-            </a:r>
-          </a:p>
-        </p:txBody>
-      </p:sp>
-      <p:sp>
-        <p:nvSpPr>
-          <p:cNvPr id="12" name="Text-Placeholder-16-13">
-            <a:extLst xmlns:a="http://schemas.openxmlformats.org/drawingml/2006/main">
-              <a:ext uri="{FF2B5EF4-FFF2-40B4-BE49-F238E27FC236}">
-                <a16:creationId xmlns:a16="http://schemas.microsoft.com/office/drawing/2014/main" id="{C3FB28D8-5682-488E-B886-51E3BB337A49}"/>
-              </a:ext>
-            </a:extLst>
-          </p:cNvPr>
-          <p:cNvSpPr>
-            <a:spLocks xmlns:a="http://schemas.openxmlformats.org/drawingml/2006/main" noGrp="1"/>
-          </p:cNvSpPr>
-          <p:nvPr/>
-        </p:nvSpPr>
-        <p:spPr>
-          <a:xfrm xmlns:a="http://schemas.openxmlformats.org/drawingml/2006/main">
-            <a:off x="8177879" y="3822668"/>
-            <a:ext cx="3156109" cy="1586294"/>
-          </a:xfrm>
-          <a:prstGeom xmlns:a="http://schemas.openxmlformats.org/drawingml/2006/main" prst="rect">
-            <a:avLst/>
-          </a:prstGeom>
-        </p:spPr>
-        <p:txBody>
-          <a:bodyPr xmlns:a="http://schemas.openxmlformats.org/drawingml/2006/main" lIns="0" tIns="0" rIns="0" bIns="0">
-            <a:noAutofit/>
-          </a:bodyPr>
-          <a:lstStyle xmlns:a="http://schemas.openxmlformats.org/drawingml/2006/main"/>
-          <a:p xmlns:a="http://schemas.openxmlformats.org/drawingml/2006/main">
-            <a:pPr algn="l">
-              <a:defRPr sz="2400">
-                <a:solidFill>
-                  <a:srgbClr val="000000"/>
-                </a:solidFill>
-                <a:latin typeface="Helvetica Neue"/>
-                <a:ea typeface="Helvetica Neue"/>
-                <a:cs typeface="Helvetica Neue"/>
-              </a:defRPr>
-            </a:pPr>
-            <a:r>
-              <a:t>Record</a:t>
-            </a:r>
-          </a:p>
-          <a:p xmlns:a="http://schemas.openxmlformats.org/drawingml/2006/main">
-            <a:pPr algn="l">
-              <a:defRPr sz="2400">
-                <a:solidFill>
-                  <a:srgbClr val="000000"/>
-                </a:solidFill>
-                <a:latin typeface="Helvetica Neue"/>
-                <a:ea typeface="Helvetica Neue"/>
-                <a:cs typeface="Helvetica Neue"/>
-              </a:defRPr>
-            </a:pPr>
-            <a:r>
-              <a:t>Resolve gaps and misalignment first</a:t>
+              <a:lnSpc>
+                <a:spcPct val="105000"/>
+              </a:lnSpc>
+              <a:buNone/>
+              <a:defRPr sz="1600" b="0">
+                <a:solidFill>
+                  <a:srgbClr val="5A665F"/>
+                </a:solidFill>
+                <a:latin typeface="Aptos"/>
+                <a:ea typeface="Aptos"/>
+                <a:cs typeface="Aptos"/>
+              </a:defRPr>
+            </a:pPr>
+            <a:r>
+              <a:rPr sz="1600" b="0">
+                <a:solidFill>
+                  <a:srgbClr val="5A665F"/>
+                </a:solidFill>
+                <a:latin typeface="Aptos"/>
+                <a:ea typeface="Aptos"/>
+                <a:cs typeface="Aptos"/>
+              </a:rPr>
+              <a:t>Select a joint for its purpose, then test the fit before assembly.</a:t>
             </a:r>
           </a:p>
         </p:txBody>
@@ -3176,6 +4219,13 @@
 <file path=ppt/slides/slide5.xml><?xml version="1.0" encoding="utf-8"?>
 <p:sld xmlns:p="http://schemas.openxmlformats.org/presentationml/2006/main">
   <p:cSld>
+    <p:bg>
+      <p:bgPr>
+        <a:solidFill xmlns:a="http://schemas.openxmlformats.org/drawingml/2006/main">
+          <a:srgbClr val="F8F2E8"/>
+        </a:solidFill>
+      </p:bgPr>
+    </p:bg>
     <p:spTree>
       <p:nvGrpSpPr>
         <p:cNvPr id="1" name=""/>
@@ -3201,28 +4251,42 @@
         </p:nvSpPr>
         <p:spPr>
           <a:xfrm xmlns:a="http://schemas.openxmlformats.org/drawingml/2006/main">
-            <a:off x="11279219" y="6278594"/>
-            <a:ext cx="519113" cy="241268"/>
+            <a:off x="11334750" y="6496050"/>
+            <a:ext cx="400050" cy="190500"/>
           </a:xfrm>
           <a:prstGeom xmlns:a="http://schemas.openxmlformats.org/drawingml/2006/main" prst="rect">
             <a:avLst/>
           </a:prstGeom>
         </p:spPr>
         <p:txBody>
-          <a:bodyPr xmlns:a="http://schemas.openxmlformats.org/drawingml/2006/main" lIns="0" tIns="0" rIns="0" bIns="0" anchor="b"/>
+          <a:bodyPr xmlns:a="http://schemas.openxmlformats.org/drawingml/2006/main" lIns="38100" tIns="38100" rIns="38100" bIns="38100" anchor="ctr">
+            <a:normAutofit fontScale="64935"/>
+          </a:bodyPr>
           <a:lstStyle xmlns:a="http://schemas.openxmlformats.org/drawingml/2006/main"/>
           <a:p xmlns:a="http://schemas.openxmlformats.org/drawingml/2006/main">
             <a:pPr algn="r">
-              <a:defRPr sz="1000">
-                <a:solidFill>
-                  <a:srgbClr val="000000"/>
-                </a:solidFill>
-                <a:latin typeface="Helvetica Neue"/>
-                <a:ea typeface="Helvetica Neue"/>
-                <a:cs typeface="Helvetica Neue"/>
-              </a:defRPr>
-            </a:pPr>
-            <a:r>
+              <a:lnSpc>
+                <a:spcPct val="105000"/>
+              </a:lnSpc>
+              <a:buNone/>
+              <a:defRPr sz="1100" b="1">
+                <a:solidFill>
+                  <a:srgbClr val="5A665F"/>
+                </a:solidFill>
+                <a:latin typeface="Aptos"/>
+                <a:ea typeface="Aptos"/>
+                <a:cs typeface="Aptos"/>
+              </a:defRPr>
+            </a:pPr>
+            <a:r>
+              <a:rPr sz="1100" b="1">
+                <a:solidFill>
+                  <a:srgbClr val="5A665F"/>
+                </a:solidFill>
+                <a:latin typeface="Aptos"/>
+                <a:ea typeface="Aptos"/>
+                <a:cs typeface="Aptos"/>
+              </a:rPr>
               <a:t>5</a:t>
             </a:r>
           </a:p>
@@ -3244,31 +4308,43 @@
         </p:nvSpPr>
         <p:spPr>
           <a:xfrm xmlns:a="http://schemas.openxmlformats.org/drawingml/2006/main">
-            <a:off x="393668" y="344043"/>
-            <a:ext cx="11404568" cy="1047464"/>
+            <a:off x="571500" y="533400"/>
+            <a:ext cx="5191125" cy="1504950"/>
           </a:xfrm>
           <a:prstGeom xmlns:a="http://schemas.openxmlformats.org/drawingml/2006/main" prst="rect">
             <a:avLst/>
           </a:prstGeom>
         </p:spPr>
         <p:txBody>
-          <a:bodyPr xmlns:a="http://schemas.openxmlformats.org/drawingml/2006/main" lIns="0" tIns="0" rIns="0" bIns="0" anchor="t">
+          <a:bodyPr xmlns:a="http://schemas.openxmlformats.org/drawingml/2006/main" lIns="38100" tIns="38100" rIns="38100" bIns="38100" anchor="t">
             <a:normAutofit fontScale="100000"/>
           </a:bodyPr>
           <a:lstStyle xmlns:a="http://schemas.openxmlformats.org/drawingml/2006/main"/>
           <a:p xmlns:a="http://schemas.openxmlformats.org/drawingml/2006/main">
             <a:pPr algn="l">
-              <a:defRPr sz="2900">
-                <a:solidFill>
-                  <a:srgbClr val="000000"/>
-                </a:solidFill>
-                <a:latin typeface="Helvetica Neue"/>
-                <a:ea typeface="Helvetica Neue"/>
-                <a:cs typeface="Helvetica Neue"/>
-              </a:defRPr>
-            </a:pPr>
-            <a:r>
-              <a:t>Choose joints for purpose</a:t>
+              <a:lnSpc>
+                <a:spcPct val="98000"/>
+              </a:lnSpc>
+              <a:buNone/>
+              <a:defRPr sz="3500" b="1">
+                <a:solidFill>
+                  <a:srgbClr val="173126"/>
+                </a:solidFill>
+                <a:latin typeface="Aptos"/>
+                <a:ea typeface="Aptos"/>
+                <a:cs typeface="Aptos"/>
+              </a:defRPr>
+            </a:pPr>
+            <a:r>
+              <a:rPr sz="3500" b="1">
+                <a:solidFill>
+                  <a:srgbClr val="173126"/>
+                </a:solidFill>
+                <a:latin typeface="Aptos"/>
+                <a:ea typeface="Aptos"/>
+                <a:cs typeface="Aptos"/>
+              </a:rPr>
+              <a:t>Dry fitting, PVA assembly and surface preparation</a:t>
             </a:r>
           </a:p>
         </p:txBody>
@@ -3289,222 +4365,398 @@
         </p:nvSpPr>
         <p:spPr>
           <a:xfrm xmlns:a="http://schemas.openxmlformats.org/drawingml/2006/main">
-            <a:off x="393668" y="2031968"/>
-            <a:ext cx="5537168" cy="1643063"/>
+            <a:off x="685800" y="2095500"/>
+            <a:ext cx="4905375" cy="723900"/>
           </a:xfrm>
           <a:prstGeom xmlns:a="http://schemas.openxmlformats.org/drawingml/2006/main" prst="rect">
             <a:avLst/>
           </a:prstGeom>
         </p:spPr>
         <p:txBody>
-          <a:bodyPr xmlns:a="http://schemas.openxmlformats.org/drawingml/2006/main" lIns="91440" tIns="45720" rIns="91440" bIns="45720"/>
-          <a:lstStyle xmlns:a="http://schemas.openxmlformats.org/drawingml/2006/main"/>
-          <a:p xmlns:a="http://schemas.openxmlformats.org/drawingml/2006/main">
-            <a:pPr algn="l">
-              <a:defRPr sz="2400">
-                <a:solidFill>
-                  <a:srgbClr val="000000"/>
-                </a:solidFill>
-                <a:latin typeface="Helvetica Neue"/>
-                <a:ea typeface="Helvetica Neue"/>
-                <a:cs typeface="Helvetica Neue"/>
-              </a:defRPr>
-            </a:pPr>
-            <a:r>
-              <a:t>1</a:t>
-            </a:r>
-          </a:p>
-          <a:p xmlns:a="http://schemas.openxmlformats.org/drawingml/2006/main">
-            <a:pPr algn="l">
-              <a:defRPr sz="2400">
-                <a:solidFill>
-                  <a:srgbClr val="000000"/>
-                </a:solidFill>
-                <a:latin typeface="Helvetica Neue"/>
-                <a:ea typeface="Helvetica Neue"/>
-                <a:cs typeface="Helvetica Neue"/>
-              </a:defRPr>
-            </a:pPr>
-            <a:r>
-              <a:t>Compare butt, rebate and dowel relationships</a:t>
-            </a:r>
-          </a:p>
-        </p:txBody>
-      </p:sp>
-      <p:sp>
-        <p:nvSpPr>
-          <p:cNvPr id="4" name="Content-Placeholder-10-5">
-            <a:extLst xmlns:a="http://schemas.openxmlformats.org/drawingml/2006/main">
-              <a:ext uri="{FF2B5EF4-FFF2-40B4-BE49-F238E27FC236}">
-                <a16:creationId xmlns:a16="http://schemas.microsoft.com/office/drawing/2014/main" id="{8947A3C1-ADA5-4D6C-B0DE-7A818C91A890}"/>
-              </a:ext>
-            </a:extLst>
-          </p:cNvPr>
-          <p:cNvSpPr>
-            <a:spLocks xmlns:a="http://schemas.openxmlformats.org/drawingml/2006/main" noGrp="1"/>
-          </p:cNvSpPr>
-          <p:nvPr/>
-        </p:nvSpPr>
-        <p:spPr>
-          <a:xfrm xmlns:a="http://schemas.openxmlformats.org/drawingml/2006/main">
-            <a:off x="6256592" y="2031968"/>
-            <a:ext cx="5537168" cy="1643063"/>
-          </a:xfrm>
-          <a:prstGeom xmlns:a="http://schemas.openxmlformats.org/drawingml/2006/main" prst="rect">
-            <a:avLst/>
-          </a:prstGeom>
-        </p:spPr>
-        <p:txBody>
-          <a:bodyPr xmlns:a="http://schemas.openxmlformats.org/drawingml/2006/main" lIns="91440" tIns="45720" rIns="91440" bIns="45720"/>
-          <a:lstStyle xmlns:a="http://schemas.openxmlformats.org/drawingml/2006/main"/>
-          <a:p xmlns:a="http://schemas.openxmlformats.org/drawingml/2006/main">
-            <a:pPr algn="l">
-              <a:defRPr sz="2400">
-                <a:solidFill>
-                  <a:srgbClr val="000000"/>
-                </a:solidFill>
-                <a:latin typeface="Helvetica Neue"/>
-                <a:ea typeface="Helvetica Neue"/>
-                <a:cs typeface="Helvetica Neue"/>
-              </a:defRPr>
-            </a:pPr>
-            <a:r>
-              <a:t>2</a:t>
-            </a:r>
-          </a:p>
-          <a:p xmlns:a="http://schemas.openxmlformats.org/drawingml/2006/main">
-            <a:pPr algn="l">
-              <a:defRPr sz="2400">
-                <a:solidFill>
-                  <a:srgbClr val="000000"/>
-                </a:solidFill>
-                <a:latin typeface="Helvetica Neue"/>
-                <a:ea typeface="Helvetica Neue"/>
-                <a:cs typeface="Helvetica Neue"/>
-              </a:defRPr>
-            </a:pPr>
-            <a:r>
-              <a:t>Consider alignment, fit and appearance</a:t>
-            </a:r>
-          </a:p>
-        </p:txBody>
-      </p:sp>
-      <p:sp>
-        <p:nvSpPr>
-          <p:cNvPr id="5" name="Content-Placeholder-9-6">
-            <a:extLst xmlns:a="http://schemas.openxmlformats.org/drawingml/2006/main">
-              <a:ext uri="{FF2B5EF4-FFF2-40B4-BE49-F238E27FC236}">
-                <a16:creationId xmlns:a16="http://schemas.microsoft.com/office/drawing/2014/main" id="{5AC9B470-0786-49DD-ADE4-53F6DDDFE99C}"/>
-              </a:ext>
-            </a:extLst>
-          </p:cNvPr>
-          <p:cNvSpPr>
-            <a:spLocks xmlns:a="http://schemas.openxmlformats.org/drawingml/2006/main" noGrp="1"/>
-          </p:cNvSpPr>
-          <p:nvPr/>
-        </p:nvSpPr>
-        <p:spPr>
-          <a:xfrm xmlns:a="http://schemas.openxmlformats.org/drawingml/2006/main">
-            <a:off x="393668" y="4016978"/>
-            <a:ext cx="5537168" cy="1643158"/>
-          </a:xfrm>
-          <a:prstGeom xmlns:a="http://schemas.openxmlformats.org/drawingml/2006/main" prst="rect">
-            <a:avLst/>
-          </a:prstGeom>
-        </p:spPr>
-        <p:txBody>
-          <a:bodyPr xmlns:a="http://schemas.openxmlformats.org/drawingml/2006/main" lIns="0" tIns="0" rIns="0" bIns="0">
+          <a:bodyPr xmlns:a="http://schemas.openxmlformats.org/drawingml/2006/main" lIns="38100" tIns="38100" rIns="38100" bIns="38100" anchor="ctr">
             <a:normAutofit fontScale="100000"/>
           </a:bodyPr>
           <a:lstStyle xmlns:a="http://schemas.openxmlformats.org/drawingml/2006/main"/>
           <a:p xmlns:a="http://schemas.openxmlformats.org/drawingml/2006/main">
             <a:pPr algn="l">
-              <a:defRPr sz="2400">
-                <a:solidFill>
-                  <a:srgbClr val="000000"/>
-                </a:solidFill>
-                <a:latin typeface="Helvetica Neue"/>
-                <a:ea typeface="Helvetica Neue"/>
-                <a:cs typeface="Helvetica Neue"/>
-              </a:defRPr>
-            </a:pPr>
-            <a:r>
-              <a:t>3</a:t>
-            </a:r>
-          </a:p>
-          <a:p xmlns:a="http://schemas.openxmlformats.org/drawingml/2006/main">
-            <a:pPr algn="l">
-              <a:defRPr sz="2400">
-                <a:solidFill>
-                  <a:srgbClr val="000000"/>
-                </a:solidFill>
-                <a:latin typeface="Helvetica Neue"/>
-                <a:ea typeface="Helvetica Neue"/>
-                <a:cs typeface="Helvetica Neue"/>
-              </a:defRPr>
-            </a:pPr>
-            <a:r>
-              <a:t>Use the approved drawing and teacher direction</a:t>
-            </a:r>
-          </a:p>
-        </p:txBody>
-      </p:sp>
-      <p:sp>
-        <p:nvSpPr>
-          <p:cNvPr id="6" name="Content-Placeholder-10-7">
-            <a:extLst xmlns:a="http://schemas.openxmlformats.org/drawingml/2006/main">
-              <a:ext uri="{FF2B5EF4-FFF2-40B4-BE49-F238E27FC236}">
-                <a16:creationId xmlns:a16="http://schemas.microsoft.com/office/drawing/2014/main" id="{9EFDF80B-84C2-4E73-960E-165CE6DF85BC}"/>
-              </a:ext>
-            </a:extLst>
-          </p:cNvPr>
-          <p:cNvSpPr>
-            <a:spLocks xmlns:a="http://schemas.openxmlformats.org/drawingml/2006/main" noGrp="1"/>
-          </p:cNvSpPr>
-          <p:nvPr/>
-        </p:nvSpPr>
-        <p:spPr>
-          <a:xfrm xmlns:a="http://schemas.openxmlformats.org/drawingml/2006/main">
-            <a:off x="6256592" y="4016978"/>
-            <a:ext cx="5537168" cy="1643158"/>
+              <a:lnSpc>
+                <a:spcPct val="108000"/>
+              </a:lnSpc>
+              <a:buNone/>
+              <a:defRPr sz="1700" b="0">
+                <a:solidFill>
+                  <a:srgbClr val="173126"/>
+                </a:solidFill>
+                <a:latin typeface="Aptos"/>
+                <a:ea typeface="Aptos"/>
+                <a:cs typeface="Aptos"/>
+              </a:defRPr>
+            </a:pPr>
+            <a:r>
+              <a:rPr sz="1700" b="0">
+                <a:solidFill>
+                  <a:srgbClr val="173126"/>
+                </a:solidFill>
+                <a:latin typeface="Aptos"/>
+                <a:ea typeface="Aptos"/>
+                <a:cs typeface="Aptos"/>
+              </a:rPr>
+              <a:t>01 Dry fit: Assemble all parts and check order, fit, square and stability.</a:t>
+            </a:r>
+          </a:p>
+        </p:txBody>
+      </p:sp>
+      <p:sp>
+        <p:nvSpPr>
+          <p:cNvPr id="4" name="Content-Placeholder-10-5">
+            <a:extLst xmlns:a="http://schemas.openxmlformats.org/drawingml/2006/main">
+              <a:ext uri="{FF2B5EF4-FFF2-40B4-BE49-F238E27FC236}">
+                <a16:creationId xmlns:a16="http://schemas.microsoft.com/office/drawing/2014/main" id="{8947A3C1-ADA5-4D6C-B0DE-7A818C91A890}"/>
+              </a:ext>
+            </a:extLst>
+          </p:cNvPr>
+          <p:cNvSpPr>
+            <a:spLocks xmlns:a="http://schemas.openxmlformats.org/drawingml/2006/main" noGrp="1"/>
+          </p:cNvSpPr>
+          <p:nvPr/>
+        </p:nvSpPr>
+        <p:spPr>
+          <a:xfrm xmlns:a="http://schemas.openxmlformats.org/drawingml/2006/main">
+            <a:off x="685800" y="2905125"/>
+            <a:ext cx="4905375" cy="723900"/>
           </a:xfrm>
           <a:prstGeom xmlns:a="http://schemas.openxmlformats.org/drawingml/2006/main" prst="rect">
             <a:avLst/>
           </a:prstGeom>
         </p:spPr>
         <p:txBody>
-          <a:bodyPr xmlns:a="http://schemas.openxmlformats.org/drawingml/2006/main" lIns="0" tIns="0" rIns="0" bIns="0">
+          <a:bodyPr xmlns:a="http://schemas.openxmlformats.org/drawingml/2006/main" lIns="38100" tIns="38100" rIns="38100" bIns="38100" anchor="ctr">
             <a:normAutofit fontScale="100000"/>
           </a:bodyPr>
           <a:lstStyle xmlns:a="http://schemas.openxmlformats.org/drawingml/2006/main"/>
           <a:p xmlns:a="http://schemas.openxmlformats.org/drawingml/2006/main">
             <a:pPr algn="l">
-              <a:defRPr sz="2400">
-                <a:solidFill>
-                  <a:srgbClr val="000000"/>
-                </a:solidFill>
-                <a:latin typeface="Helvetica Neue"/>
-                <a:ea typeface="Helvetica Neue"/>
-                <a:cs typeface="Helvetica Neue"/>
-              </a:defRPr>
-            </a:pPr>
-            <a:r>
-              <a:t>4</a:t>
-            </a:r>
-          </a:p>
-          <a:p xmlns:a="http://schemas.openxmlformats.org/drawingml/2006/main">
-            <a:pPr algn="l">
-              <a:defRPr sz="2400">
-                <a:solidFill>
-                  <a:srgbClr val="000000"/>
-                </a:solidFill>
-                <a:latin typeface="Helvetica Neue"/>
-                <a:ea typeface="Helvetica Neue"/>
-                <a:cs typeface="Helvetica Neue"/>
-              </a:defRPr>
-            </a:pPr>
-            <a:r>
-              <a:t>Test fit before committing the project parts</a:t>
+              <a:lnSpc>
+                <a:spcPct val="108000"/>
+              </a:lnSpc>
+              <a:buNone/>
+              <a:defRPr sz="1700" b="0">
+                <a:solidFill>
+                  <a:srgbClr val="173126"/>
+                </a:solidFill>
+                <a:latin typeface="Aptos"/>
+                <a:ea typeface="Aptos"/>
+                <a:cs typeface="Aptos"/>
+              </a:defRPr>
+            </a:pPr>
+            <a:r>
+              <a:rPr sz="1700" b="0">
+                <a:solidFill>
+                  <a:srgbClr val="173126"/>
+                </a:solidFill>
+                <a:latin typeface="Aptos"/>
+                <a:ea typeface="Aptos"/>
+                <a:cs typeface="Aptos"/>
+              </a:rPr>
+              <a:t>02 Approve: Resolve faults and gain teacher approval.</a:t>
+            </a:r>
+          </a:p>
+        </p:txBody>
+      </p:sp>
+      <p:sp>
+        <p:nvSpPr>
+          <p:cNvPr id="5" name="Content-Placeholder-9-6">
+            <a:extLst xmlns:a="http://schemas.openxmlformats.org/drawingml/2006/main">
+              <a:ext uri="{FF2B5EF4-FFF2-40B4-BE49-F238E27FC236}">
+                <a16:creationId xmlns:a16="http://schemas.microsoft.com/office/drawing/2014/main" id="{5AC9B470-0786-49DD-ADE4-53F6DDDFE99C}"/>
+              </a:ext>
+            </a:extLst>
+          </p:cNvPr>
+          <p:cNvSpPr>
+            <a:spLocks xmlns:a="http://schemas.openxmlformats.org/drawingml/2006/main" noGrp="1"/>
+          </p:cNvSpPr>
+          <p:nvPr/>
+        </p:nvSpPr>
+        <p:spPr>
+          <a:xfrm xmlns:a="http://schemas.openxmlformats.org/drawingml/2006/main">
+            <a:off x="685800" y="3714750"/>
+            <a:ext cx="4905375" cy="723900"/>
+          </a:xfrm>
+          <a:prstGeom xmlns:a="http://schemas.openxmlformats.org/drawingml/2006/main" prst="rect">
+            <a:avLst/>
+          </a:prstGeom>
+        </p:spPr>
+        <p:txBody>
+          <a:bodyPr xmlns:a="http://schemas.openxmlformats.org/drawingml/2006/main" lIns="38100" tIns="38100" rIns="38100" bIns="38100" anchor="ctr">
+            <a:normAutofit fontScale="100000"/>
+          </a:bodyPr>
+          <a:lstStyle xmlns:a="http://schemas.openxmlformats.org/drawingml/2006/main"/>
+          <a:p xmlns:a="http://schemas.openxmlformats.org/drawingml/2006/main">
+            <a:pPr algn="l">
+              <a:lnSpc>
+                <a:spcPct val="108000"/>
+              </a:lnSpc>
+              <a:buNone/>
+              <a:defRPr sz="1700" b="0">
+                <a:solidFill>
+                  <a:srgbClr val="173126"/>
+                </a:solidFill>
+                <a:latin typeface="Aptos"/>
+                <a:ea typeface="Aptos"/>
+                <a:cs typeface="Aptos"/>
+              </a:defRPr>
+            </a:pPr>
+            <a:r>
+              <a:rPr sz="1700" b="0">
+                <a:solidFill>
+                  <a:srgbClr val="173126"/>
+                </a:solidFill>
+                <a:latin typeface="Aptos"/>
+                <a:ea typeface="Aptos"/>
+                <a:cs typeface="Aptos"/>
+              </a:rPr>
+              <a:t>03 Assemble: Apply PVA and clamp using demonstrated methods.</a:t>
+            </a:r>
+          </a:p>
+        </p:txBody>
+      </p:sp>
+      <p:sp>
+        <p:nvSpPr>
+          <p:cNvPr id="6" name="Content-Placeholder-10-7">
+            <a:extLst xmlns:a="http://schemas.openxmlformats.org/drawingml/2006/main">
+              <a:ext uri="{FF2B5EF4-FFF2-40B4-BE49-F238E27FC236}">
+                <a16:creationId xmlns:a16="http://schemas.microsoft.com/office/drawing/2014/main" id="{9EFDF80B-84C2-4E73-960E-165CE6DF85BC}"/>
+              </a:ext>
+            </a:extLst>
+          </p:cNvPr>
+          <p:cNvSpPr>
+            <a:spLocks xmlns:a="http://schemas.openxmlformats.org/drawingml/2006/main" noGrp="1"/>
+          </p:cNvSpPr>
+          <p:nvPr/>
+        </p:nvSpPr>
+        <p:spPr>
+          <a:xfrm xmlns:a="http://schemas.openxmlformats.org/drawingml/2006/main">
+            <a:off x="685800" y="4524375"/>
+            <a:ext cx="4905375" cy="723900"/>
+          </a:xfrm>
+          <a:prstGeom xmlns:a="http://schemas.openxmlformats.org/drawingml/2006/main" prst="rect">
+            <a:avLst/>
+          </a:prstGeom>
+        </p:spPr>
+        <p:txBody>
+          <a:bodyPr xmlns:a="http://schemas.openxmlformats.org/drawingml/2006/main" lIns="38100" tIns="38100" rIns="38100" bIns="38100" anchor="ctr">
+            <a:normAutofit fontScale="100000"/>
+          </a:bodyPr>
+          <a:lstStyle xmlns:a="http://schemas.openxmlformats.org/drawingml/2006/main"/>
+          <a:p xmlns:a="http://schemas.openxmlformats.org/drawingml/2006/main">
+            <a:pPr algn="l">
+              <a:lnSpc>
+                <a:spcPct val="108000"/>
+              </a:lnSpc>
+              <a:buNone/>
+              <a:defRPr sz="1600" b="1">
+                <a:solidFill>
+                  <a:srgbClr val="5A665F"/>
+                </a:solidFill>
+                <a:latin typeface="Aptos"/>
+                <a:ea typeface="Aptos"/>
+                <a:cs typeface="Aptos"/>
+              </a:defRPr>
+            </a:pPr>
+            <a:r>
+              <a:rPr sz="1600" b="1">
+                <a:solidFill>
+                  <a:srgbClr val="5A665F"/>
+                </a:solidFill>
+                <a:latin typeface="Aptos"/>
+                <a:ea typeface="Aptos"/>
+                <a:cs typeface="Aptos"/>
+              </a:rPr>
+              <a:t>EVIDENCE Save a labelled note, check or photograph that proves your decision.</a:t>
+            </a:r>
+          </a:p>
+        </p:txBody>
+      </p:sp>
+      <p:sp>
+        <p:nvSpPr>
+          <p:cNvPr id="8" name="">
+            <a:extLst xmlns:a="http://schemas.openxmlformats.org/drawingml/2006/main">
+              <a:ext uri="{FF2B5EF4-FFF2-40B4-BE49-F238E27FC236}">
+                <a16:creationId xmlns:a16="http://schemas.microsoft.com/office/drawing/2014/main" id="{E77EBA5E-309A-4FE6-AD6A-463E87934FFB}"/>
+              </a:ext>
+            </a:extLst>
+          </p:cNvPr>
+          <p:cNvSpPr>
+            <a:spLocks xmlns:a="http://schemas.openxmlformats.org/drawingml/2006/main" noGrp="1"/>
+          </p:cNvSpPr>
+          <p:nvPr/>
+        </p:nvSpPr>
+        <p:spPr>
+          <a:xfrm xmlns:a="http://schemas.openxmlformats.org/drawingml/2006/main">
+            <a:off x="590550" y="285750"/>
+            <a:ext cx="2476500" cy="238125"/>
+          </a:xfrm>
+          <a:prstGeom xmlns:a="http://schemas.openxmlformats.org/drawingml/2006/main" prst="rect">
+            <a:avLst/>
+          </a:prstGeom>
+          <a:noFill xmlns:a="http://schemas.openxmlformats.org/drawingml/2006/main"/>
+          <a:ln xmlns:a="http://schemas.openxmlformats.org/drawingml/2006/main" w="0">
+            <a:noFill/>
+            <a:prstDash val="solid"/>
+          </a:ln>
+        </p:spPr>
+        <p:txBody>
+          <a:bodyPr xmlns:a="http://schemas.openxmlformats.org/drawingml/2006/main" lIns="38100" tIns="38100" rIns="38100" bIns="38100" anchor="t">
+            <a:normAutofit fontScale="77839"/>
+          </a:bodyPr>
+          <a:lstStyle xmlns:a="http://schemas.openxmlformats.org/drawingml/2006/main"/>
+          <a:p xmlns:a="http://schemas.openxmlformats.org/drawingml/2006/main">
+            <a:pPr algn="l">
+              <a:lnSpc>
+                <a:spcPct val="105000"/>
+              </a:lnSpc>
+              <a:buNone/>
+              <a:defRPr sz="1300" b="1">
+                <a:solidFill>
+                  <a:srgbClr val="D8941C"/>
+                </a:solidFill>
+                <a:latin typeface="Aptos"/>
+                <a:ea typeface="Aptos"/>
+                <a:cs typeface="Aptos"/>
+              </a:defRPr>
+            </a:pPr>
+            <a:r>
+              <a:rPr sz="1300" b="1">
+                <a:solidFill>
+                  <a:srgbClr val="D8941C"/>
+                </a:solidFill>
+                <a:latin typeface="Aptos"/>
+                <a:ea typeface="Aptos"/>
+                <a:cs typeface="Aptos"/>
+              </a:rPr>
+              <a:t>THEORY 3 OF 3</a:t>
+            </a:r>
+          </a:p>
+        </p:txBody>
+      </p:sp>
+      <p:sp>
+        <p:nvSpPr>
+          <p:cNvPr id="9" name="">
+            <a:extLst xmlns:a="http://schemas.openxmlformats.org/drawingml/2006/main">
+              <a:ext uri="{FF2B5EF4-FFF2-40B4-BE49-F238E27FC236}">
+                <a16:creationId xmlns:a16="http://schemas.microsoft.com/office/drawing/2014/main" id="{BD8F789E-1364-42E2-881D-06E116C4CA78}"/>
+              </a:ext>
+            </a:extLst>
+          </p:cNvPr>
+          <p:cNvSpPr>
+            <a:spLocks xmlns:a="http://schemas.openxmlformats.org/drawingml/2006/main" noGrp="1"/>
+          </p:cNvSpPr>
+          <p:nvPr/>
+        </p:nvSpPr>
+        <p:spPr>
+          <a:xfrm xmlns:a="http://schemas.openxmlformats.org/drawingml/2006/main">
+            <a:off x="6048375" y="552450"/>
+            <a:ext cx="5619750" cy="5524500"/>
+          </a:xfrm>
+          <a:prstGeom xmlns:a="http://schemas.openxmlformats.org/drawingml/2006/main" prst="roundRect">
+            <a:avLst>
+              <a:gd name="adj" fmla="val 2069"/>
+            </a:avLst>
+          </a:prstGeom>
+          <a:noFill xmlns:a="http://schemas.openxmlformats.org/drawingml/2006/main"/>
+          <a:ln xmlns:a="http://schemas.openxmlformats.org/drawingml/2006/main" w="9525">
+            <a:solidFill>
+              <a:srgbClr val="D8941C"/>
+            </a:solidFill>
+            <a:prstDash val="solid"/>
+          </a:ln>
+        </p:spPr>
+      </p:sp>
+      <p:pic>
+        <p:nvPicPr>
+          <p:cNvPr id="20" name=""/>
+          <p:cNvPicPr>
+            <a:picLocks xmlns:a="http://schemas.openxmlformats.org/drawingml/2006/main" noChangeAspect="1"/>
+          </p:cNvPicPr>
+          <p:nvPr/>
+        </p:nvPicPr>
+        <p:blipFill>
+          <a:blip xmlns:r="http://schemas.openxmlformats.org/officeDocument/2006/relationships" xmlns:a="http://schemas.openxmlformats.org/drawingml/2006/main" r:embed="R2e07392d53304222"/>
+          <a:srcRect xmlns:a="http://schemas.openxmlformats.org/drawingml/2006/main" l="3366" t="0" r="3366" b="0"/>
+          <a:stretch xmlns:a="http://schemas.openxmlformats.org/drawingml/2006/main">
+            <a:fillRect l="0" t="0" r="0" b="0"/>
+          </a:stretch>
+        </p:blipFill>
+        <p:spPr>
+          <a:xfrm xmlns:a="http://schemas.openxmlformats.org/drawingml/2006/main">
+            <a:off x="6200775" y="704850"/>
+            <a:ext cx="5314950" cy="4000500"/>
+          </a:xfrm>
+          <a:prstGeom xmlns:a="http://schemas.openxmlformats.org/drawingml/2006/main" prst="roundRect">
+            <a:avLst>
+              <a:gd name="adj" fmla="val 2857"/>
+            </a:avLst>
+          </a:prstGeom>
+        </p:spPr>
+      </p:pic>
+      <p:sp>
+        <p:nvSpPr>
+          <p:cNvPr id="11" name="">
+            <a:extLst xmlns:a="http://schemas.openxmlformats.org/drawingml/2006/main">
+              <a:ext uri="{FF2B5EF4-FFF2-40B4-BE49-F238E27FC236}">
+                <a16:creationId xmlns:a16="http://schemas.microsoft.com/office/drawing/2014/main" id="{1B96C6B0-5F17-42EB-A00D-CC9DE946F789}"/>
+              </a:ext>
+            </a:extLst>
+          </p:cNvPr>
+          <p:cNvSpPr>
+            <a:spLocks xmlns:a="http://schemas.openxmlformats.org/drawingml/2006/main" noGrp="1"/>
+          </p:cNvSpPr>
+          <p:nvPr/>
+        </p:nvSpPr>
+        <p:spPr>
+          <a:xfrm xmlns:a="http://schemas.openxmlformats.org/drawingml/2006/main">
+            <a:off x="6267450" y="4810125"/>
+            <a:ext cx="5162550" cy="1123950"/>
+          </a:xfrm>
+          <a:prstGeom xmlns:a="http://schemas.openxmlformats.org/drawingml/2006/main" prst="rect">
+            <a:avLst/>
+          </a:prstGeom>
+          <a:noFill xmlns:a="http://schemas.openxmlformats.org/drawingml/2006/main"/>
+          <a:ln xmlns:a="http://schemas.openxmlformats.org/drawingml/2006/main" w="0">
+            <a:noFill/>
+            <a:prstDash val="solid"/>
+          </a:ln>
+        </p:spPr>
+        <p:txBody>
+          <a:bodyPr xmlns:a="http://schemas.openxmlformats.org/drawingml/2006/main" lIns="38100" tIns="38100" rIns="38100" bIns="38100" anchor="t">
+            <a:normAutofit fontScale="100000"/>
+          </a:bodyPr>
+          <a:lstStyle xmlns:a="http://schemas.openxmlformats.org/drawingml/2006/main"/>
+          <a:p xmlns:a="http://schemas.openxmlformats.org/drawingml/2006/main">
+            <a:pPr algn="l">
+              <a:lnSpc>
+                <a:spcPct val="105000"/>
+              </a:lnSpc>
+              <a:buNone/>
+              <a:defRPr sz="1600" b="0">
+                <a:solidFill>
+                  <a:srgbClr val="5A665F"/>
+                </a:solidFill>
+                <a:latin typeface="Aptos"/>
+                <a:ea typeface="Aptos"/>
+                <a:cs typeface="Aptos"/>
+              </a:defRPr>
+            </a:pPr>
+            <a:r>
+              <a:rPr sz="1600" b="0">
+                <a:solidFill>
+                  <a:srgbClr val="5A665F"/>
+                </a:solidFill>
+                <a:latin typeface="Aptos"/>
+                <a:ea typeface="Aptos"/>
+                <a:cs typeface="Aptos"/>
+              </a:rPr>
+              <a:t>Dry fitting finds problems before adhesive makes them permanent.</a:t>
             </a:r>
           </a:p>
         </p:txBody>
@@ -3522,6 +4774,13 @@
 <file path=ppt/slides/slide6.xml><?xml version="1.0" encoding="utf-8"?>
 <p:sld xmlns:p="http://schemas.openxmlformats.org/presentationml/2006/main">
   <p:cSld>
+    <p:bg>
+      <p:bgPr>
+        <a:solidFill xmlns:a="http://schemas.openxmlformats.org/drawingml/2006/main">
+          <a:srgbClr val="F8F2E8"/>
+        </a:solidFill>
+      </p:bgPr>
+    </p:bg>
     <p:spTree>
       <p:nvGrpSpPr>
         <p:cNvPr id="1" name=""/>
@@ -3547,19 +4806,441 @@
         </p:nvSpPr>
         <p:spPr>
           <a:xfrm xmlns:a="http://schemas.openxmlformats.org/drawingml/2006/main">
-            <a:off x="11279315" y="6279261"/>
-            <a:ext cx="518922" cy="241268"/>
+            <a:off x="11334750" y="6496050"/>
+            <a:ext cx="400050" cy="190500"/>
           </a:xfrm>
           <a:prstGeom xmlns:a="http://schemas.openxmlformats.org/drawingml/2006/main" prst="rect">
             <a:avLst/>
           </a:prstGeom>
         </p:spPr>
         <p:txBody>
-          <a:bodyPr xmlns:a="http://schemas.openxmlformats.org/drawingml/2006/main" lIns="0" tIns="0" rIns="0" bIns="0" anchor="b"/>
+          <a:bodyPr xmlns:a="http://schemas.openxmlformats.org/drawingml/2006/main" lIns="38100" tIns="38100" rIns="38100" bIns="38100" anchor="ctr">
+            <a:normAutofit fontScale="64935"/>
+          </a:bodyPr>
           <a:lstStyle xmlns:a="http://schemas.openxmlformats.org/drawingml/2006/main"/>
           <a:p xmlns:a="http://schemas.openxmlformats.org/drawingml/2006/main">
             <a:pPr algn="r">
-              <a:defRPr sz="1000">
+              <a:lnSpc>
+                <a:spcPct val="105000"/>
+              </a:lnSpc>
+              <a:buNone/>
+              <a:defRPr sz="1100" b="1">
+                <a:solidFill>
+                  <a:srgbClr val="5A665F"/>
+                </a:solidFill>
+                <a:latin typeface="Aptos"/>
+                <a:ea typeface="Aptos"/>
+                <a:cs typeface="Aptos"/>
+              </a:defRPr>
+            </a:pPr>
+            <a:r>
+              <a:rPr sz="1100" b="1">
+                <a:solidFill>
+                  <a:srgbClr val="5A665F"/>
+                </a:solidFill>
+                <a:latin typeface="Aptos"/>
+                <a:ea typeface="Aptos"/>
+                <a:cs typeface="Aptos"/>
+              </a:rPr>
+              <a:t>6</a:t>
+            </a:r>
+          </a:p>
+        </p:txBody>
+      </p:sp>
+      <p:sp>
+        <p:nvSpPr>
+          <p:cNvPr id="2" name="Title-10-3">
+            <a:extLst xmlns:a="http://schemas.openxmlformats.org/drawingml/2006/main">
+              <a:ext uri="{FF2B5EF4-FFF2-40B4-BE49-F238E27FC236}">
+                <a16:creationId xmlns:a16="http://schemas.microsoft.com/office/drawing/2014/main" id="{092CEC7D-064D-43E5-A36A-E5EAAE4C630F}"/>
+              </a:ext>
+            </a:extLst>
+          </p:cNvPr>
+          <p:cNvSpPr>
+            <a:spLocks xmlns:a="http://schemas.openxmlformats.org/drawingml/2006/main" noGrp="1"/>
+          </p:cNvSpPr>
+          <p:nvPr/>
+        </p:nvSpPr>
+        <p:spPr>
+          <a:xfrm xmlns:a="http://schemas.openxmlformats.org/drawingml/2006/main">
+            <a:off x="571500" y="533400"/>
+            <a:ext cx="10287000" cy="666750"/>
+          </a:xfrm>
+          <a:prstGeom xmlns:a="http://schemas.openxmlformats.org/drawingml/2006/main" prst="rect">
+            <a:avLst/>
+          </a:prstGeom>
+        </p:spPr>
+        <p:txBody>
+          <a:bodyPr xmlns:a="http://schemas.openxmlformats.org/drawingml/2006/main" lIns="38100" tIns="38100" rIns="38100" bIns="38100" anchor="t">
+            <a:normAutofit fontScale="100000"/>
+          </a:bodyPr>
+          <a:lstStyle xmlns:a="http://schemas.openxmlformats.org/drawingml/2006/main"/>
+          <a:p xmlns:a="http://schemas.openxmlformats.org/drawingml/2006/main">
+            <a:pPr algn="l">
+              <a:lnSpc>
+                <a:spcPct val="105000"/>
+              </a:lnSpc>
+              <a:buNone/>
+              <a:defRPr sz="3600" b="1">
+                <a:solidFill>
+                  <a:srgbClr val="173126"/>
+                </a:solidFill>
+                <a:latin typeface="Aptos"/>
+                <a:ea typeface="Aptos"/>
+                <a:cs typeface="Aptos"/>
+              </a:defRPr>
+            </a:pPr>
+            <a:r>
+              <a:rPr sz="3600" b="1">
+                <a:solidFill>
+                  <a:srgbClr val="173126"/>
+                </a:solidFill>
+                <a:latin typeface="Aptos"/>
+                <a:ea typeface="Aptos"/>
+                <a:cs typeface="Aptos"/>
+              </a:rPr>
+              <a:t>Pause and check what you can explain</a:t>
+            </a:r>
+          </a:p>
+        </p:txBody>
+      </p:sp>
+      <p:cxnSp>
+        <p:nvCxnSpPr>
+          <p:cNvPr id="25" name="Google-Shape-2259-p159-4"/>
+          <p:cNvCxnSpPr/>
+          <p:nvPr/>
+        </p:nvCxnSpPr>
+        <p:spPr>
+          <a:xfrm xmlns:a="http://schemas.openxmlformats.org/drawingml/2006/main">
+            <a:off x="0" y="0"/>
+            <a:ext cx="9525" cy="9525"/>
+          </a:xfrm>
+          <a:prstGeom xmlns:a="http://schemas.openxmlformats.org/drawingml/2006/main" prst="straightConnector1">
+            <a:avLst/>
+          </a:prstGeom>
+          <a:ln xmlns:a="http://schemas.openxmlformats.org/drawingml/2006/main" w="0">
+            <a:noFill/>
+            <a:prstDash val="solid"/>
+          </a:ln>
+        </p:spPr>
+      </p:cxnSp>
+      <p:sp>
+        <p:nvSpPr>
+          <p:cNvPr id="4" name="Google-Shape-2260-p159-5">
+            <a:extLst xmlns:a="http://schemas.openxmlformats.org/drawingml/2006/main">
+              <a:ext uri="{FF2B5EF4-FFF2-40B4-BE49-F238E27FC236}">
+                <a16:creationId xmlns:a16="http://schemas.microsoft.com/office/drawing/2014/main" id="{7B534680-B7F3-4E12-B466-9DAA783C806B}"/>
+              </a:ext>
+            </a:extLst>
+          </p:cNvPr>
+          <p:cNvSpPr>
+            <a:spLocks xmlns:a="http://schemas.openxmlformats.org/drawingml/2006/main" noGrp="1"/>
+          </p:cNvSpPr>
+          <p:nvPr/>
+        </p:nvSpPr>
+        <p:spPr>
+          <a:xfrm xmlns:a="http://schemas.openxmlformats.org/drawingml/2006/main">
+            <a:off x="0" y="0"/>
+            <a:ext cx="9525" cy="9525"/>
+          </a:xfrm>
+          <a:prstGeom xmlns:a="http://schemas.openxmlformats.org/drawingml/2006/main" prst="ellipse">
+            <a:avLst/>
+          </a:prstGeom>
+          <a:noFill xmlns:a="http://schemas.openxmlformats.org/drawingml/2006/main"/>
+          <a:ln xmlns:a="http://schemas.openxmlformats.org/drawingml/2006/main" w="0">
+            <a:noFill/>
+            <a:prstDash val="solid"/>
+          </a:ln>
+        </p:spPr>
+      </p:sp>
+      <p:sp>
+        <p:nvSpPr>
+          <p:cNvPr id="5" name="Google-Shape-2261-p159-6">
+            <a:extLst xmlns:a="http://schemas.openxmlformats.org/drawingml/2006/main">
+              <a:ext uri="{FF2B5EF4-FFF2-40B4-BE49-F238E27FC236}">
+                <a16:creationId xmlns:a16="http://schemas.microsoft.com/office/drawing/2014/main" id="{A5CF19EE-44DE-4940-BD4D-AC6D220B4811}"/>
+              </a:ext>
+            </a:extLst>
+          </p:cNvPr>
+          <p:cNvSpPr>
+            <a:spLocks xmlns:a="http://schemas.openxmlformats.org/drawingml/2006/main" noGrp="1"/>
+          </p:cNvSpPr>
+          <p:nvPr/>
+        </p:nvSpPr>
+        <p:spPr>
+          <a:xfrm xmlns:a="http://schemas.openxmlformats.org/drawingml/2006/main">
+            <a:off x="0" y="0"/>
+            <a:ext cx="9525" cy="9525"/>
+          </a:xfrm>
+          <a:prstGeom xmlns:a="http://schemas.openxmlformats.org/drawingml/2006/main" prst="ellipse">
+            <a:avLst/>
+          </a:prstGeom>
+          <a:noFill xmlns:a="http://schemas.openxmlformats.org/drawingml/2006/main"/>
+          <a:ln xmlns:a="http://schemas.openxmlformats.org/drawingml/2006/main" w="0">
+            <a:noFill/>
+            <a:prstDash val="solid"/>
+          </a:ln>
+        </p:spPr>
+      </p:sp>
+      <p:sp>
+        <p:nvSpPr>
+          <p:cNvPr id="6" name="Google-Shape-2262-p159-7">
+            <a:extLst xmlns:a="http://schemas.openxmlformats.org/drawingml/2006/main">
+              <a:ext uri="{FF2B5EF4-FFF2-40B4-BE49-F238E27FC236}">
+                <a16:creationId xmlns:a16="http://schemas.microsoft.com/office/drawing/2014/main" id="{E30E1E8D-24DC-4005-AEB8-CA90342260C3}"/>
+              </a:ext>
+            </a:extLst>
+          </p:cNvPr>
+          <p:cNvSpPr>
+            <a:spLocks xmlns:a="http://schemas.openxmlformats.org/drawingml/2006/main" noGrp="1"/>
+          </p:cNvSpPr>
+          <p:nvPr/>
+        </p:nvSpPr>
+        <p:spPr>
+          <a:xfrm xmlns:a="http://schemas.openxmlformats.org/drawingml/2006/main">
+            <a:off x="0" y="0"/>
+            <a:ext cx="9525" cy="9525"/>
+          </a:xfrm>
+          <a:prstGeom xmlns:a="http://schemas.openxmlformats.org/drawingml/2006/main" prst="ellipse">
+            <a:avLst/>
+          </a:prstGeom>
+          <a:noFill xmlns:a="http://schemas.openxmlformats.org/drawingml/2006/main"/>
+          <a:ln xmlns:a="http://schemas.openxmlformats.org/drawingml/2006/main" w="0">
+            <a:noFill/>
+            <a:prstDash val="solid"/>
+          </a:ln>
+        </p:spPr>
+      </p:sp>
+      <p:sp>
+        <p:nvSpPr>
+          <p:cNvPr id="7" name="Content-Placeholder-15-8">
+            <a:extLst xmlns:a="http://schemas.openxmlformats.org/drawingml/2006/main">
+              <a:ext uri="{FF2B5EF4-FFF2-40B4-BE49-F238E27FC236}">
+                <a16:creationId xmlns:a16="http://schemas.microsoft.com/office/drawing/2014/main" id="{537B28CF-E526-49D2-8C85-D0E7DDEB07A1}"/>
+              </a:ext>
+            </a:extLst>
+          </p:cNvPr>
+          <p:cNvSpPr>
+            <a:spLocks xmlns:a="http://schemas.openxmlformats.org/drawingml/2006/main" noGrp="1"/>
+          </p:cNvSpPr>
+          <p:nvPr/>
+        </p:nvSpPr>
+        <p:spPr>
+          <a:xfrm xmlns:a="http://schemas.openxmlformats.org/drawingml/2006/main">
+            <a:off x="1000125" y="2266950"/>
+            <a:ext cx="666750" cy="590550"/>
+          </a:xfrm>
+          <a:prstGeom xmlns:a="http://schemas.openxmlformats.org/drawingml/2006/main" prst="rect">
+            <a:avLst/>
+          </a:prstGeom>
+        </p:spPr>
+        <p:txBody>
+          <a:bodyPr xmlns:a="http://schemas.openxmlformats.org/drawingml/2006/main" lIns="38100" tIns="38100" rIns="38100" bIns="38100" anchor="t">
+            <a:normAutofit fontScale="100000"/>
+          </a:bodyPr>
+          <a:lstStyle xmlns:a="http://schemas.openxmlformats.org/drawingml/2006/main"/>
+          <a:p xmlns:a="http://schemas.openxmlformats.org/drawingml/2006/main">
+            <a:pPr algn="l">
+              <a:lnSpc>
+                <a:spcPct val="105000"/>
+              </a:lnSpc>
+              <a:buNone/>
+              <a:defRPr sz="3000" b="1">
+                <a:solidFill>
+                  <a:srgbClr val="D8941C"/>
+                </a:solidFill>
+                <a:latin typeface="Aptos"/>
+                <a:ea typeface="Aptos"/>
+                <a:cs typeface="Aptos"/>
+              </a:defRPr>
+            </a:pPr>
+            <a:r>
+              <a:rPr sz="3000" b="1">
+                <a:solidFill>
+                  <a:srgbClr val="D8941C"/>
+                </a:solidFill>
+                <a:latin typeface="Aptos"/>
+                <a:ea typeface="Aptos"/>
+                <a:cs typeface="Aptos"/>
+              </a:rPr>
+              <a:t>01</a:t>
+            </a:r>
+          </a:p>
+        </p:txBody>
+      </p:sp>
+      <p:sp>
+        <p:nvSpPr>
+          <p:cNvPr id="8" name="Content-Placeholder-15-9">
+            <a:extLst xmlns:a="http://schemas.openxmlformats.org/drawingml/2006/main">
+              <a:ext uri="{FF2B5EF4-FFF2-40B4-BE49-F238E27FC236}">
+                <a16:creationId xmlns:a16="http://schemas.microsoft.com/office/drawing/2014/main" id="{B1B1D021-C9EA-4D79-86A4-5FEB65AAE592}"/>
+              </a:ext>
+            </a:extLst>
+          </p:cNvPr>
+          <p:cNvSpPr>
+            <a:spLocks xmlns:a="http://schemas.openxmlformats.org/drawingml/2006/main" noGrp="1"/>
+          </p:cNvSpPr>
+          <p:nvPr/>
+        </p:nvSpPr>
+        <p:spPr>
+          <a:xfrm xmlns:a="http://schemas.openxmlformats.org/drawingml/2006/main">
+            <a:off x="4714875" y="2266950"/>
+            <a:ext cx="666750" cy="590550"/>
+          </a:xfrm>
+          <a:prstGeom xmlns:a="http://schemas.openxmlformats.org/drawingml/2006/main" prst="rect">
+            <a:avLst/>
+          </a:prstGeom>
+        </p:spPr>
+        <p:txBody>
+          <a:bodyPr xmlns:a="http://schemas.openxmlformats.org/drawingml/2006/main" lIns="38100" tIns="38100" rIns="38100" bIns="38100" anchor="t">
+            <a:normAutofit fontScale="100000"/>
+          </a:bodyPr>
+          <a:lstStyle xmlns:a="http://schemas.openxmlformats.org/drawingml/2006/main"/>
+          <a:p xmlns:a="http://schemas.openxmlformats.org/drawingml/2006/main">
+            <a:pPr algn="l">
+              <a:lnSpc>
+                <a:spcPct val="105000"/>
+              </a:lnSpc>
+              <a:buNone/>
+              <a:defRPr sz="3000" b="1">
+                <a:solidFill>
+                  <a:srgbClr val="D8941C"/>
+                </a:solidFill>
+                <a:latin typeface="Aptos"/>
+                <a:ea typeface="Aptos"/>
+                <a:cs typeface="Aptos"/>
+              </a:defRPr>
+            </a:pPr>
+            <a:r>
+              <a:rPr sz="3000" b="1">
+                <a:solidFill>
+                  <a:srgbClr val="D8941C"/>
+                </a:solidFill>
+                <a:latin typeface="Aptos"/>
+                <a:ea typeface="Aptos"/>
+                <a:cs typeface="Aptos"/>
+              </a:rPr>
+              <a:t>02</a:t>
+            </a:r>
+          </a:p>
+        </p:txBody>
+      </p:sp>
+      <p:sp>
+        <p:nvSpPr>
+          <p:cNvPr id="9" name="Content-Placeholder-15-10">
+            <a:extLst xmlns:a="http://schemas.openxmlformats.org/drawingml/2006/main">
+              <a:ext uri="{FF2B5EF4-FFF2-40B4-BE49-F238E27FC236}">
+                <a16:creationId xmlns:a16="http://schemas.microsoft.com/office/drawing/2014/main" id="{6C826225-1403-4814-BA59-40C25AFBB9DE}"/>
+              </a:ext>
+            </a:extLst>
+          </p:cNvPr>
+          <p:cNvSpPr>
+            <a:spLocks xmlns:a="http://schemas.openxmlformats.org/drawingml/2006/main" noGrp="1"/>
+          </p:cNvSpPr>
+          <p:nvPr/>
+        </p:nvSpPr>
+        <p:spPr>
+          <a:xfrm xmlns:a="http://schemas.openxmlformats.org/drawingml/2006/main">
+            <a:off x="8429625" y="2266950"/>
+            <a:ext cx="666750" cy="590550"/>
+          </a:xfrm>
+          <a:prstGeom xmlns:a="http://schemas.openxmlformats.org/drawingml/2006/main" prst="rect">
+            <a:avLst/>
+          </a:prstGeom>
+        </p:spPr>
+        <p:txBody>
+          <a:bodyPr xmlns:a="http://schemas.openxmlformats.org/drawingml/2006/main" lIns="38100" tIns="38100" rIns="38100" bIns="38100" anchor="t">
+            <a:normAutofit fontScale="100000"/>
+          </a:bodyPr>
+          <a:lstStyle xmlns:a="http://schemas.openxmlformats.org/drawingml/2006/main"/>
+          <a:p xmlns:a="http://schemas.openxmlformats.org/drawingml/2006/main">
+            <a:pPr algn="l">
+              <a:lnSpc>
+                <a:spcPct val="105000"/>
+              </a:lnSpc>
+              <a:buNone/>
+              <a:defRPr sz="3000" b="1">
+                <a:solidFill>
+                  <a:srgbClr val="D8941C"/>
+                </a:solidFill>
+                <a:latin typeface="Aptos"/>
+                <a:ea typeface="Aptos"/>
+                <a:cs typeface="Aptos"/>
+              </a:defRPr>
+            </a:pPr>
+            <a:r>
+              <a:rPr sz="3000" b="1">
+                <a:solidFill>
+                  <a:srgbClr val="D8941C"/>
+                </a:solidFill>
+                <a:latin typeface="Aptos"/>
+                <a:ea typeface="Aptos"/>
+                <a:cs typeface="Aptos"/>
+              </a:rPr>
+              <a:t>03</a:t>
+            </a:r>
+          </a:p>
+        </p:txBody>
+      </p:sp>
+      <p:sp>
+        <p:nvSpPr>
+          <p:cNvPr id="10" name="Text-Placeholder-16-11">
+            <a:extLst xmlns:a="http://schemas.openxmlformats.org/drawingml/2006/main">
+              <a:ext uri="{FF2B5EF4-FFF2-40B4-BE49-F238E27FC236}">
+                <a16:creationId xmlns:a16="http://schemas.microsoft.com/office/drawing/2014/main" id="{ECAD4C09-8FD5-4A85-8CF5-ACDB053B9EA3}"/>
+              </a:ext>
+            </a:extLst>
+          </p:cNvPr>
+          <p:cNvSpPr>
+            <a:spLocks xmlns:a="http://schemas.openxmlformats.org/drawingml/2006/main" noGrp="1"/>
+          </p:cNvSpPr>
+          <p:nvPr/>
+        </p:nvSpPr>
+        <p:spPr>
+          <a:xfrm xmlns:a="http://schemas.openxmlformats.org/drawingml/2006/main">
+            <a:off x="1000125" y="2914650"/>
+            <a:ext cx="2667000" cy="1619250"/>
+          </a:xfrm>
+          <a:prstGeom xmlns:a="http://schemas.openxmlformats.org/drawingml/2006/main" prst="rect">
+            <a:avLst/>
+          </a:prstGeom>
+        </p:spPr>
+        <p:txBody>
+          <a:bodyPr xmlns:a="http://schemas.openxmlformats.org/drawingml/2006/main" lIns="38100" tIns="38100" rIns="38100" bIns="38100" anchor="t">
+            <a:normAutofit fontScale="89129"/>
+          </a:bodyPr>
+          <a:lstStyle xmlns:a="http://schemas.openxmlformats.org/drawingml/2006/main"/>
+          <a:p xmlns:a="http://schemas.openxmlformats.org/drawingml/2006/main">
+            <a:pPr algn="l">
+              <a:lnSpc>
+                <a:spcPct val="112000"/>
+              </a:lnSpc>
+              <a:buNone/>
+              <a:defRPr sz="1600" b="0">
+                <a:solidFill>
+                  <a:srgbClr val="173126"/>
+                </a:solidFill>
+                <a:latin typeface="Aptos"/>
+                <a:ea typeface="Aptos"/>
+                <a:cs typeface="Aptos"/>
+              </a:defRPr>
+            </a:pPr>
+            <a:r>
+              <a:rPr sz="1600" b="0">
+                <a:solidFill>
+                  <a:srgbClr val="173126"/>
+                </a:solidFill>
+                <a:latin typeface="Aptos"/>
+                <a:ea typeface="Aptos"/>
+                <a:cs typeface="Aptos"/>
+              </a:rPr>
+              <a:t>What is the key idea in “Cutting and shaping components accurately”?</a:t>
+            </a:r>
+          </a:p>
+          <a:p xmlns:a="http://schemas.openxmlformats.org/drawingml/2006/main">
+            <a:pPr algn="l">
+              <a:buNone/>
+              <a:defRPr sz="2400">
                 <a:solidFill>
                   <a:srgbClr val="000000"/>
                 </a:solidFill>
@@ -3569,42 +5250,97 @@
               </a:defRPr>
             </a:pPr>
             <a:r>
-              <a:t>6</a:t>
-            </a:r>
-          </a:p>
-        </p:txBody>
-      </p:sp>
-      <p:sp>
-        <p:nvSpPr>
-          <p:cNvPr id="2" name="Title-10-3">
-            <a:extLst xmlns:a="http://schemas.openxmlformats.org/drawingml/2006/main">
-              <a:ext uri="{FF2B5EF4-FFF2-40B4-BE49-F238E27FC236}">
-                <a16:creationId xmlns:a16="http://schemas.microsoft.com/office/drawing/2014/main" id="{092CEC7D-064D-43E5-A36A-E5EAAE4C630F}"/>
-              </a:ext>
-            </a:extLst>
-          </p:cNvPr>
-          <p:cNvSpPr>
-            <a:spLocks xmlns:a="http://schemas.openxmlformats.org/drawingml/2006/main" noGrp="1"/>
-          </p:cNvSpPr>
-          <p:nvPr/>
-        </p:nvSpPr>
-        <p:spPr>
-          <a:xfrm xmlns:a="http://schemas.openxmlformats.org/drawingml/2006/main">
-            <a:off x="393668" y="344043"/>
-            <a:ext cx="11404568" cy="1047464"/>
+              <a:t/>
+            </a:r>
+          </a:p>
+          <a:p xmlns:a="http://schemas.openxmlformats.org/drawingml/2006/main">
+            <a:pPr algn="l">
+              <a:lnSpc>
+                <a:spcPct val="112000"/>
+              </a:lnSpc>
+              <a:buNone/>
+              <a:defRPr sz="1600" b="0">
+                <a:solidFill>
+                  <a:srgbClr val="173126"/>
+                </a:solidFill>
+                <a:latin typeface="Aptos"/>
+                <a:ea typeface="Aptos"/>
+                <a:cs typeface="Aptos"/>
+              </a:defRPr>
+            </a:pPr>
+            <a:r>
+              <a:rPr sz="1600" b="0">
+                <a:solidFill>
+                  <a:srgbClr val="173126"/>
+                </a:solidFill>
+                <a:latin typeface="Aptos"/>
+                <a:ea typeface="Aptos"/>
+                <a:cs typeface="Aptos"/>
+              </a:rPr>
+              <a:t>What evidence would show that you understood it?</a:t>
+            </a:r>
+          </a:p>
+        </p:txBody>
+      </p:sp>
+      <p:sp>
+        <p:nvSpPr>
+          <p:cNvPr id="11" name="Text-Placeholder-16-12">
+            <a:extLst xmlns:a="http://schemas.openxmlformats.org/drawingml/2006/main">
+              <a:ext uri="{FF2B5EF4-FFF2-40B4-BE49-F238E27FC236}">
+                <a16:creationId xmlns:a16="http://schemas.microsoft.com/office/drawing/2014/main" id="{CCFEE5A5-3CFE-48A5-B633-AC3EBC14EF40}"/>
+              </a:ext>
+            </a:extLst>
+          </p:cNvPr>
+          <p:cNvSpPr>
+            <a:spLocks xmlns:a="http://schemas.openxmlformats.org/drawingml/2006/main" noGrp="1"/>
+          </p:cNvSpPr>
+          <p:nvPr/>
+        </p:nvSpPr>
+        <p:spPr>
+          <a:xfrm xmlns:a="http://schemas.openxmlformats.org/drawingml/2006/main">
+            <a:off x="4714875" y="2914650"/>
+            <a:ext cx="2667000" cy="1619250"/>
           </a:xfrm>
           <a:prstGeom xmlns:a="http://schemas.openxmlformats.org/drawingml/2006/main" prst="rect">
             <a:avLst/>
           </a:prstGeom>
         </p:spPr>
         <p:txBody>
-          <a:bodyPr xmlns:a="http://schemas.openxmlformats.org/drawingml/2006/main" lIns="0" tIns="0" rIns="0" bIns="0" anchor="t">
-            <a:normAutofit fontScale="100000"/>
+          <a:bodyPr xmlns:a="http://schemas.openxmlformats.org/drawingml/2006/main" lIns="38100" tIns="38100" rIns="38100" bIns="38100" anchor="t">
+            <a:normAutofit fontScale="89129"/>
           </a:bodyPr>
           <a:lstStyle xmlns:a="http://schemas.openxmlformats.org/drawingml/2006/main"/>
           <a:p xmlns:a="http://schemas.openxmlformats.org/drawingml/2006/main">
             <a:pPr algn="l">
-              <a:defRPr sz="2900">
+              <a:lnSpc>
+                <a:spcPct val="112000"/>
+              </a:lnSpc>
+              <a:buNone/>
+              <a:defRPr sz="1600" b="0">
+                <a:solidFill>
+                  <a:srgbClr val="173126"/>
+                </a:solidFill>
+                <a:latin typeface="Aptos"/>
+                <a:ea typeface="Aptos"/>
+                <a:cs typeface="Aptos"/>
+              </a:defRPr>
+            </a:pPr>
+            <a:r>
+              <a:rPr sz="1600" b="0">
+                <a:solidFill>
+                  <a:srgbClr val="173126"/>
+                </a:solidFill>
+                <a:latin typeface="Aptos"/>
+                <a:ea typeface="Aptos"/>
+                <a:cs typeface="Aptos"/>
+              </a:rPr>
+              <a:t>What is the key idea in “Butt, rebate and dowel joints in a Desk Tidy”?</a:t>
+            </a:r>
+          </a:p>
+          <a:p xmlns:a="http://schemas.openxmlformats.org/drawingml/2006/main">
+            <a:pPr algn="l">
+              <a:buNone/>
+              <a:defRPr sz="2400">
                 <a:solidFill>
                   <a:srgbClr val="000000"/>
                 </a:solidFill>
@@ -3614,428 +5350,298 @@
               </a:defRPr>
             </a:pPr>
             <a:r>
-              <a:t>Dry fit before glue</a:t>
-            </a:r>
-          </a:p>
-        </p:txBody>
-      </p:sp>
-      <p:cxnSp>
-        <p:nvCxnSpPr>
-          <p:cNvPr id="15" name="Google-Shape-2259-p159-4"/>
-          <p:cNvCxnSpPr/>
-          <p:nvPr/>
-        </p:nvCxnSpPr>
-        <p:spPr>
-          <a:xfrm xmlns:a="http://schemas.openxmlformats.org/drawingml/2006/main">
-            <a:off x="337757" y="3373755"/>
-            <a:ext cx="12245435" cy="286"/>
-          </a:xfrm>
-          <a:prstGeom xmlns:a="http://schemas.openxmlformats.org/drawingml/2006/main" prst="straightConnector1">
-            <a:avLst/>
-          </a:prstGeom>
+              <a:t/>
+            </a:r>
+          </a:p>
+          <a:p xmlns:a="http://schemas.openxmlformats.org/drawingml/2006/main">
+            <a:pPr algn="l">
+              <a:lnSpc>
+                <a:spcPct val="112000"/>
+              </a:lnSpc>
+              <a:buNone/>
+              <a:defRPr sz="1600" b="0">
+                <a:solidFill>
+                  <a:srgbClr val="173126"/>
+                </a:solidFill>
+                <a:latin typeface="Aptos"/>
+                <a:ea typeface="Aptos"/>
+                <a:cs typeface="Aptos"/>
+              </a:defRPr>
+            </a:pPr>
+            <a:r>
+              <a:rPr sz="1600" b="0">
+                <a:solidFill>
+                  <a:srgbClr val="173126"/>
+                </a:solidFill>
+                <a:latin typeface="Aptos"/>
+                <a:ea typeface="Aptos"/>
+                <a:cs typeface="Aptos"/>
+              </a:rPr>
+              <a:t>What evidence would show that you understood it?</a:t>
+            </a:r>
+          </a:p>
+        </p:txBody>
+      </p:sp>
+      <p:sp>
+        <p:nvSpPr>
+          <p:cNvPr id="12" name="Text-Placeholder-16-13">
+            <a:extLst xmlns:a="http://schemas.openxmlformats.org/drawingml/2006/main">
+              <a:ext uri="{FF2B5EF4-FFF2-40B4-BE49-F238E27FC236}">
+                <a16:creationId xmlns:a16="http://schemas.microsoft.com/office/drawing/2014/main" id="{90188185-69FD-49DF-AAE1-B10C7F928815}"/>
+              </a:ext>
+            </a:extLst>
+          </p:cNvPr>
+          <p:cNvSpPr>
+            <a:spLocks xmlns:a="http://schemas.openxmlformats.org/drawingml/2006/main" noGrp="1"/>
+          </p:cNvSpPr>
+          <p:nvPr/>
+        </p:nvSpPr>
+        <p:spPr>
+          <a:xfrm xmlns:a="http://schemas.openxmlformats.org/drawingml/2006/main">
+            <a:off x="8429625" y="2914650"/>
+            <a:ext cx="2667000" cy="1619250"/>
+          </a:xfrm>
+          <a:prstGeom xmlns:a="http://schemas.openxmlformats.org/drawingml/2006/main" prst="rect">
+            <a:avLst/>
+          </a:prstGeom>
+        </p:spPr>
+        <p:txBody>
+          <a:bodyPr xmlns:a="http://schemas.openxmlformats.org/drawingml/2006/main" lIns="38100" tIns="38100" rIns="38100" bIns="38100" anchor="t">
+            <a:normAutofit fontScale="89129"/>
+          </a:bodyPr>
+          <a:lstStyle xmlns:a="http://schemas.openxmlformats.org/drawingml/2006/main"/>
+          <a:p xmlns:a="http://schemas.openxmlformats.org/drawingml/2006/main">
+            <a:pPr algn="l">
+              <a:lnSpc>
+                <a:spcPct val="112000"/>
+              </a:lnSpc>
+              <a:buNone/>
+              <a:defRPr sz="1600" b="0">
+                <a:solidFill>
+                  <a:srgbClr val="173126"/>
+                </a:solidFill>
+                <a:latin typeface="Aptos"/>
+                <a:ea typeface="Aptos"/>
+                <a:cs typeface="Aptos"/>
+              </a:defRPr>
+            </a:pPr>
+            <a:r>
+              <a:rPr sz="1600" b="0">
+                <a:solidFill>
+                  <a:srgbClr val="173126"/>
+                </a:solidFill>
+                <a:latin typeface="Aptos"/>
+                <a:ea typeface="Aptos"/>
+                <a:cs typeface="Aptos"/>
+              </a:rPr>
+              <a:t>What is the key idea in “Dry fitting, PVA assembly and surface preparation”?</a:t>
+            </a:r>
+          </a:p>
+          <a:p xmlns:a="http://schemas.openxmlformats.org/drawingml/2006/main">
+            <a:pPr algn="l">
+              <a:buNone/>
+              <a:defRPr sz="2400">
+                <a:solidFill>
+                  <a:srgbClr val="000000"/>
+                </a:solidFill>
+                <a:latin typeface="Helvetica Neue"/>
+                <a:ea typeface="Helvetica Neue"/>
+                <a:cs typeface="Helvetica Neue"/>
+              </a:defRPr>
+            </a:pPr>
+            <a:r>
+              <a:t/>
+            </a:r>
+          </a:p>
+          <a:p xmlns:a="http://schemas.openxmlformats.org/drawingml/2006/main">
+            <a:pPr algn="l">
+              <a:lnSpc>
+                <a:spcPct val="112000"/>
+              </a:lnSpc>
+              <a:buNone/>
+              <a:defRPr sz="1600" b="0">
+                <a:solidFill>
+                  <a:srgbClr val="173126"/>
+                </a:solidFill>
+                <a:latin typeface="Aptos"/>
+                <a:ea typeface="Aptos"/>
+                <a:cs typeface="Aptos"/>
+              </a:defRPr>
+            </a:pPr>
+            <a:r>
+              <a:rPr sz="1600" b="0">
+                <a:solidFill>
+                  <a:srgbClr val="173126"/>
+                </a:solidFill>
+                <a:latin typeface="Aptos"/>
+                <a:ea typeface="Aptos"/>
+                <a:cs typeface="Aptos"/>
+              </a:rPr>
+              <a:t>What evidence would show that you understood it?</a:t>
+            </a:r>
+          </a:p>
+        </p:txBody>
+      </p:sp>
+      <p:sp>
+        <p:nvSpPr>
+          <p:cNvPr id="19" name="">
+            <a:extLst xmlns:a="http://schemas.openxmlformats.org/drawingml/2006/main">
+              <a:ext uri="{FF2B5EF4-FFF2-40B4-BE49-F238E27FC236}">
+                <a16:creationId xmlns:a16="http://schemas.microsoft.com/office/drawing/2014/main" id="{09F50751-8E75-489A-A1C9-2F0F73AA01C7}"/>
+              </a:ext>
+            </a:extLst>
+          </p:cNvPr>
+          <p:cNvSpPr>
+            <a:spLocks xmlns:a="http://schemas.openxmlformats.org/drawingml/2006/main" noGrp="1"/>
+          </p:cNvSpPr>
+          <p:nvPr/>
+        </p:nvSpPr>
+        <p:spPr>
+          <a:xfrm xmlns:a="http://schemas.openxmlformats.org/drawingml/2006/main">
+            <a:off x="590550" y="1200150"/>
+            <a:ext cx="8382000" cy="342900"/>
+          </a:xfrm>
+          <a:prstGeom xmlns:a="http://schemas.openxmlformats.org/drawingml/2006/main" prst="rect">
+            <a:avLst/>
+          </a:prstGeom>
+          <a:noFill xmlns:a="http://schemas.openxmlformats.org/drawingml/2006/main"/>
+          <a:ln xmlns:a="http://schemas.openxmlformats.org/drawingml/2006/main" w="0">
+            <a:noFill/>
+            <a:prstDash val="solid"/>
+          </a:ln>
+        </p:spPr>
+        <p:txBody>
+          <a:bodyPr xmlns:a="http://schemas.openxmlformats.org/drawingml/2006/main" lIns="38100" tIns="38100" rIns="38100" bIns="38100" anchor="t">
+            <a:normAutofit fontScale="83333"/>
+          </a:bodyPr>
+          <a:lstStyle xmlns:a="http://schemas.openxmlformats.org/drawingml/2006/main"/>
+          <a:p xmlns:a="http://schemas.openxmlformats.org/drawingml/2006/main">
+            <a:pPr algn="l">
+              <a:lnSpc>
+                <a:spcPct val="105000"/>
+              </a:lnSpc>
+              <a:buNone/>
+              <a:defRPr sz="2000" b="0">
+                <a:solidFill>
+                  <a:srgbClr val="5A665F"/>
+                </a:solidFill>
+                <a:latin typeface="Aptos"/>
+                <a:ea typeface="Aptos"/>
+                <a:cs typeface="Aptos"/>
+              </a:defRPr>
+            </a:pPr>
+            <a:r>
+              <a:rPr sz="2000" b="0">
+                <a:solidFill>
+                  <a:srgbClr val="5A665F"/>
+                </a:solidFill>
+                <a:latin typeface="Aptos"/>
+                <a:ea typeface="Aptos"/>
+                <a:cs typeface="Aptos"/>
+              </a:rPr>
+              <a:t>Answer aloud or jot one clear sentence for each question.</a:t>
+            </a:r>
+          </a:p>
+        </p:txBody>
+      </p:sp>
+      <p:sp>
+        <p:nvSpPr>
+          <p:cNvPr id="20" name="">
+            <a:extLst xmlns:a="http://schemas.openxmlformats.org/drawingml/2006/main">
+              <a:ext uri="{FF2B5EF4-FFF2-40B4-BE49-F238E27FC236}">
+                <a16:creationId xmlns:a16="http://schemas.microsoft.com/office/drawing/2014/main" id="{42A21608-F9DD-4B2A-8DF5-1BCE0F5A9907}"/>
+              </a:ext>
+            </a:extLst>
+          </p:cNvPr>
+          <p:cNvSpPr>
+            <a:spLocks xmlns:a="http://schemas.openxmlformats.org/drawingml/2006/main" noGrp="1"/>
+          </p:cNvSpPr>
+          <p:nvPr/>
+        </p:nvSpPr>
+        <p:spPr>
+          <a:xfrm xmlns:a="http://schemas.openxmlformats.org/drawingml/2006/main">
+            <a:off x="714375" y="2057400"/>
+            <a:ext cx="3238500" cy="2781300"/>
+          </a:xfrm>
+          <a:prstGeom xmlns:a="http://schemas.openxmlformats.org/drawingml/2006/main" prst="roundRect">
+            <a:avLst>
+              <a:gd name="adj" fmla="val 4110"/>
+            </a:avLst>
+          </a:prstGeom>
+          <a:noFill xmlns:a="http://schemas.openxmlformats.org/drawingml/2006/main"/>
           <a:ln xmlns:a="http://schemas.openxmlformats.org/drawingml/2006/main" w="9525">
             <a:solidFill>
-              <a:srgbClr val="000000"/>
+              <a:srgbClr val="EAD2AE"/>
             </a:solidFill>
             <a:prstDash val="solid"/>
           </a:ln>
         </p:spPr>
-      </p:cxnSp>
-      <p:sp>
-        <p:nvSpPr>
-          <p:cNvPr id="4" name="Google-Shape-2260-p159-5">
-            <a:extLst xmlns:a="http://schemas.openxmlformats.org/drawingml/2006/main">
-              <a:ext uri="{FF2B5EF4-FFF2-40B4-BE49-F238E27FC236}">
-                <a16:creationId xmlns:a16="http://schemas.microsoft.com/office/drawing/2014/main" id="{7B534680-B7F3-4E12-B466-9DAA783C806B}"/>
-              </a:ext>
-            </a:extLst>
-          </p:cNvPr>
-          <p:cNvSpPr>
-            <a:spLocks xmlns:a="http://schemas.openxmlformats.org/drawingml/2006/main" noGrp="1"/>
-          </p:cNvSpPr>
-          <p:nvPr/>
-        </p:nvSpPr>
-        <p:spPr>
-          <a:xfrm xmlns:a="http://schemas.openxmlformats.org/drawingml/2006/main">
-            <a:off x="337757" y="3320225"/>
-            <a:ext cx="107061" cy="107061"/>
-          </a:xfrm>
-          <a:prstGeom xmlns:a="http://schemas.openxmlformats.org/drawingml/2006/main" prst="ellipse">
-            <a:avLst/>
-          </a:prstGeom>
-          <a:solidFill xmlns:a="http://schemas.openxmlformats.org/drawingml/2006/main">
-            <a:srgbClr val="000000"/>
-          </a:solidFill>
-        </p:spPr>
-      </p:sp>
-      <p:sp>
-        <p:nvSpPr>
-          <p:cNvPr id="5" name="Google-Shape-2261-p159-6">
-            <a:extLst xmlns:a="http://schemas.openxmlformats.org/drawingml/2006/main">
-              <a:ext uri="{FF2B5EF4-FFF2-40B4-BE49-F238E27FC236}">
-                <a16:creationId xmlns:a16="http://schemas.microsoft.com/office/drawing/2014/main" id="{A5CF19EE-44DE-4940-BD4D-AC6D220B4811}"/>
-              </a:ext>
-            </a:extLst>
-          </p:cNvPr>
-          <p:cNvSpPr>
-            <a:spLocks xmlns:a="http://schemas.openxmlformats.org/drawingml/2006/main" noGrp="1"/>
-          </p:cNvSpPr>
-          <p:nvPr/>
-        </p:nvSpPr>
-        <p:spPr>
-          <a:xfrm xmlns:a="http://schemas.openxmlformats.org/drawingml/2006/main">
-            <a:off x="4251770" y="3320225"/>
-            <a:ext cx="107061" cy="107061"/>
-          </a:xfrm>
-          <a:prstGeom xmlns:a="http://schemas.openxmlformats.org/drawingml/2006/main" prst="ellipse">
-            <a:avLst/>
-          </a:prstGeom>
-          <a:solidFill xmlns:a="http://schemas.openxmlformats.org/drawingml/2006/main">
-            <a:srgbClr val="000000"/>
-          </a:solidFill>
-        </p:spPr>
-      </p:sp>
-      <p:sp>
-        <p:nvSpPr>
-          <p:cNvPr id="6" name="Google-Shape-2262-p159-7">
-            <a:extLst xmlns:a="http://schemas.openxmlformats.org/drawingml/2006/main">
-              <a:ext uri="{FF2B5EF4-FFF2-40B4-BE49-F238E27FC236}">
-                <a16:creationId xmlns:a16="http://schemas.microsoft.com/office/drawing/2014/main" id="{E30E1E8D-24DC-4005-AEB8-CA90342260C3}"/>
-              </a:ext>
-            </a:extLst>
-          </p:cNvPr>
-          <p:cNvSpPr>
-            <a:spLocks xmlns:a="http://schemas.openxmlformats.org/drawingml/2006/main" noGrp="1"/>
-          </p:cNvSpPr>
-          <p:nvPr/>
-        </p:nvSpPr>
-        <p:spPr>
-          <a:xfrm xmlns:a="http://schemas.openxmlformats.org/drawingml/2006/main">
-            <a:off x="8176070" y="3320225"/>
-            <a:ext cx="107061" cy="107061"/>
-          </a:xfrm>
-          <a:prstGeom xmlns:a="http://schemas.openxmlformats.org/drawingml/2006/main" prst="ellipse">
-            <a:avLst/>
-          </a:prstGeom>
-          <a:solidFill xmlns:a="http://schemas.openxmlformats.org/drawingml/2006/main">
-            <a:srgbClr val="000000"/>
-          </a:solidFill>
-        </p:spPr>
-      </p:sp>
-      <p:sp>
-        <p:nvSpPr>
-          <p:cNvPr id="7" name="Content-Placeholder-15-8">
-            <a:extLst xmlns:a="http://schemas.openxmlformats.org/drawingml/2006/main">
-              <a:ext uri="{FF2B5EF4-FFF2-40B4-BE49-F238E27FC236}">
-                <a16:creationId xmlns:a16="http://schemas.microsoft.com/office/drawing/2014/main" id="{537B28CF-E526-49D2-8C85-D0E7DDEB07A1}"/>
-              </a:ext>
-            </a:extLst>
-          </p:cNvPr>
-          <p:cNvSpPr>
-            <a:spLocks xmlns:a="http://schemas.openxmlformats.org/drawingml/2006/main" noGrp="1"/>
-          </p:cNvSpPr>
-          <p:nvPr/>
-        </p:nvSpPr>
-        <p:spPr>
-          <a:xfrm xmlns:a="http://schemas.openxmlformats.org/drawingml/2006/main">
-            <a:off x="393668" y="2843308"/>
-            <a:ext cx="1612868" cy="262414"/>
-          </a:xfrm>
-          <a:prstGeom xmlns:a="http://schemas.openxmlformats.org/drawingml/2006/main" prst="rect">
-            <a:avLst/>
-          </a:prstGeom>
-        </p:spPr>
-        <p:txBody>
-          <a:bodyPr xmlns:a="http://schemas.openxmlformats.org/drawingml/2006/main" lIns="0" tIns="0" rIns="0" bIns="0">
-            <a:noAutofit/>
-          </a:bodyPr>
-          <a:lstStyle xmlns:a="http://schemas.openxmlformats.org/drawingml/2006/main"/>
-          <a:p xmlns:a="http://schemas.openxmlformats.org/drawingml/2006/main">
-            <a:pPr algn="l">
-              <a:defRPr sz="1600">
-                <a:solidFill>
-                  <a:srgbClr val="000000"/>
-                </a:solidFill>
-                <a:latin typeface="Helvetica Neue"/>
-                <a:ea typeface="Helvetica Neue"/>
-                <a:cs typeface="Helvetica Neue"/>
-              </a:defRPr>
-            </a:pPr>
-            <a:r>
-              <a:t>PREPARE</a:t>
-            </a:r>
-          </a:p>
-        </p:txBody>
-      </p:sp>
-      <p:sp>
-        <p:nvSpPr>
-          <p:cNvPr id="8" name="Content-Placeholder-15-9">
-            <a:extLst xmlns:a="http://schemas.openxmlformats.org/drawingml/2006/main">
-              <a:ext uri="{FF2B5EF4-FFF2-40B4-BE49-F238E27FC236}">
-                <a16:creationId xmlns:a16="http://schemas.microsoft.com/office/drawing/2014/main" id="{B1B1D021-C9EA-4D79-86A4-5FEB65AAE592}"/>
-              </a:ext>
-            </a:extLst>
-          </p:cNvPr>
-          <p:cNvSpPr>
-            <a:spLocks xmlns:a="http://schemas.openxmlformats.org/drawingml/2006/main" noGrp="1"/>
-          </p:cNvSpPr>
-          <p:nvPr/>
-        </p:nvSpPr>
-        <p:spPr>
-          <a:xfrm xmlns:a="http://schemas.openxmlformats.org/drawingml/2006/main">
-            <a:off x="4294156" y="2843308"/>
-            <a:ext cx="1612868" cy="262414"/>
-          </a:xfrm>
-          <a:prstGeom xmlns:a="http://schemas.openxmlformats.org/drawingml/2006/main" prst="rect">
-            <a:avLst/>
-          </a:prstGeom>
-        </p:spPr>
-        <p:txBody>
-          <a:bodyPr xmlns:a="http://schemas.openxmlformats.org/drawingml/2006/main" lIns="0" tIns="0" rIns="0" bIns="0">
-            <a:noAutofit/>
-          </a:bodyPr>
-          <a:lstStyle xmlns:a="http://schemas.openxmlformats.org/drawingml/2006/main"/>
-          <a:p xmlns:a="http://schemas.openxmlformats.org/drawingml/2006/main">
-            <a:pPr algn="l">
-              <a:defRPr sz="1600">
-                <a:solidFill>
-                  <a:srgbClr val="000000"/>
-                </a:solidFill>
-                <a:latin typeface="Helvetica Neue"/>
-                <a:ea typeface="Helvetica Neue"/>
-                <a:cs typeface="Helvetica Neue"/>
-              </a:defRPr>
-            </a:pPr>
-            <a:r>
-              <a:t>CHECK</a:t>
-            </a:r>
-          </a:p>
-        </p:txBody>
-      </p:sp>
-      <p:sp>
-        <p:nvSpPr>
-          <p:cNvPr id="9" name="Content-Placeholder-15-10">
-            <a:extLst xmlns:a="http://schemas.openxmlformats.org/drawingml/2006/main">
-              <a:ext uri="{FF2B5EF4-FFF2-40B4-BE49-F238E27FC236}">
-                <a16:creationId xmlns:a16="http://schemas.microsoft.com/office/drawing/2014/main" id="{6C826225-1403-4814-BA59-40C25AFBB9DE}"/>
-              </a:ext>
-            </a:extLst>
-          </p:cNvPr>
-          <p:cNvSpPr>
-            <a:spLocks xmlns:a="http://schemas.openxmlformats.org/drawingml/2006/main" noGrp="1"/>
-          </p:cNvSpPr>
-          <p:nvPr/>
-        </p:nvSpPr>
-        <p:spPr>
-          <a:xfrm xmlns:a="http://schemas.openxmlformats.org/drawingml/2006/main">
-            <a:off x="8223218" y="2843308"/>
-            <a:ext cx="1612868" cy="262414"/>
-          </a:xfrm>
-          <a:prstGeom xmlns:a="http://schemas.openxmlformats.org/drawingml/2006/main" prst="rect">
-            <a:avLst/>
-          </a:prstGeom>
-        </p:spPr>
-        <p:txBody>
-          <a:bodyPr xmlns:a="http://schemas.openxmlformats.org/drawingml/2006/main" lIns="0" tIns="0" rIns="0" bIns="0">
-            <a:noAutofit/>
-          </a:bodyPr>
-          <a:lstStyle xmlns:a="http://schemas.openxmlformats.org/drawingml/2006/main"/>
-          <a:p xmlns:a="http://schemas.openxmlformats.org/drawingml/2006/main">
-            <a:pPr algn="l">
-              <a:defRPr sz="1600">
-                <a:solidFill>
-                  <a:srgbClr val="000000"/>
-                </a:solidFill>
-                <a:latin typeface="Helvetica Neue"/>
-                <a:ea typeface="Helvetica Neue"/>
-                <a:cs typeface="Helvetica Neue"/>
-              </a:defRPr>
-            </a:pPr>
-            <a:r>
-              <a:t>RECORD</a:t>
-            </a:r>
-          </a:p>
-        </p:txBody>
-      </p:sp>
-      <p:sp>
-        <p:nvSpPr>
-          <p:cNvPr id="10" name="Text-Placeholder-16-11">
-            <a:extLst xmlns:a="http://schemas.openxmlformats.org/drawingml/2006/main">
-              <a:ext uri="{FF2B5EF4-FFF2-40B4-BE49-F238E27FC236}">
-                <a16:creationId xmlns:a16="http://schemas.microsoft.com/office/drawing/2014/main" id="{ECAD4C09-8FD5-4A85-8CF5-ACDB053B9EA3}"/>
-              </a:ext>
-            </a:extLst>
-          </p:cNvPr>
-          <p:cNvSpPr>
-            <a:spLocks xmlns:a="http://schemas.openxmlformats.org/drawingml/2006/main" noGrp="1"/>
-          </p:cNvSpPr>
-          <p:nvPr/>
-        </p:nvSpPr>
-        <p:spPr>
-          <a:xfrm xmlns:a="http://schemas.openxmlformats.org/drawingml/2006/main">
-            <a:off x="4317111" y="3822668"/>
-            <a:ext cx="3156109" cy="1586294"/>
-          </a:xfrm>
-          <a:prstGeom xmlns:a="http://schemas.openxmlformats.org/drawingml/2006/main" prst="rect">
-            <a:avLst/>
-          </a:prstGeom>
-        </p:spPr>
-        <p:txBody>
-          <a:bodyPr xmlns:a="http://schemas.openxmlformats.org/drawingml/2006/main" lIns="0" tIns="0" rIns="0" bIns="0">
-            <a:noAutofit/>
-          </a:bodyPr>
-          <a:lstStyle xmlns:a="http://schemas.openxmlformats.org/drawingml/2006/main"/>
-          <a:p xmlns:a="http://schemas.openxmlformats.org/drawingml/2006/main">
-            <a:pPr algn="l">
-              <a:defRPr sz="2400">
-                <a:solidFill>
-                  <a:srgbClr val="000000"/>
-                </a:solidFill>
-                <a:latin typeface="Helvetica Neue"/>
-                <a:ea typeface="Helvetica Neue"/>
-                <a:cs typeface="Helvetica Neue"/>
-              </a:defRPr>
-            </a:pPr>
-            <a:r>
-              <a:t>During</a:t>
-            </a:r>
-          </a:p>
-          <a:p xmlns:a="http://schemas.openxmlformats.org/drawingml/2006/main">
-            <a:pPr algn="l">
-              <a:defRPr sz="2400">
-                <a:solidFill>
-                  <a:srgbClr val="000000"/>
-                </a:solidFill>
-                <a:latin typeface="Helvetica Neue"/>
-                <a:ea typeface="Helvetica Neue"/>
-                <a:cs typeface="Helvetica Neue"/>
-              </a:defRPr>
-            </a:pPr>
-            <a:r>
-              <a:t>Apply PVA only as demonstrated</a:t>
-            </a:r>
-          </a:p>
-        </p:txBody>
-      </p:sp>
-      <p:sp>
-        <p:nvSpPr>
-          <p:cNvPr id="11" name="Text-Placeholder-16-12">
-            <a:extLst xmlns:a="http://schemas.openxmlformats.org/drawingml/2006/main">
-              <a:ext uri="{FF2B5EF4-FFF2-40B4-BE49-F238E27FC236}">
-                <a16:creationId xmlns:a16="http://schemas.microsoft.com/office/drawing/2014/main" id="{CCFEE5A5-3CFE-48A5-B633-AC3EBC14EF40}"/>
-              </a:ext>
-            </a:extLst>
-          </p:cNvPr>
-          <p:cNvSpPr>
-            <a:spLocks xmlns:a="http://schemas.openxmlformats.org/drawingml/2006/main" noGrp="1"/>
-          </p:cNvSpPr>
-          <p:nvPr/>
-        </p:nvSpPr>
-        <p:spPr>
-          <a:xfrm xmlns:a="http://schemas.openxmlformats.org/drawingml/2006/main">
-            <a:off x="399859" y="3822668"/>
-            <a:ext cx="3156109" cy="1586294"/>
-          </a:xfrm>
-          <a:prstGeom xmlns:a="http://schemas.openxmlformats.org/drawingml/2006/main" prst="rect">
-            <a:avLst/>
-          </a:prstGeom>
-        </p:spPr>
-        <p:txBody>
-          <a:bodyPr xmlns:a="http://schemas.openxmlformats.org/drawingml/2006/main" lIns="0" tIns="0" rIns="0" bIns="0">
-            <a:noAutofit/>
-          </a:bodyPr>
-          <a:lstStyle xmlns:a="http://schemas.openxmlformats.org/drawingml/2006/main"/>
-          <a:p xmlns:a="http://schemas.openxmlformats.org/drawingml/2006/main">
-            <a:pPr algn="l">
-              <a:defRPr sz="2400">
-                <a:solidFill>
-                  <a:srgbClr val="000000"/>
-                </a:solidFill>
-                <a:latin typeface="Helvetica Neue"/>
-                <a:ea typeface="Helvetica Neue"/>
-                <a:cs typeface="Helvetica Neue"/>
-              </a:defRPr>
-            </a:pPr>
-            <a:r>
-              <a:t>Before</a:t>
-            </a:r>
-          </a:p>
-          <a:p xmlns:a="http://schemas.openxmlformats.org/drawingml/2006/main">
-            <a:pPr algn="l">
-              <a:defRPr sz="2400">
-                <a:solidFill>
-                  <a:srgbClr val="000000"/>
-                </a:solidFill>
-                <a:latin typeface="Helvetica Neue"/>
-                <a:ea typeface="Helvetica Neue"/>
-                <a:cs typeface="Helvetica Neue"/>
-              </a:defRPr>
-            </a:pPr>
-            <a:r>
-              <a:t>Check order, fit, square and clamp access</a:t>
-            </a:r>
-          </a:p>
-        </p:txBody>
-      </p:sp>
-      <p:sp>
-        <p:nvSpPr>
-          <p:cNvPr id="12" name="Text-Placeholder-16-13">
-            <a:extLst xmlns:a="http://schemas.openxmlformats.org/drawingml/2006/main">
-              <a:ext uri="{FF2B5EF4-FFF2-40B4-BE49-F238E27FC236}">
-                <a16:creationId xmlns:a16="http://schemas.microsoft.com/office/drawing/2014/main" id="{90188185-69FD-49DF-AAE1-B10C7F928815}"/>
-              </a:ext>
-            </a:extLst>
-          </p:cNvPr>
-          <p:cNvSpPr>
-            <a:spLocks xmlns:a="http://schemas.openxmlformats.org/drawingml/2006/main" noGrp="1"/>
-          </p:cNvSpPr>
-          <p:nvPr/>
-        </p:nvSpPr>
-        <p:spPr>
-          <a:xfrm xmlns:a="http://schemas.openxmlformats.org/drawingml/2006/main">
-            <a:off x="8177879" y="3822668"/>
-            <a:ext cx="3156109" cy="1586294"/>
-          </a:xfrm>
-          <a:prstGeom xmlns:a="http://schemas.openxmlformats.org/drawingml/2006/main" prst="rect">
-            <a:avLst/>
-          </a:prstGeom>
-        </p:spPr>
-        <p:txBody>
-          <a:bodyPr xmlns:a="http://schemas.openxmlformats.org/drawingml/2006/main" lIns="0" tIns="0" rIns="0" bIns="0">
-            <a:noAutofit/>
-          </a:bodyPr>
-          <a:lstStyle xmlns:a="http://schemas.openxmlformats.org/drawingml/2006/main"/>
-          <a:p xmlns:a="http://schemas.openxmlformats.org/drawingml/2006/main">
-            <a:pPr algn="l">
-              <a:defRPr sz="2400">
-                <a:solidFill>
-                  <a:srgbClr val="000000"/>
-                </a:solidFill>
-                <a:latin typeface="Helvetica Neue"/>
-                <a:ea typeface="Helvetica Neue"/>
-                <a:cs typeface="Helvetica Neue"/>
-              </a:defRPr>
-            </a:pPr>
-            <a:r>
-              <a:t>After</a:t>
-            </a:r>
-          </a:p>
-          <a:p xmlns:a="http://schemas.openxmlformats.org/drawingml/2006/main">
-            <a:pPr algn="l">
-              <a:defRPr sz="2400">
-                <a:solidFill>
-                  <a:srgbClr val="000000"/>
-                </a:solidFill>
-                <a:latin typeface="Helvetica Neue"/>
-                <a:ea typeface="Helvetica Neue"/>
-                <a:cs typeface="Helvetica Neue"/>
-              </a:defRPr>
-            </a:pPr>
-            <a:r>
-              <a:t>Record assembly and surface-preparation evidence</a:t>
-            </a:r>
-          </a:p>
-        </p:txBody>
+      </p:sp>
+      <p:sp>
+        <p:nvSpPr>
+          <p:cNvPr id="21" name="">
+            <a:extLst xmlns:a="http://schemas.openxmlformats.org/drawingml/2006/main">
+              <a:ext uri="{FF2B5EF4-FFF2-40B4-BE49-F238E27FC236}">
+                <a16:creationId xmlns:a16="http://schemas.microsoft.com/office/drawing/2014/main" id="{A2192CD6-BC01-4755-8686-128680E61E7E}"/>
+              </a:ext>
+            </a:extLst>
+          </p:cNvPr>
+          <p:cNvSpPr>
+            <a:spLocks xmlns:a="http://schemas.openxmlformats.org/drawingml/2006/main" noGrp="1"/>
+          </p:cNvSpPr>
+          <p:nvPr/>
+        </p:nvSpPr>
+        <p:spPr>
+          <a:xfrm xmlns:a="http://schemas.openxmlformats.org/drawingml/2006/main">
+            <a:off x="4429125" y="2057400"/>
+            <a:ext cx="3238500" cy="2781300"/>
+          </a:xfrm>
+          <a:prstGeom xmlns:a="http://schemas.openxmlformats.org/drawingml/2006/main" prst="roundRect">
+            <a:avLst>
+              <a:gd name="adj" fmla="val 4110"/>
+            </a:avLst>
+          </a:prstGeom>
+          <a:noFill xmlns:a="http://schemas.openxmlformats.org/drawingml/2006/main"/>
+          <a:ln xmlns:a="http://schemas.openxmlformats.org/drawingml/2006/main" w="9525">
+            <a:solidFill>
+              <a:srgbClr val="D8941C"/>
+            </a:solidFill>
+            <a:prstDash val="solid"/>
+          </a:ln>
+        </p:spPr>
+      </p:sp>
+      <p:sp>
+        <p:nvSpPr>
+          <p:cNvPr id="22" name="">
+            <a:extLst xmlns:a="http://schemas.openxmlformats.org/drawingml/2006/main">
+              <a:ext uri="{FF2B5EF4-FFF2-40B4-BE49-F238E27FC236}">
+                <a16:creationId xmlns:a16="http://schemas.microsoft.com/office/drawing/2014/main" id="{C582C9FC-91D8-4C5C-9181-4D14510DA627}"/>
+              </a:ext>
+            </a:extLst>
+          </p:cNvPr>
+          <p:cNvSpPr>
+            <a:spLocks xmlns:a="http://schemas.openxmlformats.org/drawingml/2006/main" noGrp="1"/>
+          </p:cNvSpPr>
+          <p:nvPr/>
+        </p:nvSpPr>
+        <p:spPr>
+          <a:xfrm xmlns:a="http://schemas.openxmlformats.org/drawingml/2006/main">
+            <a:off x="8143875" y="2057400"/>
+            <a:ext cx="3238500" cy="2781300"/>
+          </a:xfrm>
+          <a:prstGeom xmlns:a="http://schemas.openxmlformats.org/drawingml/2006/main" prst="roundRect">
+            <a:avLst>
+              <a:gd name="adj" fmla="val 4110"/>
+            </a:avLst>
+          </a:prstGeom>
+          <a:noFill xmlns:a="http://schemas.openxmlformats.org/drawingml/2006/main"/>
+          <a:ln xmlns:a="http://schemas.openxmlformats.org/drawingml/2006/main" w="9525">
+            <a:solidFill>
+              <a:srgbClr val="EAD2AE"/>
+            </a:solidFill>
+            <a:prstDash val="solid"/>
+          </a:ln>
+        </p:spPr>
       </p:sp>
     </p:spTree>
     <p:extLst>
@@ -4050,6 +5656,13 @@
 <file path=ppt/slides/slide7.xml><?xml version="1.0" encoding="utf-8"?>
 <p:sld xmlns:p="http://schemas.openxmlformats.org/presentationml/2006/main">
   <p:cSld>
+    <p:bg>
+      <p:bgPr>
+        <a:solidFill xmlns:a="http://schemas.openxmlformats.org/drawingml/2006/main">
+          <a:srgbClr val="F8F2E8"/>
+        </a:solidFill>
+      </p:bgPr>
+    </p:bg>
     <p:spTree>
       <p:nvGrpSpPr>
         <p:cNvPr id="1" name=""/>
@@ -4075,28 +5688,42 @@
         </p:nvSpPr>
         <p:spPr>
           <a:xfrm xmlns:a="http://schemas.openxmlformats.org/drawingml/2006/main">
-            <a:off x="11279219" y="6278594"/>
-            <a:ext cx="519113" cy="241268"/>
+            <a:off x="11334750" y="6496050"/>
+            <a:ext cx="400050" cy="190500"/>
           </a:xfrm>
           <a:prstGeom xmlns:a="http://schemas.openxmlformats.org/drawingml/2006/main" prst="rect">
             <a:avLst/>
           </a:prstGeom>
         </p:spPr>
         <p:txBody>
-          <a:bodyPr xmlns:a="http://schemas.openxmlformats.org/drawingml/2006/main" lIns="0" tIns="0" rIns="0" bIns="0" anchor="b"/>
+          <a:bodyPr xmlns:a="http://schemas.openxmlformats.org/drawingml/2006/main" lIns="38100" tIns="38100" rIns="38100" bIns="38100" anchor="ctr">
+            <a:normAutofit fontScale="64935"/>
+          </a:bodyPr>
           <a:lstStyle xmlns:a="http://schemas.openxmlformats.org/drawingml/2006/main"/>
           <a:p xmlns:a="http://schemas.openxmlformats.org/drawingml/2006/main">
             <a:pPr algn="r">
-              <a:defRPr sz="1000">
-                <a:solidFill>
-                  <a:srgbClr val="000000"/>
-                </a:solidFill>
-                <a:latin typeface="Helvetica Neue"/>
-                <a:ea typeface="Helvetica Neue"/>
-                <a:cs typeface="Helvetica Neue"/>
-              </a:defRPr>
-            </a:pPr>
-            <a:r>
+              <a:lnSpc>
+                <a:spcPct val="105000"/>
+              </a:lnSpc>
+              <a:buNone/>
+              <a:defRPr sz="1100" b="1">
+                <a:solidFill>
+                  <a:srgbClr val="5A665F"/>
+                </a:solidFill>
+                <a:latin typeface="Aptos"/>
+                <a:ea typeface="Aptos"/>
+                <a:cs typeface="Aptos"/>
+              </a:defRPr>
+            </a:pPr>
+            <a:r>
+              <a:rPr sz="1100" b="1">
+                <a:solidFill>
+                  <a:srgbClr val="5A665F"/>
+                </a:solidFill>
+                <a:latin typeface="Aptos"/>
+                <a:ea typeface="Aptos"/>
+                <a:cs typeface="Aptos"/>
+              </a:rPr>
               <a:t>7</a:t>
             </a:r>
           </a:p>
@@ -4118,31 +5745,43 @@
         </p:nvSpPr>
         <p:spPr>
           <a:xfrm xmlns:a="http://schemas.openxmlformats.org/drawingml/2006/main">
-            <a:off x="393668" y="344043"/>
-            <a:ext cx="11404568" cy="1047464"/>
+            <a:off x="571500" y="514350"/>
+            <a:ext cx="10287000" cy="666750"/>
           </a:xfrm>
           <a:prstGeom xmlns:a="http://schemas.openxmlformats.org/drawingml/2006/main" prst="rect">
             <a:avLst/>
           </a:prstGeom>
         </p:spPr>
         <p:txBody>
-          <a:bodyPr xmlns:a="http://schemas.openxmlformats.org/drawingml/2006/main" lIns="0" tIns="0" rIns="0" bIns="0" anchor="t">
+          <a:bodyPr xmlns:a="http://schemas.openxmlformats.org/drawingml/2006/main" lIns="38100" tIns="38100" rIns="38100" bIns="38100" anchor="t">
             <a:normAutofit fontScale="100000"/>
           </a:bodyPr>
           <a:lstStyle xmlns:a="http://schemas.openxmlformats.org/drawingml/2006/main"/>
           <a:p xmlns:a="http://schemas.openxmlformats.org/drawingml/2006/main">
             <a:pPr algn="l">
-              <a:defRPr sz="2900">
-                <a:solidFill>
-                  <a:srgbClr val="000000"/>
-                </a:solidFill>
-                <a:latin typeface="Helvetica Neue"/>
-                <a:ea typeface="Helvetica Neue"/>
-                <a:cs typeface="Helvetica Neue"/>
-              </a:defRPr>
-            </a:pPr>
-            <a:r>
-              <a:t>Save evidence that shows your own decisions</a:t>
+              <a:lnSpc>
+                <a:spcPct val="105000"/>
+              </a:lnSpc>
+              <a:buNone/>
+              <a:defRPr sz="3600" b="1">
+                <a:solidFill>
+                  <a:srgbClr val="173126"/>
+                </a:solidFill>
+                <a:latin typeface="Aptos"/>
+                <a:ea typeface="Aptos"/>
+                <a:cs typeface="Aptos"/>
+              </a:defRPr>
+            </a:pPr>
+            <a:r>
+              <a:rPr sz="3600" b="1">
+                <a:solidFill>
+                  <a:srgbClr val="173126"/>
+                </a:solidFill>
+                <a:latin typeface="Aptos"/>
+                <a:ea typeface="Aptos"/>
+                <a:cs typeface="Aptos"/>
+              </a:rPr>
+              <a:t>Build a response that shows your thinking</a:t>
             </a:r>
           </a:p>
         </p:txBody>
@@ -4163,222 +5802,578 @@
         </p:nvSpPr>
         <p:spPr>
           <a:xfrm xmlns:a="http://schemas.openxmlformats.org/drawingml/2006/main">
-            <a:off x="393668" y="2031968"/>
-            <a:ext cx="5537168" cy="1643063"/>
+            <a:off x="742950" y="2381250"/>
+            <a:ext cx="2095500" cy="1600200"/>
           </a:xfrm>
           <a:prstGeom xmlns:a="http://schemas.openxmlformats.org/drawingml/2006/main" prst="rect">
             <a:avLst/>
           </a:prstGeom>
         </p:spPr>
         <p:txBody>
-          <a:bodyPr xmlns:a="http://schemas.openxmlformats.org/drawingml/2006/main" lIns="91440" tIns="45720" rIns="91440" bIns="45720"/>
-          <a:lstStyle xmlns:a="http://schemas.openxmlformats.org/drawingml/2006/main"/>
-          <a:p xmlns:a="http://schemas.openxmlformats.org/drawingml/2006/main">
-            <a:pPr algn="l">
-              <a:defRPr sz="2400">
-                <a:solidFill>
-                  <a:srgbClr val="000000"/>
-                </a:solidFill>
-                <a:latin typeface="Helvetica Neue"/>
-                <a:ea typeface="Helvetica Neue"/>
-                <a:cs typeface="Helvetica Neue"/>
-              </a:defRPr>
-            </a:pPr>
-            <a:r>
-              <a:t>1</a:t>
-            </a:r>
-          </a:p>
-          <a:p xmlns:a="http://schemas.openxmlformats.org/drawingml/2006/main">
-            <a:pPr algn="l">
-              <a:defRPr sz="2400">
-                <a:solidFill>
-                  <a:srgbClr val="000000"/>
-                </a:solidFill>
-                <a:latin typeface="Helvetica Neue"/>
-                <a:ea typeface="Helvetica Neue"/>
-                <a:cs typeface="Helvetica Neue"/>
-              </a:defRPr>
-            </a:pPr>
-            <a:r>
-              <a:t>Controlled cutting check</a:t>
-            </a:r>
-          </a:p>
-        </p:txBody>
-      </p:sp>
-      <p:sp>
-        <p:nvSpPr>
-          <p:cNvPr id="4" name="Content-Placeholder-10-5">
-            <a:extLst xmlns:a="http://schemas.openxmlformats.org/drawingml/2006/main">
-              <a:ext uri="{FF2B5EF4-FFF2-40B4-BE49-F238E27FC236}">
-                <a16:creationId xmlns:a16="http://schemas.microsoft.com/office/drawing/2014/main" id="{410F9B10-B7A5-4D13-813F-01F570DD23EE}"/>
-              </a:ext>
-            </a:extLst>
-          </p:cNvPr>
-          <p:cNvSpPr>
-            <a:spLocks xmlns:a="http://schemas.openxmlformats.org/drawingml/2006/main" noGrp="1"/>
-          </p:cNvSpPr>
-          <p:nvPr/>
-        </p:nvSpPr>
-        <p:spPr>
-          <a:xfrm xmlns:a="http://schemas.openxmlformats.org/drawingml/2006/main">
-            <a:off x="6256592" y="2031968"/>
-            <a:ext cx="5537168" cy="1643063"/>
-          </a:xfrm>
-          <a:prstGeom xmlns:a="http://schemas.openxmlformats.org/drawingml/2006/main" prst="rect">
-            <a:avLst/>
-          </a:prstGeom>
-        </p:spPr>
-        <p:txBody>
-          <a:bodyPr xmlns:a="http://schemas.openxmlformats.org/drawingml/2006/main" lIns="91440" tIns="45720" rIns="91440" bIns="45720"/>
-          <a:lstStyle xmlns:a="http://schemas.openxmlformats.org/drawingml/2006/main"/>
-          <a:p xmlns:a="http://schemas.openxmlformats.org/drawingml/2006/main">
-            <a:pPr algn="l">
-              <a:defRPr sz="2400">
-                <a:solidFill>
-                  <a:srgbClr val="000000"/>
-                </a:solidFill>
-                <a:latin typeface="Helvetica Neue"/>
-                <a:ea typeface="Helvetica Neue"/>
-                <a:cs typeface="Helvetica Neue"/>
-              </a:defRPr>
-            </a:pPr>
-            <a:r>
-              <a:t>2</a:t>
-            </a:r>
-          </a:p>
-          <a:p xmlns:a="http://schemas.openxmlformats.org/drawingml/2006/main">
-            <a:pPr algn="l">
-              <a:defRPr sz="2400">
-                <a:solidFill>
-                  <a:srgbClr val="000000"/>
-                </a:solidFill>
-                <a:latin typeface="Helvetica Neue"/>
-                <a:ea typeface="Helvetica Neue"/>
-                <a:cs typeface="Helvetica Neue"/>
-              </a:defRPr>
-            </a:pPr>
-            <a:r>
-              <a:t>Joint-choice justification</a:t>
-            </a:r>
-          </a:p>
-        </p:txBody>
-      </p:sp>
-      <p:sp>
-        <p:nvSpPr>
-          <p:cNvPr id="5" name="Content-Placeholder-9-6">
-            <a:extLst xmlns:a="http://schemas.openxmlformats.org/drawingml/2006/main">
-              <a:ext uri="{FF2B5EF4-FFF2-40B4-BE49-F238E27FC236}">
-                <a16:creationId xmlns:a16="http://schemas.microsoft.com/office/drawing/2014/main" id="{12F1579E-CA94-4674-9BF9-435DF2AE9C8D}"/>
-              </a:ext>
-            </a:extLst>
-          </p:cNvPr>
-          <p:cNvSpPr>
-            <a:spLocks xmlns:a="http://schemas.openxmlformats.org/drawingml/2006/main" noGrp="1"/>
-          </p:cNvSpPr>
-          <p:nvPr/>
-        </p:nvSpPr>
-        <p:spPr>
-          <a:xfrm xmlns:a="http://schemas.openxmlformats.org/drawingml/2006/main">
-            <a:off x="393668" y="4016978"/>
-            <a:ext cx="5537168" cy="1643158"/>
-          </a:xfrm>
-          <a:prstGeom xmlns:a="http://schemas.openxmlformats.org/drawingml/2006/main" prst="rect">
-            <a:avLst/>
-          </a:prstGeom>
-        </p:spPr>
-        <p:txBody>
-          <a:bodyPr xmlns:a="http://schemas.openxmlformats.org/drawingml/2006/main" lIns="0" tIns="0" rIns="0" bIns="0">
+          <a:bodyPr xmlns:a="http://schemas.openxmlformats.org/drawingml/2006/main" lIns="38100" tIns="38100" rIns="38100" bIns="38100" anchor="ctr">
             <a:normAutofit fontScale="100000"/>
           </a:bodyPr>
           <a:lstStyle xmlns:a="http://schemas.openxmlformats.org/drawingml/2006/main"/>
           <a:p xmlns:a="http://schemas.openxmlformats.org/drawingml/2006/main">
             <a:pPr algn="l">
-              <a:defRPr sz="2400">
-                <a:solidFill>
-                  <a:srgbClr val="000000"/>
-                </a:solidFill>
-                <a:latin typeface="Helvetica Neue"/>
-                <a:ea typeface="Helvetica Neue"/>
-                <a:cs typeface="Helvetica Neue"/>
-              </a:defRPr>
-            </a:pPr>
-            <a:r>
-              <a:t>3</a:t>
-            </a:r>
-          </a:p>
-          <a:p xmlns:a="http://schemas.openxmlformats.org/drawingml/2006/main">
-            <a:pPr algn="l">
-              <a:defRPr sz="2400">
-                <a:solidFill>
-                  <a:srgbClr val="000000"/>
-                </a:solidFill>
-                <a:latin typeface="Helvetica Neue"/>
-                <a:ea typeface="Helvetica Neue"/>
-                <a:cs typeface="Helvetica Neue"/>
-              </a:defRPr>
-            </a:pPr>
-            <a:r>
-              <a:t>Approved dry fit</a:t>
-            </a:r>
-          </a:p>
-        </p:txBody>
-      </p:sp>
-      <p:sp>
-        <p:nvSpPr>
-          <p:cNvPr id="6" name="Content-Placeholder-10-7">
-            <a:extLst xmlns:a="http://schemas.openxmlformats.org/drawingml/2006/main">
-              <a:ext uri="{FF2B5EF4-FFF2-40B4-BE49-F238E27FC236}">
-                <a16:creationId xmlns:a16="http://schemas.microsoft.com/office/drawing/2014/main" id="{597B7E8E-A2FF-4094-8234-ECC11AC2C287}"/>
-              </a:ext>
-            </a:extLst>
-          </p:cNvPr>
-          <p:cNvSpPr>
-            <a:spLocks xmlns:a="http://schemas.openxmlformats.org/drawingml/2006/main" noGrp="1"/>
-          </p:cNvSpPr>
-          <p:nvPr/>
-        </p:nvSpPr>
-        <p:spPr>
-          <a:xfrm xmlns:a="http://schemas.openxmlformats.org/drawingml/2006/main">
-            <a:off x="6256592" y="4016978"/>
-            <a:ext cx="5537168" cy="1643158"/>
+              <a:lnSpc>
+                <a:spcPct val="112000"/>
+              </a:lnSpc>
+              <a:buNone/>
+              <a:defRPr sz="2000" b="0">
+                <a:solidFill>
+                  <a:srgbClr val="173126"/>
+                </a:solidFill>
+                <a:latin typeface="Aptos"/>
+                <a:ea typeface="Aptos"/>
+                <a:cs typeface="Aptos"/>
+              </a:defRPr>
+            </a:pPr>
+            <a:r>
+              <a:rPr sz="2000" b="0">
+                <a:solidFill>
+                  <a:srgbClr val="173126"/>
+                </a:solidFill>
+                <a:latin typeface="Aptos"/>
+                <a:ea typeface="Aptos"/>
+                <a:cs typeface="Aptos"/>
+              </a:rPr>
+              <a:t>READ</a:t>
+            </a:r>
+          </a:p>
+          <a:p xmlns:a="http://schemas.openxmlformats.org/drawingml/2006/main">
+            <a:pPr algn="l">
+              <a:lnSpc>
+                <a:spcPct val="112000"/>
+              </a:lnSpc>
+              <a:buNone/>
+              <a:defRPr sz="2000" b="0">
+                <a:solidFill>
+                  <a:srgbClr val="173126"/>
+                </a:solidFill>
+                <a:latin typeface="Aptos"/>
+                <a:ea typeface="Aptos"/>
+                <a:cs typeface="Aptos"/>
+              </a:defRPr>
+            </a:pPr>
+            <a:r>
+              <a:rPr sz="2000" b="0">
+                <a:solidFill>
+                  <a:srgbClr val="173126"/>
+                </a:solidFill>
+                <a:latin typeface="Aptos"/>
+                <a:ea typeface="Aptos"/>
+                <a:cs typeface="Aptos"/>
+              </a:rPr>
+              <a:t>What is the question asking?</a:t>
+            </a:r>
+          </a:p>
+        </p:txBody>
+      </p:sp>
+      <p:sp>
+        <p:nvSpPr>
+          <p:cNvPr id="4" name="Content-Placeholder-10-5">
+            <a:extLst xmlns:a="http://schemas.openxmlformats.org/drawingml/2006/main">
+              <a:ext uri="{FF2B5EF4-FFF2-40B4-BE49-F238E27FC236}">
+                <a16:creationId xmlns:a16="http://schemas.microsoft.com/office/drawing/2014/main" id="{410F9B10-B7A5-4D13-813F-01F570DD23EE}"/>
+              </a:ext>
+            </a:extLst>
+          </p:cNvPr>
+          <p:cNvSpPr>
+            <a:spLocks xmlns:a="http://schemas.openxmlformats.org/drawingml/2006/main" noGrp="1"/>
+          </p:cNvSpPr>
+          <p:nvPr/>
+        </p:nvSpPr>
+        <p:spPr>
+          <a:xfrm xmlns:a="http://schemas.openxmlformats.org/drawingml/2006/main">
+            <a:off x="3648075" y="2381250"/>
+            <a:ext cx="2095500" cy="1600200"/>
           </a:xfrm>
           <a:prstGeom xmlns:a="http://schemas.openxmlformats.org/drawingml/2006/main" prst="rect">
             <a:avLst/>
           </a:prstGeom>
         </p:spPr>
         <p:txBody>
-          <a:bodyPr xmlns:a="http://schemas.openxmlformats.org/drawingml/2006/main" lIns="0" tIns="0" rIns="0" bIns="0">
+          <a:bodyPr xmlns:a="http://schemas.openxmlformats.org/drawingml/2006/main" lIns="38100" tIns="38100" rIns="38100" bIns="38100" anchor="ctr">
             <a:normAutofit fontScale="100000"/>
           </a:bodyPr>
           <a:lstStyle xmlns:a="http://schemas.openxmlformats.org/drawingml/2006/main"/>
           <a:p xmlns:a="http://schemas.openxmlformats.org/drawingml/2006/main">
             <a:pPr algn="l">
-              <a:defRPr sz="2400">
-                <a:solidFill>
-                  <a:srgbClr val="000000"/>
-                </a:solidFill>
-                <a:latin typeface="Helvetica Neue"/>
-                <a:ea typeface="Helvetica Neue"/>
-                <a:cs typeface="Helvetica Neue"/>
-              </a:defRPr>
-            </a:pPr>
-            <a:r>
-              <a:t>4</a:t>
-            </a:r>
-          </a:p>
-          <a:p xmlns:a="http://schemas.openxmlformats.org/drawingml/2006/main">
-            <a:pPr algn="l">
-              <a:defRPr sz="2400">
-                <a:solidFill>
-                  <a:srgbClr val="000000"/>
-                </a:solidFill>
-                <a:latin typeface="Helvetica Neue"/>
-                <a:ea typeface="Helvetica Neue"/>
-                <a:cs typeface="Helvetica Neue"/>
-              </a:defRPr>
-            </a:pPr>
-            <a:r>
-              <a:t>Assembly and quality photographs</a:t>
+              <a:lnSpc>
+                <a:spcPct val="112000"/>
+              </a:lnSpc>
+              <a:buNone/>
+              <a:defRPr sz="2000" b="0">
+                <a:solidFill>
+                  <a:srgbClr val="173126"/>
+                </a:solidFill>
+                <a:latin typeface="Aptos"/>
+                <a:ea typeface="Aptos"/>
+                <a:cs typeface="Aptos"/>
+              </a:defRPr>
+            </a:pPr>
+            <a:r>
+              <a:rPr sz="2000" b="0">
+                <a:solidFill>
+                  <a:srgbClr val="173126"/>
+                </a:solidFill>
+                <a:latin typeface="Aptos"/>
+                <a:ea typeface="Aptos"/>
+                <a:cs typeface="Aptos"/>
+              </a:rPr>
+              <a:t>SELECT</a:t>
+            </a:r>
+          </a:p>
+          <a:p xmlns:a="http://schemas.openxmlformats.org/drawingml/2006/main">
+            <a:pPr algn="l">
+              <a:lnSpc>
+                <a:spcPct val="112000"/>
+              </a:lnSpc>
+              <a:buNone/>
+              <a:defRPr sz="2000" b="0">
+                <a:solidFill>
+                  <a:srgbClr val="173126"/>
+                </a:solidFill>
+                <a:latin typeface="Aptos"/>
+                <a:ea typeface="Aptos"/>
+                <a:cs typeface="Aptos"/>
+              </a:defRPr>
+            </a:pPr>
+            <a:r>
+              <a:rPr sz="2000" b="0">
+                <a:solidFill>
+                  <a:srgbClr val="173126"/>
+                </a:solidFill>
+                <a:latin typeface="Aptos"/>
+                <a:ea typeface="Aptos"/>
+                <a:cs typeface="Aptos"/>
+              </a:rPr>
+              <a:t>Return to the precise theory.</a:t>
+            </a:r>
+          </a:p>
+        </p:txBody>
+      </p:sp>
+      <p:sp>
+        <p:nvSpPr>
+          <p:cNvPr id="5" name="Content-Placeholder-9-6">
+            <a:extLst xmlns:a="http://schemas.openxmlformats.org/drawingml/2006/main">
+              <a:ext uri="{FF2B5EF4-FFF2-40B4-BE49-F238E27FC236}">
+                <a16:creationId xmlns:a16="http://schemas.microsoft.com/office/drawing/2014/main" id="{12F1579E-CA94-4674-9BF9-435DF2AE9C8D}"/>
+              </a:ext>
+            </a:extLst>
+          </p:cNvPr>
+          <p:cNvSpPr>
+            <a:spLocks xmlns:a="http://schemas.openxmlformats.org/drawingml/2006/main" noGrp="1"/>
+          </p:cNvSpPr>
+          <p:nvPr/>
+        </p:nvSpPr>
+        <p:spPr>
+          <a:xfrm xmlns:a="http://schemas.openxmlformats.org/drawingml/2006/main">
+            <a:off x="6553200" y="2381250"/>
+            <a:ext cx="2095500" cy="1600200"/>
+          </a:xfrm>
+          <a:prstGeom xmlns:a="http://schemas.openxmlformats.org/drawingml/2006/main" prst="rect">
+            <a:avLst/>
+          </a:prstGeom>
+        </p:spPr>
+        <p:txBody>
+          <a:bodyPr xmlns:a="http://schemas.openxmlformats.org/drawingml/2006/main" lIns="38100" tIns="38100" rIns="38100" bIns="38100" anchor="ctr">
+            <a:normAutofit fontScale="100000"/>
+          </a:bodyPr>
+          <a:lstStyle xmlns:a="http://schemas.openxmlformats.org/drawingml/2006/main"/>
+          <a:p xmlns:a="http://schemas.openxmlformats.org/drawingml/2006/main">
+            <a:pPr algn="l">
+              <a:lnSpc>
+                <a:spcPct val="112000"/>
+              </a:lnSpc>
+              <a:buNone/>
+              <a:defRPr sz="2000" b="0">
+                <a:solidFill>
+                  <a:srgbClr val="173126"/>
+                </a:solidFill>
+                <a:latin typeface="Aptos"/>
+                <a:ea typeface="Aptos"/>
+                <a:cs typeface="Aptos"/>
+              </a:defRPr>
+            </a:pPr>
+            <a:r>
+              <a:rPr sz="2000" b="0">
+                <a:solidFill>
+                  <a:srgbClr val="173126"/>
+                </a:solidFill>
+                <a:latin typeface="Aptos"/>
+                <a:ea typeface="Aptos"/>
+                <a:cs typeface="Aptos"/>
+              </a:rPr>
+              <a:t>EXPLAIN</a:t>
+            </a:r>
+          </a:p>
+          <a:p xmlns:a="http://schemas.openxmlformats.org/drawingml/2006/main">
+            <a:pPr algn="l">
+              <a:lnSpc>
+                <a:spcPct val="112000"/>
+              </a:lnSpc>
+              <a:buNone/>
+              <a:defRPr sz="2000" b="0">
+                <a:solidFill>
+                  <a:srgbClr val="173126"/>
+                </a:solidFill>
+                <a:latin typeface="Aptos"/>
+                <a:ea typeface="Aptos"/>
+                <a:cs typeface="Aptos"/>
+              </a:defRPr>
+            </a:pPr>
+            <a:r>
+              <a:rPr sz="2000" b="0">
+                <a:solidFill>
+                  <a:srgbClr val="173126"/>
+                </a:solidFill>
+                <a:latin typeface="Aptos"/>
+                <a:ea typeface="Aptos"/>
+                <a:cs typeface="Aptos"/>
+              </a:rPr>
+              <a:t>Connect the idea to your evidence.</a:t>
+            </a:r>
+          </a:p>
+        </p:txBody>
+      </p:sp>
+      <p:sp>
+        <p:nvSpPr>
+          <p:cNvPr id="6" name="Content-Placeholder-10-7">
+            <a:extLst xmlns:a="http://schemas.openxmlformats.org/drawingml/2006/main">
+              <a:ext uri="{FF2B5EF4-FFF2-40B4-BE49-F238E27FC236}">
+                <a16:creationId xmlns:a16="http://schemas.microsoft.com/office/drawing/2014/main" id="{597B7E8E-A2FF-4094-8234-ECC11AC2C287}"/>
+              </a:ext>
+            </a:extLst>
+          </p:cNvPr>
+          <p:cNvSpPr>
+            <a:spLocks xmlns:a="http://schemas.openxmlformats.org/drawingml/2006/main" noGrp="1"/>
+          </p:cNvSpPr>
+          <p:nvPr/>
+        </p:nvSpPr>
+        <p:spPr>
+          <a:xfrm xmlns:a="http://schemas.openxmlformats.org/drawingml/2006/main">
+            <a:off x="9458325" y="2381250"/>
+            <a:ext cx="2095500" cy="1600200"/>
+          </a:xfrm>
+          <a:prstGeom xmlns:a="http://schemas.openxmlformats.org/drawingml/2006/main" prst="rect">
+            <a:avLst/>
+          </a:prstGeom>
+        </p:spPr>
+        <p:txBody>
+          <a:bodyPr xmlns:a="http://schemas.openxmlformats.org/drawingml/2006/main" lIns="38100" tIns="38100" rIns="38100" bIns="38100" anchor="ctr">
+            <a:normAutofit fontScale="100000"/>
+          </a:bodyPr>
+          <a:lstStyle xmlns:a="http://schemas.openxmlformats.org/drawingml/2006/main"/>
+          <a:p xmlns:a="http://schemas.openxmlformats.org/drawingml/2006/main">
+            <a:pPr algn="l">
+              <a:lnSpc>
+                <a:spcPct val="112000"/>
+              </a:lnSpc>
+              <a:buNone/>
+              <a:defRPr sz="2000" b="0">
+                <a:solidFill>
+                  <a:srgbClr val="173126"/>
+                </a:solidFill>
+                <a:latin typeface="Aptos"/>
+                <a:ea typeface="Aptos"/>
+                <a:cs typeface="Aptos"/>
+              </a:defRPr>
+            </a:pPr>
+            <a:r>
+              <a:rPr sz="2000" b="0">
+                <a:solidFill>
+                  <a:srgbClr val="173126"/>
+                </a:solidFill>
+                <a:latin typeface="Aptos"/>
+                <a:ea typeface="Aptos"/>
+                <a:cs typeface="Aptos"/>
+              </a:rPr>
+              <a:t>CHECK</a:t>
+            </a:r>
+          </a:p>
+          <a:p xmlns:a="http://schemas.openxmlformats.org/drawingml/2006/main">
+            <a:pPr algn="l">
+              <a:lnSpc>
+                <a:spcPct val="112000"/>
+              </a:lnSpc>
+              <a:buNone/>
+              <a:defRPr sz="2000" b="0">
+                <a:solidFill>
+                  <a:srgbClr val="173126"/>
+                </a:solidFill>
+                <a:latin typeface="Aptos"/>
+                <a:ea typeface="Aptos"/>
+                <a:cs typeface="Aptos"/>
+              </a:defRPr>
+            </a:pPr>
+            <a:r>
+              <a:rPr sz="2000" b="0">
+                <a:solidFill>
+                  <a:srgbClr val="173126"/>
+                </a:solidFill>
+                <a:latin typeface="Aptos"/>
+                <a:ea typeface="Aptos"/>
+                <a:cs typeface="Aptos"/>
+              </a:rPr>
+              <a:t>Answer every part in your own words.</a:t>
+            </a:r>
+          </a:p>
+        </p:txBody>
+      </p:sp>
+      <p:sp>
+        <p:nvSpPr>
+          <p:cNvPr id="8" name="">
+            <a:extLst xmlns:a="http://schemas.openxmlformats.org/drawingml/2006/main">
+              <a:ext uri="{FF2B5EF4-FFF2-40B4-BE49-F238E27FC236}">
+                <a16:creationId xmlns:a16="http://schemas.microsoft.com/office/drawing/2014/main" id="{012AFDCB-D0F2-46E8-A2C5-A82FAD2E6DC9}"/>
+              </a:ext>
+            </a:extLst>
+          </p:cNvPr>
+          <p:cNvSpPr>
+            <a:spLocks xmlns:a="http://schemas.openxmlformats.org/drawingml/2006/main" noGrp="1"/>
+          </p:cNvSpPr>
+          <p:nvPr/>
+        </p:nvSpPr>
+        <p:spPr>
+          <a:xfrm xmlns:a="http://schemas.openxmlformats.org/drawingml/2006/main">
+            <a:off x="590550" y="1219200"/>
+            <a:ext cx="10001250" cy="381000"/>
+          </a:xfrm>
+          <a:prstGeom xmlns:a="http://schemas.openxmlformats.org/drawingml/2006/main" prst="rect">
+            <a:avLst/>
+          </a:prstGeom>
+          <a:noFill xmlns:a="http://schemas.openxmlformats.org/drawingml/2006/main"/>
+          <a:ln xmlns:a="http://schemas.openxmlformats.org/drawingml/2006/main" w="0">
+            <a:noFill/>
+            <a:prstDash val="solid"/>
+          </a:ln>
+        </p:spPr>
+        <p:txBody>
+          <a:bodyPr xmlns:a="http://schemas.openxmlformats.org/drawingml/2006/main" lIns="38100" tIns="38100" rIns="38100" bIns="38100" anchor="t">
+            <a:normAutofit fontScale="95238"/>
+          </a:bodyPr>
+          <a:lstStyle xmlns:a="http://schemas.openxmlformats.org/drawingml/2006/main"/>
+          <a:p xmlns:a="http://schemas.openxmlformats.org/drawingml/2006/main">
+            <a:pPr algn="l">
+              <a:lnSpc>
+                <a:spcPct val="105000"/>
+              </a:lnSpc>
+              <a:buNone/>
+              <a:defRPr sz="2000" b="0">
+                <a:solidFill>
+                  <a:srgbClr val="5A665F"/>
+                </a:solidFill>
+                <a:latin typeface="Aptos"/>
+                <a:ea typeface="Aptos"/>
+                <a:cs typeface="Aptos"/>
+              </a:defRPr>
+            </a:pPr>
+            <a:r>
+              <a:rPr sz="2000" b="0">
+                <a:solidFill>
+                  <a:srgbClr val="5A665F"/>
+                </a:solidFill>
+                <a:latin typeface="Aptos"/>
+                <a:ea typeface="Aptos"/>
+                <a:cs typeface="Aptos"/>
+              </a:rPr>
+              <a:t>Prompt: Explain one decision from this module and justify it with evidence.</a:t>
+            </a:r>
+          </a:p>
+        </p:txBody>
+      </p:sp>
+      <p:sp>
+        <p:nvSpPr>
+          <p:cNvPr id="9" name="">
+            <a:extLst xmlns:a="http://schemas.openxmlformats.org/drawingml/2006/main">
+              <a:ext uri="{FF2B5EF4-FFF2-40B4-BE49-F238E27FC236}">
+                <a16:creationId xmlns:a16="http://schemas.microsoft.com/office/drawing/2014/main" id="{A32B86C7-8996-4653-8266-4D2E0AB2EBE9}"/>
+              </a:ext>
+            </a:extLst>
+          </p:cNvPr>
+          <p:cNvSpPr>
+            <a:spLocks xmlns:a="http://schemas.openxmlformats.org/drawingml/2006/main" noGrp="1"/>
+          </p:cNvSpPr>
+          <p:nvPr/>
+        </p:nvSpPr>
+        <p:spPr>
+          <a:xfrm xmlns:a="http://schemas.openxmlformats.org/drawingml/2006/main">
+            <a:off x="495300" y="2114550"/>
+            <a:ext cx="2619375" cy="2381250"/>
+          </a:xfrm>
+          <a:prstGeom xmlns:a="http://schemas.openxmlformats.org/drawingml/2006/main" prst="roundRect">
+            <a:avLst>
+              <a:gd name="adj" fmla="val 4800"/>
+            </a:avLst>
+          </a:prstGeom>
+          <a:noFill xmlns:a="http://schemas.openxmlformats.org/drawingml/2006/main"/>
+          <a:ln xmlns:a="http://schemas.openxmlformats.org/drawingml/2006/main" w="9525">
+            <a:solidFill>
+              <a:srgbClr val="EAD2AE"/>
+            </a:solidFill>
+            <a:prstDash val="solid"/>
+          </a:ln>
+        </p:spPr>
+      </p:sp>
+      <p:sp>
+        <p:nvSpPr>
+          <p:cNvPr id="10" name="">
+            <a:extLst xmlns:a="http://schemas.openxmlformats.org/drawingml/2006/main">
+              <a:ext uri="{FF2B5EF4-FFF2-40B4-BE49-F238E27FC236}">
+                <a16:creationId xmlns:a16="http://schemas.microsoft.com/office/drawing/2014/main" id="{04AAC949-5615-4D22-BF4B-899C2BC92B0F}"/>
+              </a:ext>
+            </a:extLst>
+          </p:cNvPr>
+          <p:cNvSpPr>
+            <a:spLocks xmlns:a="http://schemas.openxmlformats.org/drawingml/2006/main" noGrp="1"/>
+          </p:cNvSpPr>
+          <p:nvPr/>
+        </p:nvSpPr>
+        <p:spPr>
+          <a:xfrm xmlns:a="http://schemas.openxmlformats.org/drawingml/2006/main">
+            <a:off x="3400425" y="2114550"/>
+            <a:ext cx="2619375" cy="2381250"/>
+          </a:xfrm>
+          <a:prstGeom xmlns:a="http://schemas.openxmlformats.org/drawingml/2006/main" prst="roundRect">
+            <a:avLst>
+              <a:gd name="adj" fmla="val 4800"/>
+            </a:avLst>
+          </a:prstGeom>
+          <a:noFill xmlns:a="http://schemas.openxmlformats.org/drawingml/2006/main"/>
+          <a:ln xmlns:a="http://schemas.openxmlformats.org/drawingml/2006/main" w="9525">
+            <a:solidFill>
+              <a:srgbClr val="EAD2AE"/>
+            </a:solidFill>
+            <a:prstDash val="solid"/>
+          </a:ln>
+        </p:spPr>
+      </p:sp>
+      <p:sp>
+        <p:nvSpPr>
+          <p:cNvPr id="11" name="">
+            <a:extLst xmlns:a="http://schemas.openxmlformats.org/drawingml/2006/main">
+              <a:ext uri="{FF2B5EF4-FFF2-40B4-BE49-F238E27FC236}">
+                <a16:creationId xmlns:a16="http://schemas.microsoft.com/office/drawing/2014/main" id="{FEFF3D77-2007-4DE7-8015-51AFE93FC3C3}"/>
+              </a:ext>
+            </a:extLst>
+          </p:cNvPr>
+          <p:cNvSpPr>
+            <a:spLocks xmlns:a="http://schemas.openxmlformats.org/drawingml/2006/main" noGrp="1"/>
+          </p:cNvSpPr>
+          <p:nvPr/>
+        </p:nvSpPr>
+        <p:spPr>
+          <a:xfrm xmlns:a="http://schemas.openxmlformats.org/drawingml/2006/main">
+            <a:off x="6305550" y="2114550"/>
+            <a:ext cx="2619375" cy="2381250"/>
+          </a:xfrm>
+          <a:prstGeom xmlns:a="http://schemas.openxmlformats.org/drawingml/2006/main" prst="roundRect">
+            <a:avLst>
+              <a:gd name="adj" fmla="val 4800"/>
+            </a:avLst>
+          </a:prstGeom>
+          <a:noFill xmlns:a="http://schemas.openxmlformats.org/drawingml/2006/main"/>
+          <a:ln xmlns:a="http://schemas.openxmlformats.org/drawingml/2006/main" w="9525">
+            <a:solidFill>
+              <a:srgbClr val="D8941C"/>
+            </a:solidFill>
+            <a:prstDash val="solid"/>
+          </a:ln>
+        </p:spPr>
+      </p:sp>
+      <p:sp>
+        <p:nvSpPr>
+          <p:cNvPr id="12" name="">
+            <a:extLst xmlns:a="http://schemas.openxmlformats.org/drawingml/2006/main">
+              <a:ext uri="{FF2B5EF4-FFF2-40B4-BE49-F238E27FC236}">
+                <a16:creationId xmlns:a16="http://schemas.microsoft.com/office/drawing/2014/main" id="{B5349BD4-1445-4C0A-A24E-F5AF3F500EF4}"/>
+              </a:ext>
+            </a:extLst>
+          </p:cNvPr>
+          <p:cNvSpPr>
+            <a:spLocks xmlns:a="http://schemas.openxmlformats.org/drawingml/2006/main" noGrp="1"/>
+          </p:cNvSpPr>
+          <p:nvPr/>
+        </p:nvSpPr>
+        <p:spPr>
+          <a:xfrm xmlns:a="http://schemas.openxmlformats.org/drawingml/2006/main">
+            <a:off x="9210675" y="2114550"/>
+            <a:ext cx="2619375" cy="2381250"/>
+          </a:xfrm>
+          <a:prstGeom xmlns:a="http://schemas.openxmlformats.org/drawingml/2006/main" prst="roundRect">
+            <a:avLst>
+              <a:gd name="adj" fmla="val 4800"/>
+            </a:avLst>
+          </a:prstGeom>
+          <a:noFill xmlns:a="http://schemas.openxmlformats.org/drawingml/2006/main"/>
+          <a:ln xmlns:a="http://schemas.openxmlformats.org/drawingml/2006/main" w="9525">
+            <a:solidFill>
+              <a:srgbClr val="EAD2AE"/>
+            </a:solidFill>
+            <a:prstDash val="solid"/>
+          </a:ln>
+        </p:spPr>
+      </p:sp>
+      <p:sp>
+        <p:nvSpPr>
+          <p:cNvPr id="13" name="">
+            <a:extLst xmlns:a="http://schemas.openxmlformats.org/drawingml/2006/main">
+              <a:ext uri="{FF2B5EF4-FFF2-40B4-BE49-F238E27FC236}">
+                <a16:creationId xmlns:a16="http://schemas.microsoft.com/office/drawing/2014/main" id="{1CFEC007-2C89-493A-A5E9-ABED9A22F1C1}"/>
+              </a:ext>
+            </a:extLst>
+          </p:cNvPr>
+          <p:cNvSpPr>
+            <a:spLocks xmlns:a="http://schemas.openxmlformats.org/drawingml/2006/main" noGrp="1"/>
+          </p:cNvSpPr>
+          <p:nvPr/>
+        </p:nvSpPr>
+        <p:spPr>
+          <a:xfrm xmlns:a="http://schemas.openxmlformats.org/drawingml/2006/main">
+            <a:off x="704850" y="4972050"/>
+            <a:ext cx="10477500" cy="438150"/>
+          </a:xfrm>
+          <a:prstGeom xmlns:a="http://schemas.openxmlformats.org/drawingml/2006/main" prst="rect">
+            <a:avLst/>
+          </a:prstGeom>
+          <a:noFill xmlns:a="http://schemas.openxmlformats.org/drawingml/2006/main"/>
+          <a:ln xmlns:a="http://schemas.openxmlformats.org/drawingml/2006/main" w="0">
+            <a:noFill/>
+            <a:prstDash val="solid"/>
+          </a:ln>
+        </p:spPr>
+        <p:txBody>
+          <a:bodyPr xmlns:a="http://schemas.openxmlformats.org/drawingml/2006/main" lIns="38100" tIns="38100" rIns="38100" bIns="38100" anchor="t">
+            <a:normAutofit fontScale="100000"/>
+          </a:bodyPr>
+          <a:lstStyle xmlns:a="http://schemas.openxmlformats.org/drawingml/2006/main"/>
+          <a:p xmlns:a="http://schemas.openxmlformats.org/drawingml/2006/main">
+            <a:pPr algn="l">
+              <a:lnSpc>
+                <a:spcPct val="105000"/>
+              </a:lnSpc>
+              <a:buNone/>
+              <a:defRPr sz="1700" b="1">
+                <a:solidFill>
+                  <a:srgbClr val="5A665F"/>
+                </a:solidFill>
+                <a:latin typeface="Aptos"/>
+                <a:ea typeface="Aptos"/>
+                <a:cs typeface="Aptos"/>
+              </a:defRPr>
+            </a:pPr>
+            <a:r>
+              <a:rPr sz="1700" b="1">
+                <a:solidFill>
+                  <a:srgbClr val="5A665F"/>
+                </a:solidFill>
+                <a:latin typeface="Aptos"/>
+                <a:ea typeface="Aptos"/>
+                <a:cs typeface="Aptos"/>
+              </a:rPr>
+              <a:t>Sentence starter: I chose … because … The evidence I will save is …</a:t>
             </a:r>
           </a:p>
         </p:txBody>
@@ -4396,6 +6391,13 @@
 <file path=ppt/slides/slide8.xml><?xml version="1.0" encoding="utf-8"?>
 <p:sld xmlns:p="http://schemas.openxmlformats.org/presentationml/2006/main">
   <p:cSld>
+    <p:bg>
+      <p:bgPr>
+        <a:solidFill xmlns:a="http://schemas.openxmlformats.org/drawingml/2006/main">
+          <a:srgbClr val="F8F2E8"/>
+        </a:solidFill>
+      </p:bgPr>
+    </p:bg>
     <p:spTree>
       <p:nvGrpSpPr>
         <p:cNvPr id="1" name=""/>
@@ -4421,21 +6423,106 @@
         </p:nvSpPr>
         <p:spPr>
           <a:xfrm xmlns:a="http://schemas.openxmlformats.org/drawingml/2006/main">
-            <a:off x="393668" y="1738789"/>
-            <a:ext cx="9448800" cy="2491454"/>
+            <a:off x="628650" y="1352550"/>
+            <a:ext cx="5810250" cy="1257300"/>
           </a:xfrm>
           <a:prstGeom xmlns:a="http://schemas.openxmlformats.org/drawingml/2006/main" prst="rect">
             <a:avLst/>
           </a:prstGeom>
         </p:spPr>
         <p:txBody>
-          <a:bodyPr xmlns:a="http://schemas.openxmlformats.org/drawingml/2006/main" lIns="0" tIns="0" rIns="0" bIns="0" anchor="b">
-            <a:noAutofit/>
+          <a:bodyPr xmlns:a="http://schemas.openxmlformats.org/drawingml/2006/main" lIns="38100" tIns="38100" rIns="38100" bIns="38100" anchor="t">
+            <a:normAutofit fontScale="94145"/>
           </a:bodyPr>
           <a:lstStyle xmlns:a="http://schemas.openxmlformats.org/drawingml/2006/main"/>
           <a:p xmlns:a="http://schemas.openxmlformats.org/drawingml/2006/main">
             <a:pPr algn="l">
-              <a:defRPr sz="6000">
+              <a:lnSpc>
+                <a:spcPct val="98000"/>
+              </a:lnSpc>
+              <a:buNone/>
+              <a:defRPr sz="4200" b="1">
+                <a:solidFill>
+                  <a:srgbClr val="173126"/>
+                </a:solidFill>
+                <a:latin typeface="Aptos"/>
+                <a:ea typeface="Aptos"/>
+                <a:cs typeface="Aptos"/>
+              </a:defRPr>
+            </a:pPr>
+            <a:r>
+              <a:rPr sz="4200" b="1">
+                <a:solidFill>
+                  <a:srgbClr val="173126"/>
+                </a:solidFill>
+                <a:latin typeface="Aptos"/>
+                <a:ea typeface="Aptos"/>
+                <a:cs typeface="Aptos"/>
+              </a:rPr>
+              <a:t>Exit ticket: prove what you learned</a:t>
+            </a:r>
+          </a:p>
+        </p:txBody>
+      </p:sp>
+      <p:sp>
+        <p:nvSpPr>
+          <p:cNvPr id="2" name="Subtitle-4-2">
+            <a:extLst xmlns:a="http://schemas.openxmlformats.org/drawingml/2006/main">
+              <a:ext uri="{FF2B5EF4-FFF2-40B4-BE49-F238E27FC236}">
+                <a16:creationId xmlns:a16="http://schemas.microsoft.com/office/drawing/2014/main" id="{33778D86-9AA8-4F9C-9A11-A6529DD4F0EE}"/>
+              </a:ext>
+            </a:extLst>
+          </p:cNvPr>
+          <p:cNvSpPr>
+            <a:spLocks xmlns:a="http://schemas.openxmlformats.org/drawingml/2006/main" noGrp="1"/>
+          </p:cNvSpPr>
+          <p:nvPr/>
+        </p:nvSpPr>
+        <p:spPr>
+          <a:xfrm xmlns:a="http://schemas.openxmlformats.org/drawingml/2006/main">
+            <a:off x="666750" y="3048000"/>
+            <a:ext cx="5429250" cy="2095500"/>
+          </a:xfrm>
+          <a:prstGeom xmlns:a="http://schemas.openxmlformats.org/drawingml/2006/main" prst="rect">
+            <a:avLst/>
+          </a:prstGeom>
+        </p:spPr>
+        <p:txBody>
+          <a:bodyPr xmlns:a="http://schemas.openxmlformats.org/drawingml/2006/main" lIns="38100" tIns="38100" rIns="38100" bIns="38100" anchor="t">
+            <a:normAutofit fontScale="100000"/>
+          </a:bodyPr>
+          <a:lstStyle xmlns:a="http://schemas.openxmlformats.org/drawingml/2006/main"/>
+          <a:p xmlns:a="http://schemas.openxmlformats.org/drawingml/2006/main">
+            <a:pPr algn="l">
+              <a:lnSpc>
+                <a:spcPct val="115000"/>
+              </a:lnSpc>
+              <a:buNone/>
+              <a:defRPr sz="2200" b="0">
+                <a:solidFill>
+                  <a:srgbClr val="173126"/>
+                </a:solidFill>
+                <a:latin typeface="Aptos"/>
+                <a:ea typeface="Aptos"/>
+                <a:cs typeface="Aptos"/>
+              </a:defRPr>
+            </a:pPr>
+            <a:r>
+              <a:rPr sz="2200" b="0">
+                <a:solidFill>
+                  <a:srgbClr val="173126"/>
+                </a:solidFill>
+                <a:latin typeface="Aptos"/>
+                <a:ea typeface="Aptos"/>
+                <a:cs typeface="Aptos"/>
+              </a:rPr>
+              <a:t>1. Name one decision you can now justify.</a:t>
+            </a:r>
+          </a:p>
+          <a:p xmlns:a="http://schemas.openxmlformats.org/drawingml/2006/main">
+            <a:pPr algn="l">
+              <a:buNone/>
+              <a:defRPr sz="2400">
                 <a:solidFill>
                   <a:srgbClr val="000000"/>
                 </a:solidFill>
@@ -4445,41 +6532,39 @@
               </a:defRPr>
             </a:pPr>
             <a:r>
-              <a:t>Return to the module</a:t>
-            </a:r>
-          </a:p>
-        </p:txBody>
-      </p:sp>
-      <p:sp>
-        <p:nvSpPr>
-          <p:cNvPr id="2" name="Subtitle-4-2">
-            <a:extLst xmlns:a="http://schemas.openxmlformats.org/drawingml/2006/main">
-              <a:ext uri="{FF2B5EF4-FFF2-40B4-BE49-F238E27FC236}">
-                <a16:creationId xmlns:a16="http://schemas.microsoft.com/office/drawing/2014/main" id="{33778D86-9AA8-4F9C-9A11-A6529DD4F0EE}"/>
-              </a:ext>
-            </a:extLst>
-          </p:cNvPr>
-          <p:cNvSpPr>
-            <a:spLocks xmlns:a="http://schemas.openxmlformats.org/drawingml/2006/main" noGrp="1"/>
-          </p:cNvSpPr>
-          <p:nvPr/>
-        </p:nvSpPr>
-        <p:spPr>
-          <a:xfrm xmlns:a="http://schemas.openxmlformats.org/drawingml/2006/main">
-            <a:off x="393668" y="4973288"/>
-            <a:ext cx="3568732" cy="1080230"/>
-          </a:xfrm>
-          <a:prstGeom xmlns:a="http://schemas.openxmlformats.org/drawingml/2006/main" prst="rect">
-            <a:avLst/>
-          </a:prstGeom>
-        </p:spPr>
-        <p:txBody>
-          <a:bodyPr xmlns:a="http://schemas.openxmlformats.org/drawingml/2006/main" lIns="0" tIns="0" rIns="0" bIns="0">
-            <a:noAutofit/>
-          </a:bodyPr>
-          <a:lstStyle xmlns:a="http://schemas.openxmlformats.org/drawingml/2006/main"/>
-          <a:p xmlns:a="http://schemas.openxmlformats.org/drawingml/2006/main">
-            <a:pPr algn="l">
+              <a:t/>
+            </a:r>
+          </a:p>
+          <a:p xmlns:a="http://schemas.openxmlformats.org/drawingml/2006/main">
+            <a:pPr algn="l">
+              <a:lnSpc>
+                <a:spcPct val="115000"/>
+              </a:lnSpc>
+              <a:buNone/>
+              <a:defRPr sz="2200" b="0">
+                <a:solidFill>
+                  <a:srgbClr val="173126"/>
+                </a:solidFill>
+                <a:latin typeface="Aptos"/>
+                <a:ea typeface="Aptos"/>
+                <a:cs typeface="Aptos"/>
+              </a:defRPr>
+            </a:pPr>
+            <a:r>
+              <a:rPr sz="2200" b="0">
+                <a:solidFill>
+                  <a:srgbClr val="173126"/>
+                </a:solidFill>
+                <a:latin typeface="Aptos"/>
+                <a:ea typeface="Aptos"/>
+                <a:cs typeface="Aptos"/>
+              </a:rPr>
+              <a:t>2. Identify the evidence you will save.</a:t>
+            </a:r>
+          </a:p>
+          <a:p xmlns:a="http://schemas.openxmlformats.org/drawingml/2006/main">
+            <a:pPr algn="l">
+              <a:buNone/>
               <a:defRPr sz="2400">
                 <a:solidFill>
                   <a:srgbClr val="000000"/>
@@ -4490,37 +6575,34 @@
               </a:defRPr>
             </a:pPr>
             <a:r>
-              <a:t>Complete the knowledge checks.</a:t>
-            </a:r>
-          </a:p>
-          <a:p xmlns:a="http://schemas.openxmlformats.org/drawingml/2006/main">
-            <a:pPr algn="l">
-              <a:defRPr sz="2400">
-                <a:solidFill>
-                  <a:srgbClr val="000000"/>
-                </a:solidFill>
-                <a:latin typeface="Helvetica Neue"/>
-                <a:ea typeface="Helvetica Neue"/>
-                <a:cs typeface="Helvetica Neue"/>
-              </a:defRPr>
-            </a:pPr>
-            <a:r>
-              <a:t>Write your guided response.</a:t>
-            </a:r>
-          </a:p>
-          <a:p xmlns:a="http://schemas.openxmlformats.org/drawingml/2006/main">
-            <a:pPr algn="l">
-              <a:defRPr sz="2400">
-                <a:solidFill>
-                  <a:srgbClr val="000000"/>
-                </a:solidFill>
-                <a:latin typeface="Helvetica Neue"/>
-                <a:ea typeface="Helvetica Neue"/>
-                <a:cs typeface="Helvetica Neue"/>
-              </a:defRPr>
-            </a:pPr>
-            <a:r>
-              <a:t>Save the mapped folio evidence.</a:t>
+              <a:t/>
+            </a:r>
+          </a:p>
+          <a:p xmlns:a="http://schemas.openxmlformats.org/drawingml/2006/main">
+            <a:pPr algn="l">
+              <a:lnSpc>
+                <a:spcPct val="115000"/>
+              </a:lnSpc>
+              <a:buNone/>
+              <a:defRPr sz="2200" b="0">
+                <a:solidFill>
+                  <a:srgbClr val="173126"/>
+                </a:solidFill>
+                <a:latin typeface="Aptos"/>
+                <a:ea typeface="Aptos"/>
+                <a:cs typeface="Aptos"/>
+              </a:defRPr>
+            </a:pPr>
+            <a:r>
+              <a:rPr sz="2200" b="0">
+                <a:solidFill>
+                  <a:srgbClr val="173126"/>
+                </a:solidFill>
+                <a:latin typeface="Aptos"/>
+                <a:ea typeface="Aptos"/>
+                <a:cs typeface="Aptos"/>
+              </a:rPr>
+              <a:t>3. State your next safe, accurate action.</a:t>
             </a:r>
           </a:p>
         </p:txBody>
@@ -4541,35 +6623,72 @@
         </p:nvSpPr>
         <p:spPr>
           <a:xfrm xmlns:a="http://schemas.openxmlformats.org/drawingml/2006/main">
-            <a:off x="393668" y="392240"/>
-            <a:ext cx="1612868" cy="649129"/>
+            <a:off x="666750" y="819150"/>
+            <a:ext cx="2857500" cy="266700"/>
           </a:xfrm>
           <a:prstGeom xmlns:a="http://schemas.openxmlformats.org/drawingml/2006/main" prst="rect">
             <a:avLst/>
           </a:prstGeom>
         </p:spPr>
         <p:txBody>
-          <a:bodyPr xmlns:a="http://schemas.openxmlformats.org/drawingml/2006/main" lIns="0" tIns="0" rIns="0" bIns="0">
-            <a:noAutofit/>
+          <a:bodyPr xmlns:a="http://schemas.openxmlformats.org/drawingml/2006/main" lIns="38100" tIns="38100" rIns="38100" bIns="38100" anchor="t">
+            <a:normAutofit fontScale="85034"/>
           </a:bodyPr>
           <a:lstStyle xmlns:a="http://schemas.openxmlformats.org/drawingml/2006/main"/>
           <a:p xmlns:a="http://schemas.openxmlformats.org/drawingml/2006/main">
             <a:pPr algn="l">
-              <a:defRPr sz="2400">
-                <a:solidFill>
-                  <a:srgbClr val="000000"/>
-                </a:solidFill>
-                <a:latin typeface="Helvetica Neue"/>
-                <a:ea typeface="Helvetica Neue"/>
-                <a:cs typeface="Helvetica Neue"/>
-              </a:defRPr>
-            </a:pPr>
-            <a:r>
-              <a:t>NEXT STEP</a:t>
-            </a:r>
-          </a:p>
-        </p:txBody>
-      </p:sp>
+              <a:lnSpc>
+                <a:spcPct val="105000"/>
+              </a:lnSpc>
+              <a:buNone/>
+              <a:defRPr sz="1400" b="1">
+                <a:solidFill>
+                  <a:srgbClr val="D8941C"/>
+                </a:solidFill>
+                <a:latin typeface="Aptos"/>
+                <a:ea typeface="Aptos"/>
+                <a:cs typeface="Aptos"/>
+              </a:defRPr>
+            </a:pPr>
+            <a:r>
+              <a:rPr sz="1400" b="1">
+                <a:solidFill>
+                  <a:srgbClr val="D8941C"/>
+                </a:solidFill>
+                <a:latin typeface="Aptos"/>
+                <a:ea typeface="Aptos"/>
+                <a:cs typeface="Aptos"/>
+              </a:rPr>
+              <a:t>YOUR NEXT MOVE</a:t>
+            </a:r>
+          </a:p>
+        </p:txBody>
+      </p:sp>
+      <p:pic>
+        <p:nvPicPr>
+          <p:cNvPr id="9" name=""/>
+          <p:cNvPicPr>
+            <a:picLocks xmlns:a="http://schemas.openxmlformats.org/drawingml/2006/main" noChangeAspect="1"/>
+          </p:cNvPicPr>
+          <p:nvPr/>
+        </p:nvPicPr>
+        <p:blipFill>
+          <a:blip xmlns:r="http://schemas.openxmlformats.org/officeDocument/2006/relationships" xmlns:a="http://schemas.openxmlformats.org/drawingml/2006/main" r:embed="Rb42f0bfb64aa46b1"/>
+          <a:srcRect xmlns:a="http://schemas.openxmlformats.org/drawingml/2006/main" l="11806" t="0" r="11806" b="0"/>
+          <a:stretch xmlns:a="http://schemas.openxmlformats.org/drawingml/2006/main">
+            <a:fillRect l="0" t="0" r="0" b="0"/>
+          </a:stretch>
+        </p:blipFill>
+        <p:spPr>
+          <a:xfrm xmlns:a="http://schemas.openxmlformats.org/drawingml/2006/main">
+            <a:off x="6953250" y="0"/>
+            <a:ext cx="5238750" cy="6858000"/>
+          </a:xfrm>
+          <a:prstGeom xmlns:a="http://schemas.openxmlformats.org/drawingml/2006/main" prst="rect">
+            <a:avLst/>
+          </a:prstGeom>
+        </p:spPr>
+      </p:pic>
     </p:spTree>
     <p:extLst>
       <p:ext uri="{BB962C8B-B14F-4D97-AF65-F5344CB8AC3E}">
